--- a/Admin/Docs.pptx
+++ b/Admin/Docs.pptx
@@ -285,7 +285,7 @@
           <a:p>
             <a:fld id="{5AD74501-8691-4646-B472-1139202FB98B}" type="datetimeFigureOut">
               <a:rPr lang="en-US" smtClean="0"/>
-              <a:t>4/2/2026</a:t>
+              <a:t>4/12/2026</a:t>
             </a:fld>
             <a:endParaRPr lang="en-US"/>
           </a:p>
@@ -483,7 +483,7 @@
           <a:p>
             <a:fld id="{5AD74501-8691-4646-B472-1139202FB98B}" type="datetimeFigureOut">
               <a:rPr lang="en-US" smtClean="0"/>
-              <a:t>4/2/2026</a:t>
+              <a:t>4/12/2026</a:t>
             </a:fld>
             <a:endParaRPr lang="en-US"/>
           </a:p>
@@ -691,7 +691,7 @@
           <a:p>
             <a:fld id="{5AD74501-8691-4646-B472-1139202FB98B}" type="datetimeFigureOut">
               <a:rPr lang="en-US" smtClean="0"/>
-              <a:t>4/2/2026</a:t>
+              <a:t>4/12/2026</a:t>
             </a:fld>
             <a:endParaRPr lang="en-US"/>
           </a:p>
@@ -889,7 +889,7 @@
           <a:p>
             <a:fld id="{5AD74501-8691-4646-B472-1139202FB98B}" type="datetimeFigureOut">
               <a:rPr lang="en-US" smtClean="0"/>
-              <a:t>4/2/2026</a:t>
+              <a:t>4/12/2026</a:t>
             </a:fld>
             <a:endParaRPr lang="en-US"/>
           </a:p>
@@ -1164,7 +1164,7 @@
           <a:p>
             <a:fld id="{5AD74501-8691-4646-B472-1139202FB98B}" type="datetimeFigureOut">
               <a:rPr lang="en-US" smtClean="0"/>
-              <a:t>4/2/2026</a:t>
+              <a:t>4/12/2026</a:t>
             </a:fld>
             <a:endParaRPr lang="en-US"/>
           </a:p>
@@ -1429,7 +1429,7 @@
           <a:p>
             <a:fld id="{5AD74501-8691-4646-B472-1139202FB98B}" type="datetimeFigureOut">
               <a:rPr lang="en-US" smtClean="0"/>
-              <a:t>4/2/2026</a:t>
+              <a:t>4/12/2026</a:t>
             </a:fld>
             <a:endParaRPr lang="en-US"/>
           </a:p>
@@ -1841,7 +1841,7 @@
           <a:p>
             <a:fld id="{5AD74501-8691-4646-B472-1139202FB98B}" type="datetimeFigureOut">
               <a:rPr lang="en-US" smtClean="0"/>
-              <a:t>4/2/2026</a:t>
+              <a:t>4/12/2026</a:t>
             </a:fld>
             <a:endParaRPr lang="en-US"/>
           </a:p>
@@ -1982,7 +1982,7 @@
           <a:p>
             <a:fld id="{5AD74501-8691-4646-B472-1139202FB98B}" type="datetimeFigureOut">
               <a:rPr lang="en-US" smtClean="0"/>
-              <a:t>4/2/2026</a:t>
+              <a:t>4/12/2026</a:t>
             </a:fld>
             <a:endParaRPr lang="en-US"/>
           </a:p>
@@ -2095,7 +2095,7 @@
           <a:p>
             <a:fld id="{5AD74501-8691-4646-B472-1139202FB98B}" type="datetimeFigureOut">
               <a:rPr lang="en-US" smtClean="0"/>
-              <a:t>4/2/2026</a:t>
+              <a:t>4/12/2026</a:t>
             </a:fld>
             <a:endParaRPr lang="en-US"/>
           </a:p>
@@ -2406,7 +2406,7 @@
           <a:p>
             <a:fld id="{5AD74501-8691-4646-B472-1139202FB98B}" type="datetimeFigureOut">
               <a:rPr lang="en-US" smtClean="0"/>
-              <a:t>4/2/2026</a:t>
+              <a:t>4/12/2026</a:t>
             </a:fld>
             <a:endParaRPr lang="en-US"/>
           </a:p>
@@ -2694,7 +2694,7 @@
           <a:p>
             <a:fld id="{5AD74501-8691-4646-B472-1139202FB98B}" type="datetimeFigureOut">
               <a:rPr lang="en-US" smtClean="0"/>
-              <a:t>4/2/2026</a:t>
+              <a:t>4/12/2026</a:t>
             </a:fld>
             <a:endParaRPr lang="en-US"/>
           </a:p>
@@ -2935,7 +2935,7 @@
           <a:p>
             <a:fld id="{5AD74501-8691-4646-B472-1139202FB98B}" type="datetimeFigureOut">
               <a:rPr lang="en-US" smtClean="0"/>
-              <a:t>4/2/2026</a:t>
+              <a:t>4/12/2026</a:t>
             </a:fld>
             <a:endParaRPr lang="en-US"/>
           </a:p>
@@ -4932,247 +4932,268 @@
           <a:chExt cx="0" cy="0"/>
         </a:xfrm>
       </p:grpSpPr>
-      <p:sp>
-        <p:nvSpPr>
-          <p:cNvPr id="2" name="Freeform: Shape 1">
+      <p:grpSp>
+        <p:nvGrpSpPr>
+          <p:cNvPr id="3" name="Group 2">
             <a:extLst>
               <a:ext uri="{FF2B5EF4-FFF2-40B4-BE49-F238E27FC236}">
-                <a16:creationId xmlns:a16="http://schemas.microsoft.com/office/drawing/2014/main" id="{71EA1A43-1875-A8CC-5892-CACF650673D7}"/>
+                <a16:creationId xmlns:a16="http://schemas.microsoft.com/office/drawing/2014/main" id="{2DD7C84A-F75F-89CA-D929-982EE7B9F86E}"/>
               </a:ext>
             </a:extLst>
           </p:cNvPr>
-          <p:cNvSpPr/>
+          <p:cNvGrpSpPr/>
           <p:nvPr/>
-        </p:nvSpPr>
-        <p:spPr>
-          <a:xfrm>
-            <a:off x="4267106" y="552917"/>
-            <a:ext cx="7229138" cy="6228674"/>
-          </a:xfrm>
-          <a:custGeom>
-            <a:avLst/>
-            <a:gdLst>
-              <a:gd name="csX0" fmla="*/ -1 w 7229138"/>
-              <a:gd name="csY0" fmla="*/ 3114376 h 6228674"/>
-              <a:gd name="csX1" fmla="*/ 3614568 w 7229138"/>
-              <a:gd name="csY1" fmla="*/ 40 h 6228674"/>
-              <a:gd name="csX2" fmla="*/ 7229137 w 7229138"/>
-              <a:gd name="csY2" fmla="*/ 3114376 h 6228674"/>
-              <a:gd name="csX3" fmla="*/ 3614568 w 7229138"/>
-              <a:gd name="csY3" fmla="*/ 6228715 h 6228674"/>
-              <a:gd name="csX4" fmla="*/ -1 w 7229138"/>
-              <a:gd name="csY4" fmla="*/ 3114376 h 6228674"/>
-            </a:gdLst>
-            <a:ahLst/>
-            <a:cxnLst>
-              <a:cxn ang="0">
-                <a:pos x="csX0" y="csY0"/>
-              </a:cxn>
-              <a:cxn ang="0">
-                <a:pos x="csX1" y="csY1"/>
-              </a:cxn>
-              <a:cxn ang="0">
-                <a:pos x="csX2" y="csY2"/>
-              </a:cxn>
-              <a:cxn ang="0">
-                <a:pos x="csX3" y="csY3"/>
-              </a:cxn>
-              <a:cxn ang="0">
-                <a:pos x="csX4" y="csY4"/>
-              </a:cxn>
-            </a:cxnLst>
-            <a:rect l="l" t="t" r="r" b="b"/>
-            <a:pathLst>
-              <a:path w="7229138" h="6228674">
-                <a:moveTo>
-                  <a:pt x="-1" y="3114376"/>
-                </a:moveTo>
-                <a:cubicBezTo>
-                  <a:pt x="-1" y="1394373"/>
-                  <a:pt x="1618301" y="40"/>
-                  <a:pt x="3614568" y="40"/>
-                </a:cubicBezTo>
-                <a:cubicBezTo>
-                  <a:pt x="5610843" y="40"/>
-                  <a:pt x="7229137" y="1394373"/>
-                  <a:pt x="7229137" y="3114376"/>
-                </a:cubicBezTo>
-                <a:cubicBezTo>
-                  <a:pt x="7229137" y="4834378"/>
-                  <a:pt x="5610843" y="6228715"/>
-                  <a:pt x="3614568" y="6228715"/>
-                </a:cubicBezTo>
-                <a:cubicBezTo>
-                  <a:pt x="1618301" y="6228715"/>
-                  <a:pt x="-1" y="4834378"/>
-                  <a:pt x="-1" y="3114376"/>
-                </a:cubicBezTo>
-                <a:close/>
-              </a:path>
-            </a:pathLst>
-          </a:custGeom>
-          <a:solidFill>
-            <a:schemeClr val="accent5">
-              <a:lumMod val="50000"/>
-              <a:alpha val="15000"/>
-            </a:schemeClr>
-          </a:solidFill>
-          <a:ln w="8067" cap="flat">
-            <a:noFill/>
-            <a:prstDash val="solid"/>
-            <a:miter/>
-          </a:ln>
-        </p:spPr>
-        <p:txBody>
-          <a:bodyPr/>
-          <a:lstStyle/>
-          <a:p>
-            <a:endParaRPr lang="en-US"/>
-          </a:p>
-        </p:txBody>
-      </p:sp>
-      <p:sp>
-        <p:nvSpPr>
-          <p:cNvPr id="9" name="Freeform: Shape 8">
-            <a:extLst>
-              <a:ext uri="{FF2B5EF4-FFF2-40B4-BE49-F238E27FC236}">
-                <a16:creationId xmlns:a16="http://schemas.microsoft.com/office/drawing/2014/main" id="{1D9624A8-0D42-F92F-F643-EAA8B2D2EBE8}"/>
-              </a:ext>
-            </a:extLst>
-          </p:cNvPr>
-          <p:cNvSpPr/>
-          <p:nvPr/>
-        </p:nvSpPr>
-        <p:spPr>
+        </p:nvGrpSpPr>
+        <p:grpSpPr>
           <a:xfrm>
             <a:off x="4267106" y="72185"/>
-            <a:ext cx="7229139" cy="6228677"/>
+            <a:ext cx="7229139" cy="6709406"/>
+            <a:chOff x="4267106" y="72185"/>
+            <a:chExt cx="7229139" cy="6709406"/>
           </a:xfrm>
-          <a:custGeom>
-            <a:avLst/>
-            <a:gdLst>
-              <a:gd name="csX0" fmla="*/ -1371 w 7229139"/>
-              <a:gd name="csY0" fmla="*/ 3112940 h 6228677"/>
-              <a:gd name="csX1" fmla="*/ 3613199 w 7229139"/>
-              <a:gd name="csY1" fmla="*/ -1399 h 6228677"/>
-              <a:gd name="csX2" fmla="*/ 7227768 w 7229139"/>
-              <a:gd name="csY2" fmla="*/ 3112940 h 6228677"/>
-              <a:gd name="csX3" fmla="*/ 3613199 w 7229139"/>
-              <a:gd name="csY3" fmla="*/ 6227279 h 6228677"/>
-              <a:gd name="csX4" fmla="*/ -1371 w 7229139"/>
-              <a:gd name="csY4" fmla="*/ 3112940 h 6228677"/>
-            </a:gdLst>
-            <a:ahLst/>
-            <a:cxnLst>
-              <a:cxn ang="0">
-                <a:pos x="csX0" y="csY0"/>
-              </a:cxn>
-              <a:cxn ang="0">
-                <a:pos x="csX1" y="csY1"/>
-              </a:cxn>
-              <a:cxn ang="0">
-                <a:pos x="csX2" y="csY2"/>
-              </a:cxn>
-              <a:cxn ang="0">
-                <a:pos x="csX3" y="csY3"/>
-              </a:cxn>
-              <a:cxn ang="0">
-                <a:pos x="csX4" y="csY4"/>
-              </a:cxn>
-            </a:cxnLst>
-            <a:rect l="l" t="t" r="r" b="b"/>
-            <a:pathLst>
-              <a:path w="7229139" h="6228677">
-                <a:moveTo>
-                  <a:pt x="-1371" y="3112940"/>
-                </a:moveTo>
-                <a:cubicBezTo>
-                  <a:pt x="-1371" y="1392953"/>
-                  <a:pt x="1616955" y="-1399"/>
-                  <a:pt x="3613199" y="-1399"/>
-                </a:cubicBezTo>
-                <a:cubicBezTo>
-                  <a:pt x="5609441" y="-1399"/>
-                  <a:pt x="7227768" y="1392953"/>
-                  <a:pt x="7227768" y="3112940"/>
-                </a:cubicBezTo>
-                <a:cubicBezTo>
-                  <a:pt x="7227768" y="4832927"/>
-                  <a:pt x="5609441" y="6227279"/>
-                  <a:pt x="3613199" y="6227279"/>
-                </a:cubicBezTo>
-                <a:cubicBezTo>
-                  <a:pt x="1616955" y="6227279"/>
-                  <a:pt x="-1371" y="4832927"/>
-                  <a:pt x="-1371" y="3112940"/>
-                </a:cubicBezTo>
-                <a:close/>
-              </a:path>
-            </a:pathLst>
-          </a:custGeom>
-          <a:solidFill>
-            <a:schemeClr val="accent5">
-              <a:lumMod val="50000"/>
-              <a:alpha val="15000"/>
-            </a:schemeClr>
-          </a:solidFill>
-          <a:ln w="8067" cap="flat">
-            <a:noFill/>
-            <a:prstDash val="solid"/>
-            <a:miter/>
-          </a:ln>
-        </p:spPr>
-        <p:txBody>
-          <a:bodyPr/>
-          <a:lstStyle/>
-          <a:p>
-            <a:endParaRPr lang="en-US"/>
-          </a:p>
-        </p:txBody>
-      </p:sp>
-      <p:pic>
-        <p:nvPicPr>
-          <p:cNvPr id="71" name="Graphic 70" descr="Handshake outline">
-            <a:extLst>
-              <a:ext uri="{FF2B5EF4-FFF2-40B4-BE49-F238E27FC236}">
-                <a16:creationId xmlns:a16="http://schemas.microsoft.com/office/drawing/2014/main" id="{AA291953-9BBF-33E0-DF83-D81DD48CB98E}"/>
-              </a:ext>
-            </a:extLst>
-          </p:cNvPr>
-          <p:cNvPicPr>
-            <a:picLocks noChangeAspect="1"/>
-          </p:cNvPicPr>
-          <p:nvPr/>
-        </p:nvPicPr>
-        <p:blipFill>
-          <a:blip>
-            <a:extLst>
-              <a:ext uri="{96DAC541-7B7A-43D3-8B79-37D633B846F1}">
-                <asvg:svgBlip xmlns:asvg="http://schemas.microsoft.com/office/drawing/2016/SVG/main" r:embed="rId2"/>
-              </a:ext>
-            </a:extLst>
-          </a:blip>
-          <a:stretch>
-            <a:fillRect/>
-          </a:stretch>
-        </p:blipFill>
-        <p:spPr>
-          <a:xfrm>
-            <a:off x="5367075" y="914400"/>
-            <a:ext cx="5029200" cy="5029200"/>
-          </a:xfrm>
-          <a:prstGeom prst="rect">
-            <a:avLst/>
-          </a:prstGeom>
-          <a:effectLst>
-            <a:outerShdw blurRad="50800" dist="127000" dir="2700000" algn="tl" rotWithShape="0">
-              <a:schemeClr val="accent1">
-                <a:alpha val="40000"/>
+        </p:grpSpPr>
+        <p:sp>
+          <p:nvSpPr>
+            <p:cNvPr id="2" name="Freeform: Shape 1">
+              <a:extLst>
+                <a:ext uri="{FF2B5EF4-FFF2-40B4-BE49-F238E27FC236}">
+                  <a16:creationId xmlns:a16="http://schemas.microsoft.com/office/drawing/2014/main" id="{71EA1A43-1875-A8CC-5892-CACF650673D7}"/>
+                </a:ext>
+              </a:extLst>
+            </p:cNvPr>
+            <p:cNvSpPr/>
+            <p:nvPr/>
+          </p:nvSpPr>
+          <p:spPr>
+            <a:xfrm>
+              <a:off x="4267106" y="552917"/>
+              <a:ext cx="7229138" cy="6228674"/>
+            </a:xfrm>
+            <a:custGeom>
+              <a:avLst/>
+              <a:gdLst>
+                <a:gd name="csX0" fmla="*/ -1 w 7229138"/>
+                <a:gd name="csY0" fmla="*/ 3114376 h 6228674"/>
+                <a:gd name="csX1" fmla="*/ 3614568 w 7229138"/>
+                <a:gd name="csY1" fmla="*/ 40 h 6228674"/>
+                <a:gd name="csX2" fmla="*/ 7229137 w 7229138"/>
+                <a:gd name="csY2" fmla="*/ 3114376 h 6228674"/>
+                <a:gd name="csX3" fmla="*/ 3614568 w 7229138"/>
+                <a:gd name="csY3" fmla="*/ 6228715 h 6228674"/>
+                <a:gd name="csX4" fmla="*/ -1 w 7229138"/>
+                <a:gd name="csY4" fmla="*/ 3114376 h 6228674"/>
+              </a:gdLst>
+              <a:ahLst/>
+              <a:cxnLst>
+                <a:cxn ang="0">
+                  <a:pos x="csX0" y="csY0"/>
+                </a:cxn>
+                <a:cxn ang="0">
+                  <a:pos x="csX1" y="csY1"/>
+                </a:cxn>
+                <a:cxn ang="0">
+                  <a:pos x="csX2" y="csY2"/>
+                </a:cxn>
+                <a:cxn ang="0">
+                  <a:pos x="csX3" y="csY3"/>
+                </a:cxn>
+                <a:cxn ang="0">
+                  <a:pos x="csX4" y="csY4"/>
+                </a:cxn>
+              </a:cxnLst>
+              <a:rect l="l" t="t" r="r" b="b"/>
+              <a:pathLst>
+                <a:path w="7229138" h="6228674">
+                  <a:moveTo>
+                    <a:pt x="-1" y="3114376"/>
+                  </a:moveTo>
+                  <a:cubicBezTo>
+                    <a:pt x="-1" y="1394373"/>
+                    <a:pt x="1618301" y="40"/>
+                    <a:pt x="3614568" y="40"/>
+                  </a:cubicBezTo>
+                  <a:cubicBezTo>
+                    <a:pt x="5610843" y="40"/>
+                    <a:pt x="7229137" y="1394373"/>
+                    <a:pt x="7229137" y="3114376"/>
+                  </a:cubicBezTo>
+                  <a:cubicBezTo>
+                    <a:pt x="7229137" y="4834378"/>
+                    <a:pt x="5610843" y="6228715"/>
+                    <a:pt x="3614568" y="6228715"/>
+                  </a:cubicBezTo>
+                  <a:cubicBezTo>
+                    <a:pt x="1618301" y="6228715"/>
+                    <a:pt x="-1" y="4834378"/>
+                    <a:pt x="-1" y="3114376"/>
+                  </a:cubicBezTo>
+                  <a:close/>
+                </a:path>
+              </a:pathLst>
+            </a:custGeom>
+            <a:solidFill>
+              <a:schemeClr val="accent5">
+                <a:lumMod val="50000"/>
+                <a:alpha val="15000"/>
               </a:schemeClr>
-            </a:outerShdw>
-          </a:effectLst>
-        </p:spPr>
-      </p:pic>
+            </a:solidFill>
+            <a:ln w="8067" cap="flat">
+              <a:noFill/>
+              <a:prstDash val="solid"/>
+              <a:miter/>
+            </a:ln>
+          </p:spPr>
+          <p:txBody>
+            <a:bodyPr/>
+            <a:lstStyle/>
+            <a:p>
+              <a:endParaRPr lang="en-US"/>
+            </a:p>
+          </p:txBody>
+        </p:sp>
+        <p:sp>
+          <p:nvSpPr>
+            <p:cNvPr id="9" name="Freeform: Shape 8">
+              <a:extLst>
+                <a:ext uri="{FF2B5EF4-FFF2-40B4-BE49-F238E27FC236}">
+                  <a16:creationId xmlns:a16="http://schemas.microsoft.com/office/drawing/2014/main" id="{1D9624A8-0D42-F92F-F643-EAA8B2D2EBE8}"/>
+                </a:ext>
+              </a:extLst>
+            </p:cNvPr>
+            <p:cNvSpPr/>
+            <p:nvPr/>
+          </p:nvSpPr>
+          <p:spPr>
+            <a:xfrm>
+              <a:off x="4267106" y="72185"/>
+              <a:ext cx="7229139" cy="6228677"/>
+            </a:xfrm>
+            <a:custGeom>
+              <a:avLst/>
+              <a:gdLst>
+                <a:gd name="csX0" fmla="*/ -1371 w 7229139"/>
+                <a:gd name="csY0" fmla="*/ 3112940 h 6228677"/>
+                <a:gd name="csX1" fmla="*/ 3613199 w 7229139"/>
+                <a:gd name="csY1" fmla="*/ -1399 h 6228677"/>
+                <a:gd name="csX2" fmla="*/ 7227768 w 7229139"/>
+                <a:gd name="csY2" fmla="*/ 3112940 h 6228677"/>
+                <a:gd name="csX3" fmla="*/ 3613199 w 7229139"/>
+                <a:gd name="csY3" fmla="*/ 6227279 h 6228677"/>
+                <a:gd name="csX4" fmla="*/ -1371 w 7229139"/>
+                <a:gd name="csY4" fmla="*/ 3112940 h 6228677"/>
+              </a:gdLst>
+              <a:ahLst/>
+              <a:cxnLst>
+                <a:cxn ang="0">
+                  <a:pos x="csX0" y="csY0"/>
+                </a:cxn>
+                <a:cxn ang="0">
+                  <a:pos x="csX1" y="csY1"/>
+                </a:cxn>
+                <a:cxn ang="0">
+                  <a:pos x="csX2" y="csY2"/>
+                </a:cxn>
+                <a:cxn ang="0">
+                  <a:pos x="csX3" y="csY3"/>
+                </a:cxn>
+                <a:cxn ang="0">
+                  <a:pos x="csX4" y="csY4"/>
+                </a:cxn>
+              </a:cxnLst>
+              <a:rect l="l" t="t" r="r" b="b"/>
+              <a:pathLst>
+                <a:path w="7229139" h="6228677">
+                  <a:moveTo>
+                    <a:pt x="-1371" y="3112940"/>
+                  </a:moveTo>
+                  <a:cubicBezTo>
+                    <a:pt x="-1371" y="1392953"/>
+                    <a:pt x="1616955" y="-1399"/>
+                    <a:pt x="3613199" y="-1399"/>
+                  </a:cubicBezTo>
+                  <a:cubicBezTo>
+                    <a:pt x="5609441" y="-1399"/>
+                    <a:pt x="7227768" y="1392953"/>
+                    <a:pt x="7227768" y="3112940"/>
+                  </a:cubicBezTo>
+                  <a:cubicBezTo>
+                    <a:pt x="7227768" y="4832927"/>
+                    <a:pt x="5609441" y="6227279"/>
+                    <a:pt x="3613199" y="6227279"/>
+                  </a:cubicBezTo>
+                  <a:cubicBezTo>
+                    <a:pt x="1616955" y="6227279"/>
+                    <a:pt x="-1371" y="4832927"/>
+                    <a:pt x="-1371" y="3112940"/>
+                  </a:cubicBezTo>
+                  <a:close/>
+                </a:path>
+              </a:pathLst>
+            </a:custGeom>
+            <a:solidFill>
+              <a:schemeClr val="accent5">
+                <a:lumMod val="50000"/>
+                <a:alpha val="15000"/>
+              </a:schemeClr>
+            </a:solidFill>
+            <a:ln w="8067" cap="flat">
+              <a:noFill/>
+              <a:prstDash val="solid"/>
+              <a:miter/>
+            </a:ln>
+          </p:spPr>
+          <p:txBody>
+            <a:bodyPr/>
+            <a:lstStyle/>
+            <a:p>
+              <a:endParaRPr lang="en-US"/>
+            </a:p>
+          </p:txBody>
+        </p:sp>
+        <p:pic>
+          <p:nvPicPr>
+            <p:cNvPr id="71" name="Graphic 70" descr="Handshake outline">
+              <a:extLst>
+                <a:ext uri="{FF2B5EF4-FFF2-40B4-BE49-F238E27FC236}">
+                  <a16:creationId xmlns:a16="http://schemas.microsoft.com/office/drawing/2014/main" id="{AA291953-9BBF-33E0-DF83-D81DD48CB98E}"/>
+                </a:ext>
+              </a:extLst>
+            </p:cNvPr>
+            <p:cNvPicPr>
+              <a:picLocks noChangeAspect="1"/>
+            </p:cNvPicPr>
+            <p:nvPr/>
+          </p:nvPicPr>
+          <p:blipFill>
+            <a:blip>
+              <a:extLst>
+                <a:ext uri="{96DAC541-7B7A-43D3-8B79-37D633B846F1}">
+                  <asvg:svgBlip xmlns:asvg="http://schemas.microsoft.com/office/drawing/2016/SVG/main" r:embed="rId2"/>
+                </a:ext>
+              </a:extLst>
+            </a:blip>
+            <a:stretch>
+              <a:fillRect/>
+            </a:stretch>
+          </p:blipFill>
+          <p:spPr>
+            <a:xfrm>
+              <a:off x="5367075" y="914400"/>
+              <a:ext cx="5029200" cy="5029200"/>
+            </a:xfrm>
+            <a:prstGeom prst="rect">
+              <a:avLst/>
+            </a:prstGeom>
+            <a:effectLst>
+              <a:outerShdw blurRad="50800" dist="127000" dir="2700000" algn="tl" rotWithShape="0">
+                <a:schemeClr val="accent1">
+                  <a:alpha val="40000"/>
+                </a:schemeClr>
+              </a:outerShdw>
+            </a:effectLst>
+          </p:spPr>
+        </p:pic>
+      </p:grpSp>
     </p:spTree>
     <p:extLst>
       <p:ext uri="{BB962C8B-B14F-4D97-AF65-F5344CB8AC3E}">
@@ -15012,245 +15033,266 @@
           <a:chExt cx="0" cy="0"/>
         </a:xfrm>
       </p:grpSpPr>
-      <p:sp>
-        <p:nvSpPr>
-          <p:cNvPr id="2" name="Freeform: Shape 1">
+      <p:grpSp>
+        <p:nvGrpSpPr>
+          <p:cNvPr id="3" name="Group 2">
             <a:extLst>
               <a:ext uri="{FF2B5EF4-FFF2-40B4-BE49-F238E27FC236}">
-                <a16:creationId xmlns:a16="http://schemas.microsoft.com/office/drawing/2014/main" id="{2059E4C9-AE06-C2EC-EE01-65CAD14BDA93}"/>
+                <a16:creationId xmlns:a16="http://schemas.microsoft.com/office/drawing/2014/main" id="{36527995-6817-3479-3DFD-73E5C1B25655}"/>
               </a:ext>
             </a:extLst>
           </p:cNvPr>
-          <p:cNvSpPr/>
+          <p:cNvGrpSpPr/>
           <p:nvPr/>
-        </p:nvSpPr>
-        <p:spPr>
-          <a:xfrm>
-            <a:off x="3003618" y="552917"/>
-            <a:ext cx="7229138" cy="6228674"/>
-          </a:xfrm>
-          <a:custGeom>
-            <a:avLst/>
-            <a:gdLst>
-              <a:gd name="csX0" fmla="*/ -1 w 7229138"/>
-              <a:gd name="csY0" fmla="*/ 3114376 h 6228674"/>
-              <a:gd name="csX1" fmla="*/ 3614568 w 7229138"/>
-              <a:gd name="csY1" fmla="*/ 40 h 6228674"/>
-              <a:gd name="csX2" fmla="*/ 7229137 w 7229138"/>
-              <a:gd name="csY2" fmla="*/ 3114376 h 6228674"/>
-              <a:gd name="csX3" fmla="*/ 3614568 w 7229138"/>
-              <a:gd name="csY3" fmla="*/ 6228715 h 6228674"/>
-              <a:gd name="csX4" fmla="*/ -1 w 7229138"/>
-              <a:gd name="csY4" fmla="*/ 3114376 h 6228674"/>
-            </a:gdLst>
-            <a:ahLst/>
-            <a:cxnLst>
-              <a:cxn ang="0">
-                <a:pos x="csX0" y="csY0"/>
-              </a:cxn>
-              <a:cxn ang="0">
-                <a:pos x="csX1" y="csY1"/>
-              </a:cxn>
-              <a:cxn ang="0">
-                <a:pos x="csX2" y="csY2"/>
-              </a:cxn>
-              <a:cxn ang="0">
-                <a:pos x="csX3" y="csY3"/>
-              </a:cxn>
-              <a:cxn ang="0">
-                <a:pos x="csX4" y="csY4"/>
-              </a:cxn>
-            </a:cxnLst>
-            <a:rect l="l" t="t" r="r" b="b"/>
-            <a:pathLst>
-              <a:path w="7229138" h="6228674">
-                <a:moveTo>
-                  <a:pt x="-1" y="3114376"/>
-                </a:moveTo>
-                <a:cubicBezTo>
-                  <a:pt x="-1" y="1394373"/>
-                  <a:pt x="1618301" y="40"/>
-                  <a:pt x="3614568" y="40"/>
-                </a:cubicBezTo>
-                <a:cubicBezTo>
-                  <a:pt x="5610843" y="40"/>
-                  <a:pt x="7229137" y="1394373"/>
-                  <a:pt x="7229137" y="3114376"/>
-                </a:cubicBezTo>
-                <a:cubicBezTo>
-                  <a:pt x="7229137" y="4834378"/>
-                  <a:pt x="5610843" y="6228715"/>
-                  <a:pt x="3614568" y="6228715"/>
-                </a:cubicBezTo>
-                <a:cubicBezTo>
-                  <a:pt x="1618301" y="6228715"/>
-                  <a:pt x="-1" y="4834378"/>
-                  <a:pt x="-1" y="3114376"/>
-                </a:cubicBezTo>
-                <a:close/>
-              </a:path>
-            </a:pathLst>
-          </a:custGeom>
-          <a:solidFill>
-            <a:srgbClr val="4472C4">
-              <a:alpha val="15000"/>
-            </a:srgbClr>
-          </a:solidFill>
-          <a:ln w="8067" cap="flat">
-            <a:noFill/>
-            <a:prstDash val="solid"/>
-            <a:miter/>
-          </a:ln>
-        </p:spPr>
-        <p:txBody>
-          <a:bodyPr/>
-          <a:lstStyle/>
-          <a:p>
-            <a:endParaRPr lang="en-US"/>
-          </a:p>
-        </p:txBody>
-      </p:sp>
-      <p:sp>
-        <p:nvSpPr>
-          <p:cNvPr id="9" name="Freeform: Shape 8">
-            <a:extLst>
-              <a:ext uri="{FF2B5EF4-FFF2-40B4-BE49-F238E27FC236}">
-                <a16:creationId xmlns:a16="http://schemas.microsoft.com/office/drawing/2014/main" id="{DF82AC9D-6D4C-795E-455F-E89F2575BEEF}"/>
-              </a:ext>
-            </a:extLst>
-          </p:cNvPr>
-          <p:cNvSpPr/>
-          <p:nvPr/>
-        </p:nvSpPr>
-        <p:spPr>
+        </p:nvGrpSpPr>
+        <p:grpSpPr>
           <a:xfrm>
             <a:off x="3003618" y="72185"/>
-            <a:ext cx="7229139" cy="6228677"/>
+            <a:ext cx="7229139" cy="6709406"/>
+            <a:chOff x="3003618" y="72185"/>
+            <a:chExt cx="7229139" cy="6709406"/>
           </a:xfrm>
-          <a:custGeom>
-            <a:avLst/>
-            <a:gdLst>
-              <a:gd name="csX0" fmla="*/ -1371 w 7229139"/>
-              <a:gd name="csY0" fmla="*/ 3112940 h 6228677"/>
-              <a:gd name="csX1" fmla="*/ 3613199 w 7229139"/>
-              <a:gd name="csY1" fmla="*/ -1399 h 6228677"/>
-              <a:gd name="csX2" fmla="*/ 7227768 w 7229139"/>
-              <a:gd name="csY2" fmla="*/ 3112940 h 6228677"/>
-              <a:gd name="csX3" fmla="*/ 3613199 w 7229139"/>
-              <a:gd name="csY3" fmla="*/ 6227279 h 6228677"/>
-              <a:gd name="csX4" fmla="*/ -1371 w 7229139"/>
-              <a:gd name="csY4" fmla="*/ 3112940 h 6228677"/>
-            </a:gdLst>
-            <a:ahLst/>
-            <a:cxnLst>
-              <a:cxn ang="0">
-                <a:pos x="csX0" y="csY0"/>
-              </a:cxn>
-              <a:cxn ang="0">
-                <a:pos x="csX1" y="csY1"/>
-              </a:cxn>
-              <a:cxn ang="0">
-                <a:pos x="csX2" y="csY2"/>
-              </a:cxn>
-              <a:cxn ang="0">
-                <a:pos x="csX3" y="csY3"/>
-              </a:cxn>
-              <a:cxn ang="0">
-                <a:pos x="csX4" y="csY4"/>
-              </a:cxn>
-            </a:cxnLst>
-            <a:rect l="l" t="t" r="r" b="b"/>
-            <a:pathLst>
-              <a:path w="7229139" h="6228677">
-                <a:moveTo>
-                  <a:pt x="-1371" y="3112940"/>
-                </a:moveTo>
-                <a:cubicBezTo>
-                  <a:pt x="-1371" y="1392953"/>
-                  <a:pt x="1616955" y="-1399"/>
-                  <a:pt x="3613199" y="-1399"/>
-                </a:cubicBezTo>
-                <a:cubicBezTo>
-                  <a:pt x="5609441" y="-1399"/>
-                  <a:pt x="7227768" y="1392953"/>
-                  <a:pt x="7227768" y="3112940"/>
-                </a:cubicBezTo>
-                <a:cubicBezTo>
-                  <a:pt x="7227768" y="4832927"/>
-                  <a:pt x="5609441" y="6227279"/>
-                  <a:pt x="3613199" y="6227279"/>
-                </a:cubicBezTo>
-                <a:cubicBezTo>
-                  <a:pt x="1616955" y="6227279"/>
-                  <a:pt x="-1371" y="4832927"/>
-                  <a:pt x="-1371" y="3112940"/>
-                </a:cubicBezTo>
-                <a:close/>
-              </a:path>
-            </a:pathLst>
-          </a:custGeom>
-          <a:solidFill>
-            <a:srgbClr val="4472C4">
-              <a:alpha val="15000"/>
-            </a:srgbClr>
-          </a:solidFill>
-          <a:ln w="8067" cap="flat">
-            <a:noFill/>
-            <a:prstDash val="solid"/>
-            <a:miter/>
-          </a:ln>
-        </p:spPr>
-        <p:txBody>
-          <a:bodyPr/>
-          <a:lstStyle/>
-          <a:p>
-            <a:endParaRPr lang="en-US"/>
-          </a:p>
-        </p:txBody>
-      </p:sp>
-      <p:pic>
-        <p:nvPicPr>
-          <p:cNvPr id="11" name="Graphic 10" descr="Money outline">
-            <a:extLst>
-              <a:ext uri="{FF2B5EF4-FFF2-40B4-BE49-F238E27FC236}">
-                <a16:creationId xmlns:a16="http://schemas.microsoft.com/office/drawing/2014/main" id="{A307EB66-7D70-3B84-3775-A8A661264B58}"/>
-              </a:ext>
-            </a:extLst>
-          </p:cNvPr>
-          <p:cNvPicPr>
-            <a:picLocks noChangeAspect="1"/>
-          </p:cNvPicPr>
-          <p:nvPr/>
-        </p:nvPicPr>
-        <p:blipFill>
-          <a:blip>
-            <a:extLst>
-              <a:ext uri="{96DAC541-7B7A-43D3-8B79-37D633B846F1}">
-                <asvg:svgBlip xmlns:asvg="http://schemas.microsoft.com/office/drawing/2016/SVG/main" r:embed="rId2"/>
-              </a:ext>
-            </a:extLst>
-          </a:blip>
-          <a:stretch>
-            <a:fillRect/>
-          </a:stretch>
-        </p:blipFill>
-        <p:spPr>
-          <a:xfrm>
-            <a:off x="4103587" y="914400"/>
-            <a:ext cx="5029200" cy="5029200"/>
-          </a:xfrm>
-          <a:prstGeom prst="rect">
-            <a:avLst/>
-          </a:prstGeom>
-          <a:effectLst>
-            <a:outerShdw blurRad="50800" dist="127000" dir="2700000" algn="tl" rotWithShape="0">
-              <a:schemeClr val="accent1">
-                <a:alpha val="40000"/>
-              </a:schemeClr>
-            </a:outerShdw>
-          </a:effectLst>
-        </p:spPr>
-      </p:pic>
+        </p:grpSpPr>
+        <p:sp>
+          <p:nvSpPr>
+            <p:cNvPr id="2" name="Freeform: Shape 1">
+              <a:extLst>
+                <a:ext uri="{FF2B5EF4-FFF2-40B4-BE49-F238E27FC236}">
+                  <a16:creationId xmlns:a16="http://schemas.microsoft.com/office/drawing/2014/main" id="{2059E4C9-AE06-C2EC-EE01-65CAD14BDA93}"/>
+                </a:ext>
+              </a:extLst>
+            </p:cNvPr>
+            <p:cNvSpPr/>
+            <p:nvPr/>
+          </p:nvSpPr>
+          <p:spPr>
+            <a:xfrm>
+              <a:off x="3003618" y="552917"/>
+              <a:ext cx="7229138" cy="6228674"/>
+            </a:xfrm>
+            <a:custGeom>
+              <a:avLst/>
+              <a:gdLst>
+                <a:gd name="csX0" fmla="*/ -1 w 7229138"/>
+                <a:gd name="csY0" fmla="*/ 3114376 h 6228674"/>
+                <a:gd name="csX1" fmla="*/ 3614568 w 7229138"/>
+                <a:gd name="csY1" fmla="*/ 40 h 6228674"/>
+                <a:gd name="csX2" fmla="*/ 7229137 w 7229138"/>
+                <a:gd name="csY2" fmla="*/ 3114376 h 6228674"/>
+                <a:gd name="csX3" fmla="*/ 3614568 w 7229138"/>
+                <a:gd name="csY3" fmla="*/ 6228715 h 6228674"/>
+                <a:gd name="csX4" fmla="*/ -1 w 7229138"/>
+                <a:gd name="csY4" fmla="*/ 3114376 h 6228674"/>
+              </a:gdLst>
+              <a:ahLst/>
+              <a:cxnLst>
+                <a:cxn ang="0">
+                  <a:pos x="csX0" y="csY0"/>
+                </a:cxn>
+                <a:cxn ang="0">
+                  <a:pos x="csX1" y="csY1"/>
+                </a:cxn>
+                <a:cxn ang="0">
+                  <a:pos x="csX2" y="csY2"/>
+                </a:cxn>
+                <a:cxn ang="0">
+                  <a:pos x="csX3" y="csY3"/>
+                </a:cxn>
+                <a:cxn ang="0">
+                  <a:pos x="csX4" y="csY4"/>
+                </a:cxn>
+              </a:cxnLst>
+              <a:rect l="l" t="t" r="r" b="b"/>
+              <a:pathLst>
+                <a:path w="7229138" h="6228674">
+                  <a:moveTo>
+                    <a:pt x="-1" y="3114376"/>
+                  </a:moveTo>
+                  <a:cubicBezTo>
+                    <a:pt x="-1" y="1394373"/>
+                    <a:pt x="1618301" y="40"/>
+                    <a:pt x="3614568" y="40"/>
+                  </a:cubicBezTo>
+                  <a:cubicBezTo>
+                    <a:pt x="5610843" y="40"/>
+                    <a:pt x="7229137" y="1394373"/>
+                    <a:pt x="7229137" y="3114376"/>
+                  </a:cubicBezTo>
+                  <a:cubicBezTo>
+                    <a:pt x="7229137" y="4834378"/>
+                    <a:pt x="5610843" y="6228715"/>
+                    <a:pt x="3614568" y="6228715"/>
+                  </a:cubicBezTo>
+                  <a:cubicBezTo>
+                    <a:pt x="1618301" y="6228715"/>
+                    <a:pt x="-1" y="4834378"/>
+                    <a:pt x="-1" y="3114376"/>
+                  </a:cubicBezTo>
+                  <a:close/>
+                </a:path>
+              </a:pathLst>
+            </a:custGeom>
+            <a:solidFill>
+              <a:srgbClr val="4472C4">
+                <a:alpha val="15000"/>
+              </a:srgbClr>
+            </a:solidFill>
+            <a:ln w="8067" cap="flat">
+              <a:noFill/>
+              <a:prstDash val="solid"/>
+              <a:miter/>
+            </a:ln>
+          </p:spPr>
+          <p:txBody>
+            <a:bodyPr/>
+            <a:lstStyle/>
+            <a:p>
+              <a:endParaRPr lang="en-US"/>
+            </a:p>
+          </p:txBody>
+        </p:sp>
+        <p:sp>
+          <p:nvSpPr>
+            <p:cNvPr id="9" name="Freeform: Shape 8">
+              <a:extLst>
+                <a:ext uri="{FF2B5EF4-FFF2-40B4-BE49-F238E27FC236}">
+                  <a16:creationId xmlns:a16="http://schemas.microsoft.com/office/drawing/2014/main" id="{DF82AC9D-6D4C-795E-455F-E89F2575BEEF}"/>
+                </a:ext>
+              </a:extLst>
+            </p:cNvPr>
+            <p:cNvSpPr/>
+            <p:nvPr/>
+          </p:nvSpPr>
+          <p:spPr>
+            <a:xfrm>
+              <a:off x="3003618" y="72185"/>
+              <a:ext cx="7229139" cy="6228677"/>
+            </a:xfrm>
+            <a:custGeom>
+              <a:avLst/>
+              <a:gdLst>
+                <a:gd name="csX0" fmla="*/ -1371 w 7229139"/>
+                <a:gd name="csY0" fmla="*/ 3112940 h 6228677"/>
+                <a:gd name="csX1" fmla="*/ 3613199 w 7229139"/>
+                <a:gd name="csY1" fmla="*/ -1399 h 6228677"/>
+                <a:gd name="csX2" fmla="*/ 7227768 w 7229139"/>
+                <a:gd name="csY2" fmla="*/ 3112940 h 6228677"/>
+                <a:gd name="csX3" fmla="*/ 3613199 w 7229139"/>
+                <a:gd name="csY3" fmla="*/ 6227279 h 6228677"/>
+                <a:gd name="csX4" fmla="*/ -1371 w 7229139"/>
+                <a:gd name="csY4" fmla="*/ 3112940 h 6228677"/>
+              </a:gdLst>
+              <a:ahLst/>
+              <a:cxnLst>
+                <a:cxn ang="0">
+                  <a:pos x="csX0" y="csY0"/>
+                </a:cxn>
+                <a:cxn ang="0">
+                  <a:pos x="csX1" y="csY1"/>
+                </a:cxn>
+                <a:cxn ang="0">
+                  <a:pos x="csX2" y="csY2"/>
+                </a:cxn>
+                <a:cxn ang="0">
+                  <a:pos x="csX3" y="csY3"/>
+                </a:cxn>
+                <a:cxn ang="0">
+                  <a:pos x="csX4" y="csY4"/>
+                </a:cxn>
+              </a:cxnLst>
+              <a:rect l="l" t="t" r="r" b="b"/>
+              <a:pathLst>
+                <a:path w="7229139" h="6228677">
+                  <a:moveTo>
+                    <a:pt x="-1371" y="3112940"/>
+                  </a:moveTo>
+                  <a:cubicBezTo>
+                    <a:pt x="-1371" y="1392953"/>
+                    <a:pt x="1616955" y="-1399"/>
+                    <a:pt x="3613199" y="-1399"/>
+                  </a:cubicBezTo>
+                  <a:cubicBezTo>
+                    <a:pt x="5609441" y="-1399"/>
+                    <a:pt x="7227768" y="1392953"/>
+                    <a:pt x="7227768" y="3112940"/>
+                  </a:cubicBezTo>
+                  <a:cubicBezTo>
+                    <a:pt x="7227768" y="4832927"/>
+                    <a:pt x="5609441" y="6227279"/>
+                    <a:pt x="3613199" y="6227279"/>
+                  </a:cubicBezTo>
+                  <a:cubicBezTo>
+                    <a:pt x="1616955" y="6227279"/>
+                    <a:pt x="-1371" y="4832927"/>
+                    <a:pt x="-1371" y="3112940"/>
+                  </a:cubicBezTo>
+                  <a:close/>
+                </a:path>
+              </a:pathLst>
+            </a:custGeom>
+            <a:solidFill>
+              <a:srgbClr val="4472C4">
+                <a:alpha val="15000"/>
+              </a:srgbClr>
+            </a:solidFill>
+            <a:ln w="8067" cap="flat">
+              <a:noFill/>
+              <a:prstDash val="solid"/>
+              <a:miter/>
+            </a:ln>
+          </p:spPr>
+          <p:txBody>
+            <a:bodyPr/>
+            <a:lstStyle/>
+            <a:p>
+              <a:endParaRPr lang="en-US"/>
+            </a:p>
+          </p:txBody>
+        </p:sp>
+        <p:pic>
+          <p:nvPicPr>
+            <p:cNvPr id="11" name="Graphic 10" descr="Money outline">
+              <a:extLst>
+                <a:ext uri="{FF2B5EF4-FFF2-40B4-BE49-F238E27FC236}">
+                  <a16:creationId xmlns:a16="http://schemas.microsoft.com/office/drawing/2014/main" id="{A307EB66-7D70-3B84-3775-A8A661264B58}"/>
+                </a:ext>
+              </a:extLst>
+            </p:cNvPr>
+            <p:cNvPicPr>
+              <a:picLocks noChangeAspect="1"/>
+            </p:cNvPicPr>
+            <p:nvPr/>
+          </p:nvPicPr>
+          <p:blipFill>
+            <a:blip>
+              <a:extLst>
+                <a:ext uri="{96DAC541-7B7A-43D3-8B79-37D633B846F1}">
+                  <asvg:svgBlip xmlns:asvg="http://schemas.microsoft.com/office/drawing/2016/SVG/main" r:embed="rId2"/>
+                </a:ext>
+              </a:extLst>
+            </a:blip>
+            <a:stretch>
+              <a:fillRect/>
+            </a:stretch>
+          </p:blipFill>
+          <p:spPr>
+            <a:xfrm>
+              <a:off x="4103587" y="914400"/>
+              <a:ext cx="5029200" cy="5029200"/>
+            </a:xfrm>
+            <a:prstGeom prst="rect">
+              <a:avLst/>
+            </a:prstGeom>
+            <a:effectLst>
+              <a:outerShdw blurRad="50800" dist="127000" dir="2700000" algn="tl" rotWithShape="0">
+                <a:schemeClr val="accent1">
+                  <a:alpha val="40000"/>
+                </a:schemeClr>
+              </a:outerShdw>
+            </a:effectLst>
+          </p:spPr>
+        </p:pic>
+      </p:grpSp>
     </p:spTree>
     <p:extLst>
       <p:ext uri="{BB962C8B-B14F-4D97-AF65-F5344CB8AC3E}">
@@ -15287,245 +15329,266 @@
           <a:chExt cx="0" cy="0"/>
         </a:xfrm>
       </p:grpSpPr>
-      <p:sp>
-        <p:nvSpPr>
-          <p:cNvPr id="2" name="Freeform: Shape 1">
+      <p:grpSp>
+        <p:nvGrpSpPr>
+          <p:cNvPr id="3" name="Group 2">
             <a:extLst>
               <a:ext uri="{FF2B5EF4-FFF2-40B4-BE49-F238E27FC236}">
-                <a16:creationId xmlns:a16="http://schemas.microsoft.com/office/drawing/2014/main" id="{41D67997-62AD-7FDF-6B3F-99C4F957D144}"/>
+                <a16:creationId xmlns:a16="http://schemas.microsoft.com/office/drawing/2014/main" id="{CF709B76-4BD0-A46C-5509-E65F01A76CEF}"/>
               </a:ext>
             </a:extLst>
           </p:cNvPr>
-          <p:cNvSpPr/>
+          <p:cNvGrpSpPr/>
           <p:nvPr/>
-        </p:nvSpPr>
-        <p:spPr>
-          <a:xfrm>
-            <a:off x="3003618" y="552917"/>
-            <a:ext cx="7229138" cy="6228674"/>
-          </a:xfrm>
-          <a:custGeom>
-            <a:avLst/>
-            <a:gdLst>
-              <a:gd name="csX0" fmla="*/ -1 w 7229138"/>
-              <a:gd name="csY0" fmla="*/ 3114376 h 6228674"/>
-              <a:gd name="csX1" fmla="*/ 3614568 w 7229138"/>
-              <a:gd name="csY1" fmla="*/ 40 h 6228674"/>
-              <a:gd name="csX2" fmla="*/ 7229137 w 7229138"/>
-              <a:gd name="csY2" fmla="*/ 3114376 h 6228674"/>
-              <a:gd name="csX3" fmla="*/ 3614568 w 7229138"/>
-              <a:gd name="csY3" fmla="*/ 6228715 h 6228674"/>
-              <a:gd name="csX4" fmla="*/ -1 w 7229138"/>
-              <a:gd name="csY4" fmla="*/ 3114376 h 6228674"/>
-            </a:gdLst>
-            <a:ahLst/>
-            <a:cxnLst>
-              <a:cxn ang="0">
-                <a:pos x="csX0" y="csY0"/>
-              </a:cxn>
-              <a:cxn ang="0">
-                <a:pos x="csX1" y="csY1"/>
-              </a:cxn>
-              <a:cxn ang="0">
-                <a:pos x="csX2" y="csY2"/>
-              </a:cxn>
-              <a:cxn ang="0">
-                <a:pos x="csX3" y="csY3"/>
-              </a:cxn>
-              <a:cxn ang="0">
-                <a:pos x="csX4" y="csY4"/>
-              </a:cxn>
-            </a:cxnLst>
-            <a:rect l="l" t="t" r="r" b="b"/>
-            <a:pathLst>
-              <a:path w="7229138" h="6228674">
-                <a:moveTo>
-                  <a:pt x="-1" y="3114376"/>
-                </a:moveTo>
-                <a:cubicBezTo>
-                  <a:pt x="-1" y="1394373"/>
-                  <a:pt x="1618301" y="40"/>
-                  <a:pt x="3614568" y="40"/>
-                </a:cubicBezTo>
-                <a:cubicBezTo>
-                  <a:pt x="5610843" y="40"/>
-                  <a:pt x="7229137" y="1394373"/>
-                  <a:pt x="7229137" y="3114376"/>
-                </a:cubicBezTo>
-                <a:cubicBezTo>
-                  <a:pt x="7229137" y="4834378"/>
-                  <a:pt x="5610843" y="6228715"/>
-                  <a:pt x="3614568" y="6228715"/>
-                </a:cubicBezTo>
-                <a:cubicBezTo>
-                  <a:pt x="1618301" y="6228715"/>
-                  <a:pt x="-1" y="4834378"/>
-                  <a:pt x="-1" y="3114376"/>
-                </a:cubicBezTo>
-                <a:close/>
-              </a:path>
-            </a:pathLst>
-          </a:custGeom>
-          <a:solidFill>
-            <a:srgbClr val="4472C4">
-              <a:alpha val="15000"/>
-            </a:srgbClr>
-          </a:solidFill>
-          <a:ln w="8067" cap="flat">
-            <a:noFill/>
-            <a:prstDash val="solid"/>
-            <a:miter/>
-          </a:ln>
-        </p:spPr>
-        <p:txBody>
-          <a:bodyPr/>
-          <a:lstStyle/>
-          <a:p>
-            <a:endParaRPr lang="en-US"/>
-          </a:p>
-        </p:txBody>
-      </p:sp>
-      <p:sp>
-        <p:nvSpPr>
-          <p:cNvPr id="9" name="Freeform: Shape 8">
-            <a:extLst>
-              <a:ext uri="{FF2B5EF4-FFF2-40B4-BE49-F238E27FC236}">
-                <a16:creationId xmlns:a16="http://schemas.microsoft.com/office/drawing/2014/main" id="{19051373-DB3B-F7D0-7E5A-6D3BDD94CD03}"/>
-              </a:ext>
-            </a:extLst>
-          </p:cNvPr>
-          <p:cNvSpPr/>
-          <p:nvPr/>
-        </p:nvSpPr>
-        <p:spPr>
+        </p:nvGrpSpPr>
+        <p:grpSpPr>
           <a:xfrm>
             <a:off x="3003618" y="72185"/>
-            <a:ext cx="7229139" cy="6228677"/>
+            <a:ext cx="7229139" cy="6709406"/>
+            <a:chOff x="3003618" y="72185"/>
+            <a:chExt cx="7229139" cy="6709406"/>
           </a:xfrm>
-          <a:custGeom>
-            <a:avLst/>
-            <a:gdLst>
-              <a:gd name="csX0" fmla="*/ -1371 w 7229139"/>
-              <a:gd name="csY0" fmla="*/ 3112940 h 6228677"/>
-              <a:gd name="csX1" fmla="*/ 3613199 w 7229139"/>
-              <a:gd name="csY1" fmla="*/ -1399 h 6228677"/>
-              <a:gd name="csX2" fmla="*/ 7227768 w 7229139"/>
-              <a:gd name="csY2" fmla="*/ 3112940 h 6228677"/>
-              <a:gd name="csX3" fmla="*/ 3613199 w 7229139"/>
-              <a:gd name="csY3" fmla="*/ 6227279 h 6228677"/>
-              <a:gd name="csX4" fmla="*/ -1371 w 7229139"/>
-              <a:gd name="csY4" fmla="*/ 3112940 h 6228677"/>
-            </a:gdLst>
-            <a:ahLst/>
-            <a:cxnLst>
-              <a:cxn ang="0">
-                <a:pos x="csX0" y="csY0"/>
-              </a:cxn>
-              <a:cxn ang="0">
-                <a:pos x="csX1" y="csY1"/>
-              </a:cxn>
-              <a:cxn ang="0">
-                <a:pos x="csX2" y="csY2"/>
-              </a:cxn>
-              <a:cxn ang="0">
-                <a:pos x="csX3" y="csY3"/>
-              </a:cxn>
-              <a:cxn ang="0">
-                <a:pos x="csX4" y="csY4"/>
-              </a:cxn>
-            </a:cxnLst>
-            <a:rect l="l" t="t" r="r" b="b"/>
-            <a:pathLst>
-              <a:path w="7229139" h="6228677">
-                <a:moveTo>
-                  <a:pt x="-1371" y="3112940"/>
-                </a:moveTo>
-                <a:cubicBezTo>
-                  <a:pt x="-1371" y="1392953"/>
-                  <a:pt x="1616955" y="-1399"/>
-                  <a:pt x="3613199" y="-1399"/>
-                </a:cubicBezTo>
-                <a:cubicBezTo>
-                  <a:pt x="5609441" y="-1399"/>
-                  <a:pt x="7227768" y="1392953"/>
-                  <a:pt x="7227768" y="3112940"/>
-                </a:cubicBezTo>
-                <a:cubicBezTo>
-                  <a:pt x="7227768" y="4832927"/>
-                  <a:pt x="5609441" y="6227279"/>
-                  <a:pt x="3613199" y="6227279"/>
-                </a:cubicBezTo>
-                <a:cubicBezTo>
-                  <a:pt x="1616955" y="6227279"/>
-                  <a:pt x="-1371" y="4832927"/>
-                  <a:pt x="-1371" y="3112940"/>
-                </a:cubicBezTo>
-                <a:close/>
-              </a:path>
-            </a:pathLst>
-          </a:custGeom>
-          <a:solidFill>
-            <a:srgbClr val="4472C4">
-              <a:alpha val="15000"/>
-            </a:srgbClr>
-          </a:solidFill>
-          <a:ln w="8067" cap="flat">
-            <a:noFill/>
-            <a:prstDash val="solid"/>
-            <a:miter/>
-          </a:ln>
-        </p:spPr>
-        <p:txBody>
-          <a:bodyPr/>
-          <a:lstStyle/>
-          <a:p>
-            <a:endParaRPr lang="en-US"/>
-          </a:p>
-        </p:txBody>
-      </p:sp>
-      <p:pic>
-        <p:nvPicPr>
-          <p:cNvPr id="53" name="Graphic 52" descr="Hierarchy outline">
-            <a:extLst>
-              <a:ext uri="{FF2B5EF4-FFF2-40B4-BE49-F238E27FC236}">
-                <a16:creationId xmlns:a16="http://schemas.microsoft.com/office/drawing/2014/main" id="{B4FA1865-06E0-410E-0884-7ED3E9039DA3}"/>
-              </a:ext>
-            </a:extLst>
-          </p:cNvPr>
-          <p:cNvPicPr>
-            <a:picLocks noChangeAspect="1"/>
-          </p:cNvPicPr>
-          <p:nvPr/>
-        </p:nvPicPr>
-        <p:blipFill>
-          <a:blip>
-            <a:extLst>
-              <a:ext uri="{96DAC541-7B7A-43D3-8B79-37D633B846F1}">
-                <asvg:svgBlip xmlns:asvg="http://schemas.microsoft.com/office/drawing/2016/SVG/main" r:embed="rId2"/>
-              </a:ext>
-            </a:extLst>
-          </a:blip>
-          <a:stretch>
-            <a:fillRect/>
-          </a:stretch>
-        </p:blipFill>
-        <p:spPr>
-          <a:xfrm>
-            <a:off x="4103587" y="914400"/>
-            <a:ext cx="5029200" cy="5029200"/>
-          </a:xfrm>
-          <a:prstGeom prst="rect">
-            <a:avLst/>
-          </a:prstGeom>
-          <a:effectLst>
-            <a:outerShdw blurRad="50800" dist="127000" dir="2700000" algn="tl" rotWithShape="0">
-              <a:schemeClr val="accent1">
-                <a:alpha val="40000"/>
-              </a:schemeClr>
-            </a:outerShdw>
-          </a:effectLst>
-        </p:spPr>
-      </p:pic>
+        </p:grpSpPr>
+        <p:sp>
+          <p:nvSpPr>
+            <p:cNvPr id="2" name="Freeform: Shape 1">
+              <a:extLst>
+                <a:ext uri="{FF2B5EF4-FFF2-40B4-BE49-F238E27FC236}">
+                  <a16:creationId xmlns:a16="http://schemas.microsoft.com/office/drawing/2014/main" id="{41D67997-62AD-7FDF-6B3F-99C4F957D144}"/>
+                </a:ext>
+              </a:extLst>
+            </p:cNvPr>
+            <p:cNvSpPr/>
+            <p:nvPr/>
+          </p:nvSpPr>
+          <p:spPr>
+            <a:xfrm>
+              <a:off x="3003618" y="552917"/>
+              <a:ext cx="7229138" cy="6228674"/>
+            </a:xfrm>
+            <a:custGeom>
+              <a:avLst/>
+              <a:gdLst>
+                <a:gd name="csX0" fmla="*/ -1 w 7229138"/>
+                <a:gd name="csY0" fmla="*/ 3114376 h 6228674"/>
+                <a:gd name="csX1" fmla="*/ 3614568 w 7229138"/>
+                <a:gd name="csY1" fmla="*/ 40 h 6228674"/>
+                <a:gd name="csX2" fmla="*/ 7229137 w 7229138"/>
+                <a:gd name="csY2" fmla="*/ 3114376 h 6228674"/>
+                <a:gd name="csX3" fmla="*/ 3614568 w 7229138"/>
+                <a:gd name="csY3" fmla="*/ 6228715 h 6228674"/>
+                <a:gd name="csX4" fmla="*/ -1 w 7229138"/>
+                <a:gd name="csY4" fmla="*/ 3114376 h 6228674"/>
+              </a:gdLst>
+              <a:ahLst/>
+              <a:cxnLst>
+                <a:cxn ang="0">
+                  <a:pos x="csX0" y="csY0"/>
+                </a:cxn>
+                <a:cxn ang="0">
+                  <a:pos x="csX1" y="csY1"/>
+                </a:cxn>
+                <a:cxn ang="0">
+                  <a:pos x="csX2" y="csY2"/>
+                </a:cxn>
+                <a:cxn ang="0">
+                  <a:pos x="csX3" y="csY3"/>
+                </a:cxn>
+                <a:cxn ang="0">
+                  <a:pos x="csX4" y="csY4"/>
+                </a:cxn>
+              </a:cxnLst>
+              <a:rect l="l" t="t" r="r" b="b"/>
+              <a:pathLst>
+                <a:path w="7229138" h="6228674">
+                  <a:moveTo>
+                    <a:pt x="-1" y="3114376"/>
+                  </a:moveTo>
+                  <a:cubicBezTo>
+                    <a:pt x="-1" y="1394373"/>
+                    <a:pt x="1618301" y="40"/>
+                    <a:pt x="3614568" y="40"/>
+                  </a:cubicBezTo>
+                  <a:cubicBezTo>
+                    <a:pt x="5610843" y="40"/>
+                    <a:pt x="7229137" y="1394373"/>
+                    <a:pt x="7229137" y="3114376"/>
+                  </a:cubicBezTo>
+                  <a:cubicBezTo>
+                    <a:pt x="7229137" y="4834378"/>
+                    <a:pt x="5610843" y="6228715"/>
+                    <a:pt x="3614568" y="6228715"/>
+                  </a:cubicBezTo>
+                  <a:cubicBezTo>
+                    <a:pt x="1618301" y="6228715"/>
+                    <a:pt x="-1" y="4834378"/>
+                    <a:pt x="-1" y="3114376"/>
+                  </a:cubicBezTo>
+                  <a:close/>
+                </a:path>
+              </a:pathLst>
+            </a:custGeom>
+            <a:solidFill>
+              <a:srgbClr val="4472C4">
+                <a:alpha val="15000"/>
+              </a:srgbClr>
+            </a:solidFill>
+            <a:ln w="8067" cap="flat">
+              <a:noFill/>
+              <a:prstDash val="solid"/>
+              <a:miter/>
+            </a:ln>
+          </p:spPr>
+          <p:txBody>
+            <a:bodyPr/>
+            <a:lstStyle/>
+            <a:p>
+              <a:endParaRPr lang="en-US"/>
+            </a:p>
+          </p:txBody>
+        </p:sp>
+        <p:sp>
+          <p:nvSpPr>
+            <p:cNvPr id="9" name="Freeform: Shape 8">
+              <a:extLst>
+                <a:ext uri="{FF2B5EF4-FFF2-40B4-BE49-F238E27FC236}">
+                  <a16:creationId xmlns:a16="http://schemas.microsoft.com/office/drawing/2014/main" id="{19051373-DB3B-F7D0-7E5A-6D3BDD94CD03}"/>
+                </a:ext>
+              </a:extLst>
+            </p:cNvPr>
+            <p:cNvSpPr/>
+            <p:nvPr/>
+          </p:nvSpPr>
+          <p:spPr>
+            <a:xfrm>
+              <a:off x="3003618" y="72185"/>
+              <a:ext cx="7229139" cy="6228677"/>
+            </a:xfrm>
+            <a:custGeom>
+              <a:avLst/>
+              <a:gdLst>
+                <a:gd name="csX0" fmla="*/ -1371 w 7229139"/>
+                <a:gd name="csY0" fmla="*/ 3112940 h 6228677"/>
+                <a:gd name="csX1" fmla="*/ 3613199 w 7229139"/>
+                <a:gd name="csY1" fmla="*/ -1399 h 6228677"/>
+                <a:gd name="csX2" fmla="*/ 7227768 w 7229139"/>
+                <a:gd name="csY2" fmla="*/ 3112940 h 6228677"/>
+                <a:gd name="csX3" fmla="*/ 3613199 w 7229139"/>
+                <a:gd name="csY3" fmla="*/ 6227279 h 6228677"/>
+                <a:gd name="csX4" fmla="*/ -1371 w 7229139"/>
+                <a:gd name="csY4" fmla="*/ 3112940 h 6228677"/>
+              </a:gdLst>
+              <a:ahLst/>
+              <a:cxnLst>
+                <a:cxn ang="0">
+                  <a:pos x="csX0" y="csY0"/>
+                </a:cxn>
+                <a:cxn ang="0">
+                  <a:pos x="csX1" y="csY1"/>
+                </a:cxn>
+                <a:cxn ang="0">
+                  <a:pos x="csX2" y="csY2"/>
+                </a:cxn>
+                <a:cxn ang="0">
+                  <a:pos x="csX3" y="csY3"/>
+                </a:cxn>
+                <a:cxn ang="0">
+                  <a:pos x="csX4" y="csY4"/>
+                </a:cxn>
+              </a:cxnLst>
+              <a:rect l="l" t="t" r="r" b="b"/>
+              <a:pathLst>
+                <a:path w="7229139" h="6228677">
+                  <a:moveTo>
+                    <a:pt x="-1371" y="3112940"/>
+                  </a:moveTo>
+                  <a:cubicBezTo>
+                    <a:pt x="-1371" y="1392953"/>
+                    <a:pt x="1616955" y="-1399"/>
+                    <a:pt x="3613199" y="-1399"/>
+                  </a:cubicBezTo>
+                  <a:cubicBezTo>
+                    <a:pt x="5609441" y="-1399"/>
+                    <a:pt x="7227768" y="1392953"/>
+                    <a:pt x="7227768" y="3112940"/>
+                  </a:cubicBezTo>
+                  <a:cubicBezTo>
+                    <a:pt x="7227768" y="4832927"/>
+                    <a:pt x="5609441" y="6227279"/>
+                    <a:pt x="3613199" y="6227279"/>
+                  </a:cubicBezTo>
+                  <a:cubicBezTo>
+                    <a:pt x="1616955" y="6227279"/>
+                    <a:pt x="-1371" y="4832927"/>
+                    <a:pt x="-1371" y="3112940"/>
+                  </a:cubicBezTo>
+                  <a:close/>
+                </a:path>
+              </a:pathLst>
+            </a:custGeom>
+            <a:solidFill>
+              <a:srgbClr val="4472C4">
+                <a:alpha val="15000"/>
+              </a:srgbClr>
+            </a:solidFill>
+            <a:ln w="8067" cap="flat">
+              <a:noFill/>
+              <a:prstDash val="solid"/>
+              <a:miter/>
+            </a:ln>
+          </p:spPr>
+          <p:txBody>
+            <a:bodyPr/>
+            <a:lstStyle/>
+            <a:p>
+              <a:endParaRPr lang="en-US"/>
+            </a:p>
+          </p:txBody>
+        </p:sp>
+        <p:pic>
+          <p:nvPicPr>
+            <p:cNvPr id="53" name="Graphic 52" descr="Hierarchy outline">
+              <a:extLst>
+                <a:ext uri="{FF2B5EF4-FFF2-40B4-BE49-F238E27FC236}">
+                  <a16:creationId xmlns:a16="http://schemas.microsoft.com/office/drawing/2014/main" id="{B4FA1865-06E0-410E-0884-7ED3E9039DA3}"/>
+                </a:ext>
+              </a:extLst>
+            </p:cNvPr>
+            <p:cNvPicPr>
+              <a:picLocks noChangeAspect="1"/>
+            </p:cNvPicPr>
+            <p:nvPr/>
+          </p:nvPicPr>
+          <p:blipFill>
+            <a:blip>
+              <a:extLst>
+                <a:ext uri="{96DAC541-7B7A-43D3-8B79-37D633B846F1}">
+                  <asvg:svgBlip xmlns:asvg="http://schemas.microsoft.com/office/drawing/2016/SVG/main" r:embed="rId2"/>
+                </a:ext>
+              </a:extLst>
+            </a:blip>
+            <a:stretch>
+              <a:fillRect/>
+            </a:stretch>
+          </p:blipFill>
+          <p:spPr>
+            <a:xfrm>
+              <a:off x="4103587" y="914400"/>
+              <a:ext cx="5029200" cy="5029200"/>
+            </a:xfrm>
+            <a:prstGeom prst="rect">
+              <a:avLst/>
+            </a:prstGeom>
+            <a:effectLst>
+              <a:outerShdw blurRad="50800" dist="127000" dir="2700000" algn="tl" rotWithShape="0">
+                <a:schemeClr val="accent1">
+                  <a:alpha val="40000"/>
+                </a:schemeClr>
+              </a:outerShdw>
+            </a:effectLst>
+          </p:spPr>
+        </p:pic>
+      </p:grpSp>
     </p:spTree>
     <p:extLst>
       <p:ext uri="{BB962C8B-B14F-4D97-AF65-F5344CB8AC3E}">

--- a/Admin/Docs.pptx
+++ b/Admin/Docs.pptx
@@ -32,6 +32,13 @@
     <p:sldId id="260" r:id="rId26"/>
     <p:sldId id="261" r:id="rId27"/>
     <p:sldId id="265" r:id="rId28"/>
+    <p:sldId id="283" r:id="rId29"/>
+    <p:sldId id="284" r:id="rId30"/>
+    <p:sldId id="285" r:id="rId31"/>
+    <p:sldId id="286" r:id="rId32"/>
+    <p:sldId id="287" r:id="rId33"/>
+    <p:sldId id="288" r:id="rId34"/>
+    <p:sldId id="289" r:id="rId35"/>
   </p:sldIdLst>
   <p:sldSz cx="12192000" cy="6858000"/>
   <p:notesSz cx="6858000" cy="9144000"/>
@@ -285,7 +292,7 @@
           <a:p>
             <a:fld id="{5AD74501-8691-4646-B472-1139202FB98B}" type="datetimeFigureOut">
               <a:rPr lang="en-US" smtClean="0"/>
-              <a:t>4/12/2026</a:t>
+              <a:t>4/22/2026</a:t>
             </a:fld>
             <a:endParaRPr lang="en-US"/>
           </a:p>
@@ -483,7 +490,7 @@
           <a:p>
             <a:fld id="{5AD74501-8691-4646-B472-1139202FB98B}" type="datetimeFigureOut">
               <a:rPr lang="en-US" smtClean="0"/>
-              <a:t>4/12/2026</a:t>
+              <a:t>4/22/2026</a:t>
             </a:fld>
             <a:endParaRPr lang="en-US"/>
           </a:p>
@@ -691,7 +698,7 @@
           <a:p>
             <a:fld id="{5AD74501-8691-4646-B472-1139202FB98B}" type="datetimeFigureOut">
               <a:rPr lang="en-US" smtClean="0"/>
-              <a:t>4/12/2026</a:t>
+              <a:t>4/22/2026</a:t>
             </a:fld>
             <a:endParaRPr lang="en-US"/>
           </a:p>
@@ -889,7 +896,7 @@
           <a:p>
             <a:fld id="{5AD74501-8691-4646-B472-1139202FB98B}" type="datetimeFigureOut">
               <a:rPr lang="en-US" smtClean="0"/>
-              <a:t>4/12/2026</a:t>
+              <a:t>4/22/2026</a:t>
             </a:fld>
             <a:endParaRPr lang="en-US"/>
           </a:p>
@@ -1164,7 +1171,7 @@
           <a:p>
             <a:fld id="{5AD74501-8691-4646-B472-1139202FB98B}" type="datetimeFigureOut">
               <a:rPr lang="en-US" smtClean="0"/>
-              <a:t>4/12/2026</a:t>
+              <a:t>4/22/2026</a:t>
             </a:fld>
             <a:endParaRPr lang="en-US"/>
           </a:p>
@@ -1429,7 +1436,7 @@
           <a:p>
             <a:fld id="{5AD74501-8691-4646-B472-1139202FB98B}" type="datetimeFigureOut">
               <a:rPr lang="en-US" smtClean="0"/>
-              <a:t>4/12/2026</a:t>
+              <a:t>4/22/2026</a:t>
             </a:fld>
             <a:endParaRPr lang="en-US"/>
           </a:p>
@@ -1841,7 +1848,7 @@
           <a:p>
             <a:fld id="{5AD74501-8691-4646-B472-1139202FB98B}" type="datetimeFigureOut">
               <a:rPr lang="en-US" smtClean="0"/>
-              <a:t>4/12/2026</a:t>
+              <a:t>4/22/2026</a:t>
             </a:fld>
             <a:endParaRPr lang="en-US"/>
           </a:p>
@@ -1982,7 +1989,7 @@
           <a:p>
             <a:fld id="{5AD74501-8691-4646-B472-1139202FB98B}" type="datetimeFigureOut">
               <a:rPr lang="en-US" smtClean="0"/>
-              <a:t>4/12/2026</a:t>
+              <a:t>4/22/2026</a:t>
             </a:fld>
             <a:endParaRPr lang="en-US"/>
           </a:p>
@@ -2095,7 +2102,7 @@
           <a:p>
             <a:fld id="{5AD74501-8691-4646-B472-1139202FB98B}" type="datetimeFigureOut">
               <a:rPr lang="en-US" smtClean="0"/>
-              <a:t>4/12/2026</a:t>
+              <a:t>4/22/2026</a:t>
             </a:fld>
             <a:endParaRPr lang="en-US"/>
           </a:p>
@@ -2406,7 +2413,7 @@
           <a:p>
             <a:fld id="{5AD74501-8691-4646-B472-1139202FB98B}" type="datetimeFigureOut">
               <a:rPr lang="en-US" smtClean="0"/>
-              <a:t>4/12/2026</a:t>
+              <a:t>4/22/2026</a:t>
             </a:fld>
             <a:endParaRPr lang="en-US"/>
           </a:p>
@@ -2694,7 +2701,7 @@
           <a:p>
             <a:fld id="{5AD74501-8691-4646-B472-1139202FB98B}" type="datetimeFigureOut">
               <a:rPr lang="en-US" smtClean="0"/>
-              <a:t>4/12/2026</a:t>
+              <a:t>4/22/2026</a:t>
             </a:fld>
             <a:endParaRPr lang="en-US"/>
           </a:p>
@@ -2935,7 +2942,7 @@
           <a:p>
             <a:fld id="{5AD74501-8691-4646-B472-1139202FB98B}" type="datetimeFigureOut">
               <a:rPr lang="en-US" smtClean="0"/>
-              <a:t>4/12/2026</a:t>
+              <a:t>4/22/2026</a:t>
             </a:fld>
             <a:endParaRPr lang="en-US"/>
           </a:p>
@@ -13356,6 +13363,2705 @@
 </p:sld>
 </file>
 
+<file path=ppt/slides/slide28.xml><?xml version="1.0" encoding="utf-8"?>
+<p:sld xmlns:a="http://schemas.openxmlformats.org/drawingml/2006/main" xmlns:r="http://schemas.openxmlformats.org/officeDocument/2006/relationships" xmlns:p="http://schemas.openxmlformats.org/presentationml/2006/main">
+  <p:cSld>
+    <p:spTree>
+      <p:nvGrpSpPr>
+        <p:cNvPr id="1" name=""/>
+        <p:cNvGrpSpPr/>
+        <p:nvPr/>
+      </p:nvGrpSpPr>
+      <p:grpSpPr>
+        <a:xfrm>
+          <a:off x="0" y="0"/>
+          <a:ext cx="0" cy="0"/>
+          <a:chOff x="0" y="0"/>
+          <a:chExt cx="0" cy="0"/>
+        </a:xfrm>
+      </p:grpSpPr>
+      <p:sp>
+        <p:nvSpPr>
+          <p:cNvPr id="3" name="TextBox 2">
+            <a:extLst>
+              <a:ext uri="{FF2B5EF4-FFF2-40B4-BE49-F238E27FC236}">
+                <a16:creationId xmlns:a16="http://schemas.microsoft.com/office/drawing/2014/main" id="{D398BC0B-18F9-59CC-AA75-510DFA0DFA80}"/>
+              </a:ext>
+            </a:extLst>
+          </p:cNvPr>
+          <p:cNvSpPr txBox="1"/>
+          <p:nvPr/>
+        </p:nvSpPr>
+        <p:spPr>
+          <a:xfrm>
+            <a:off x="8697310" y="116570"/>
+            <a:ext cx="6989379" cy="4801314"/>
+          </a:xfrm>
+          <a:prstGeom prst="rect">
+            <a:avLst/>
+          </a:prstGeom>
+          <a:noFill/>
+        </p:spPr>
+        <p:txBody>
+          <a:bodyPr wrap="square">
+            <a:spAutoFit/>
+          </a:bodyPr>
+          <a:lstStyle/>
+          <a:p>
+            <a:r>
+              <a:rPr lang="en-US" dirty="0"/>
+              <a:t>┌─────────────────────────────┐</a:t>
+            </a:r>
+          </a:p>
+          <a:p>
+            <a:r>
+              <a:rPr lang="en-US" dirty="0"/>
+              <a:t>│        </a:t>
+            </a:r>
+            <a:r>
+              <a:rPr lang="en-US" dirty="0" err="1"/>
+              <a:t>CacheWarmingService</a:t>
+            </a:r>
+            <a:r>
+              <a:rPr lang="en-US" dirty="0"/>
+              <a:t>            			</a:t>
+            </a:r>
+          </a:p>
+          <a:p>
+            <a:r>
+              <a:rPr lang="en-US" dirty="0"/>
+              <a:t>│        (</a:t>
+            </a:r>
+            <a:r>
+              <a:rPr lang="en-US" dirty="0" err="1"/>
+              <a:t>BackgroundService</a:t>
+            </a:r>
+            <a:r>
+              <a:rPr lang="en-US" dirty="0"/>
+              <a:t>)               			</a:t>
+            </a:r>
+          </a:p>
+          <a:p>
+            <a:r>
+              <a:rPr lang="en-US" dirty="0"/>
+              <a:t>│                                            				</a:t>
+            </a:r>
+          </a:p>
+          <a:p>
+            <a:r>
+              <a:rPr lang="en-US" dirty="0"/>
+              <a:t>│  Timer fires every N minutes              			 </a:t>
+            </a:r>
+          </a:p>
+          <a:p>
+            <a:r>
+              <a:rPr lang="en-US" dirty="0"/>
+              <a:t>│       │                                     				</a:t>
+            </a:r>
+          </a:p>
+          <a:p>
+            <a:r>
+              <a:rPr lang="en-US" dirty="0"/>
+              <a:t>│      ▼                                   				 </a:t>
+            </a:r>
+          </a:p>
+          <a:p>
+            <a:r>
+              <a:rPr lang="en-US" dirty="0"/>
+              <a:t>│  Calls your API / DB                        				</a:t>
+            </a:r>
+          </a:p>
+          <a:p>
+            <a:r>
+              <a:rPr lang="en-US" dirty="0"/>
+              <a:t>│       │                                     				</a:t>
+            </a:r>
+          </a:p>
+          <a:p>
+            <a:r>
+              <a:rPr lang="en-US" dirty="0"/>
+              <a:t>│      ▼                                    				</a:t>
+            </a:r>
+          </a:p>
+          <a:p>
+            <a:r>
+              <a:rPr lang="en-US" dirty="0"/>
+              <a:t>│  Writes to </a:t>
+            </a:r>
+            <a:r>
+              <a:rPr lang="en-US" dirty="0" err="1"/>
+              <a:t>IMemoryCache</a:t>
+            </a:r>
+            <a:r>
+              <a:rPr lang="en-US" dirty="0"/>
+              <a:t>                    			</a:t>
+            </a:r>
+          </a:p>
+          <a:p>
+            <a:r>
+              <a:rPr lang="en-US" dirty="0"/>
+              <a:t>└────────────────────────────┘</a:t>
+            </a:r>
+          </a:p>
+          <a:p>
+            <a:r>
+              <a:rPr lang="en-US" dirty="0"/>
+              <a:t>        ▲</a:t>
+            </a:r>
+          </a:p>
+          <a:p>
+            <a:r>
+              <a:rPr lang="en-US" dirty="0"/>
+              <a:t>         │  reads</a:t>
+            </a:r>
+          </a:p>
+          <a:p>
+            <a:r>
+              <a:rPr lang="en-US" dirty="0"/>
+              <a:t>┌──────────────────────────────┐</a:t>
+            </a:r>
+          </a:p>
+          <a:p>
+            <a:r>
+              <a:rPr lang="en-US" dirty="0"/>
+              <a:t>│      Your API Controllers / Services     			</a:t>
+            </a:r>
+          </a:p>
+          <a:p>
+            <a:r>
+              <a:rPr lang="en-US" dirty="0"/>
+              <a:t>└──────────────────────────────┘</a:t>
+            </a:r>
+          </a:p>
+        </p:txBody>
+      </p:sp>
+      <p:sp>
+        <p:nvSpPr>
+          <p:cNvPr id="5" name="TextBox 4">
+            <a:extLst>
+              <a:ext uri="{FF2B5EF4-FFF2-40B4-BE49-F238E27FC236}">
+                <a16:creationId xmlns:a16="http://schemas.microsoft.com/office/drawing/2014/main" id="{D8CF820B-6F1E-89BE-0F28-4B02FCEEB158}"/>
+              </a:ext>
+            </a:extLst>
+          </p:cNvPr>
+          <p:cNvSpPr txBox="1"/>
+          <p:nvPr/>
+        </p:nvSpPr>
+        <p:spPr>
+          <a:xfrm>
+            <a:off x="157656" y="0"/>
+            <a:ext cx="4277710" cy="7725192"/>
+          </a:xfrm>
+          <a:prstGeom prst="rect">
+            <a:avLst/>
+          </a:prstGeom>
+          <a:noFill/>
+        </p:spPr>
+        <p:txBody>
+          <a:bodyPr wrap="square">
+            <a:spAutoFit/>
+          </a:bodyPr>
+          <a:lstStyle/>
+          <a:p>
+            <a:r>
+              <a:rPr lang="en-US" sz="800" dirty="0"/>
+              <a:t>public class </a:t>
+            </a:r>
+            <a:r>
+              <a:rPr lang="en-US" sz="800" dirty="0" err="1"/>
+              <a:t>CacheWarmingService</a:t>
+            </a:r>
+            <a:r>
+              <a:rPr lang="en-US" sz="800" dirty="0"/>
+              <a:t> : </a:t>
+            </a:r>
+            <a:r>
+              <a:rPr lang="en-US" sz="800" dirty="0" err="1"/>
+              <a:t>BackgroundService</a:t>
+            </a:r>
+            <a:endParaRPr lang="en-US" sz="800" dirty="0"/>
+          </a:p>
+          <a:p>
+            <a:r>
+              <a:rPr lang="en-US" sz="800" dirty="0"/>
+              <a:t>{</a:t>
+            </a:r>
+          </a:p>
+          <a:p>
+            <a:r>
+              <a:rPr lang="en-US" sz="800" dirty="0"/>
+              <a:t>    private </a:t>
+            </a:r>
+            <a:r>
+              <a:rPr lang="en-US" sz="800" dirty="0" err="1"/>
+              <a:t>readonly</a:t>
+            </a:r>
+            <a:r>
+              <a:rPr lang="en-US" sz="800" dirty="0"/>
+              <a:t> </a:t>
+            </a:r>
+            <a:r>
+              <a:rPr lang="en-US" sz="800" dirty="0" err="1"/>
+              <a:t>IServiceScopeFactory</a:t>
+            </a:r>
+            <a:r>
+              <a:rPr lang="en-US" sz="800" dirty="0"/>
+              <a:t> _</a:t>
+            </a:r>
+            <a:r>
+              <a:rPr lang="en-US" sz="800" dirty="0" err="1"/>
+              <a:t>scopeFactory</a:t>
+            </a:r>
+            <a:r>
+              <a:rPr lang="en-US" sz="800" dirty="0"/>
+              <a:t>;</a:t>
+            </a:r>
+          </a:p>
+          <a:p>
+            <a:r>
+              <a:rPr lang="en-US" sz="800" dirty="0"/>
+              <a:t>    private </a:t>
+            </a:r>
+            <a:r>
+              <a:rPr lang="en-US" sz="800" dirty="0" err="1"/>
+              <a:t>readonly</a:t>
+            </a:r>
+            <a:r>
+              <a:rPr lang="en-US" sz="800" dirty="0"/>
+              <a:t> </a:t>
+            </a:r>
+            <a:r>
+              <a:rPr lang="en-US" sz="800" dirty="0" err="1"/>
+              <a:t>IMemoryCache</a:t>
+            </a:r>
+            <a:r>
+              <a:rPr lang="en-US" sz="800" dirty="0"/>
+              <a:t> _cache;</a:t>
+            </a:r>
+          </a:p>
+          <a:p>
+            <a:r>
+              <a:rPr lang="en-US" sz="800" dirty="0"/>
+              <a:t>    private </a:t>
+            </a:r>
+            <a:r>
+              <a:rPr lang="en-US" sz="800" dirty="0" err="1"/>
+              <a:t>readonly</a:t>
+            </a:r>
+            <a:r>
+              <a:rPr lang="en-US" sz="800" dirty="0"/>
+              <a:t> </a:t>
+            </a:r>
+            <a:r>
+              <a:rPr lang="en-US" sz="800" dirty="0" err="1"/>
+              <a:t>ILogger</a:t>
+            </a:r>
+            <a:r>
+              <a:rPr lang="en-US" sz="800" dirty="0"/>
+              <a:t>&lt;</a:t>
+            </a:r>
+            <a:r>
+              <a:rPr lang="en-US" sz="800" dirty="0" err="1"/>
+              <a:t>CacheWarmingService</a:t>
+            </a:r>
+            <a:r>
+              <a:rPr lang="en-US" sz="800" dirty="0"/>
+              <a:t>&gt; _logger;</a:t>
+            </a:r>
+          </a:p>
+          <a:p>
+            <a:endParaRPr lang="en-US" sz="800" dirty="0"/>
+          </a:p>
+          <a:p>
+            <a:r>
+              <a:rPr lang="en-US" sz="800" dirty="0"/>
+              <a:t>    // How often to refresh the cache</a:t>
+            </a:r>
+          </a:p>
+          <a:p>
+            <a:r>
+              <a:rPr lang="en-US" sz="800" dirty="0"/>
+              <a:t>    private </a:t>
+            </a:r>
+            <a:r>
+              <a:rPr lang="en-US" sz="800" dirty="0" err="1"/>
+              <a:t>readonly</a:t>
+            </a:r>
+            <a:r>
+              <a:rPr lang="en-US" sz="800" dirty="0"/>
+              <a:t> </a:t>
+            </a:r>
+            <a:r>
+              <a:rPr lang="en-US" sz="800" dirty="0" err="1"/>
+              <a:t>TimeSpan</a:t>
+            </a:r>
+            <a:r>
+              <a:rPr lang="en-US" sz="800" dirty="0"/>
+              <a:t> _</a:t>
+            </a:r>
+            <a:r>
+              <a:rPr lang="en-US" sz="800" dirty="0" err="1"/>
+              <a:t>refreshInterval</a:t>
+            </a:r>
+            <a:r>
+              <a:rPr lang="en-US" sz="800" dirty="0"/>
+              <a:t> = </a:t>
+            </a:r>
+            <a:r>
+              <a:rPr lang="en-US" sz="800" dirty="0" err="1"/>
+              <a:t>TimeSpan.FromMinutes</a:t>
+            </a:r>
+            <a:r>
+              <a:rPr lang="en-US" sz="800" dirty="0"/>
+              <a:t>(5);</a:t>
+            </a:r>
+          </a:p>
+          <a:p>
+            <a:endParaRPr lang="en-US" sz="800" dirty="0"/>
+          </a:p>
+          <a:p>
+            <a:r>
+              <a:rPr lang="en-US" sz="800" dirty="0"/>
+              <a:t>    public </a:t>
+            </a:r>
+            <a:r>
+              <a:rPr lang="en-US" sz="800" dirty="0" err="1"/>
+              <a:t>CacheWarmingService</a:t>
+            </a:r>
+            <a:r>
+              <a:rPr lang="en-US" sz="800" dirty="0"/>
+              <a:t>(</a:t>
+            </a:r>
+          </a:p>
+          <a:p>
+            <a:r>
+              <a:rPr lang="en-US" sz="800" dirty="0"/>
+              <a:t>        </a:t>
+            </a:r>
+            <a:r>
+              <a:rPr lang="en-US" sz="800" dirty="0" err="1"/>
+              <a:t>IServiceScopeFactory</a:t>
+            </a:r>
+            <a:r>
+              <a:rPr lang="en-US" sz="800" dirty="0"/>
+              <a:t> </a:t>
+            </a:r>
+            <a:r>
+              <a:rPr lang="en-US" sz="800" dirty="0" err="1"/>
+              <a:t>scopeFactory</a:t>
+            </a:r>
+            <a:r>
+              <a:rPr lang="en-US" sz="800" dirty="0"/>
+              <a:t>,</a:t>
+            </a:r>
+          </a:p>
+          <a:p>
+            <a:r>
+              <a:rPr lang="en-US" sz="800" dirty="0"/>
+              <a:t>        </a:t>
+            </a:r>
+            <a:r>
+              <a:rPr lang="en-US" sz="800" dirty="0" err="1"/>
+              <a:t>IMemoryCache</a:t>
+            </a:r>
+            <a:r>
+              <a:rPr lang="en-US" sz="800" dirty="0"/>
+              <a:t> cache,</a:t>
+            </a:r>
+          </a:p>
+          <a:p>
+            <a:r>
+              <a:rPr lang="en-US" sz="800" dirty="0"/>
+              <a:t>        </a:t>
+            </a:r>
+            <a:r>
+              <a:rPr lang="en-US" sz="800" dirty="0" err="1"/>
+              <a:t>ILogger</a:t>
+            </a:r>
+            <a:r>
+              <a:rPr lang="en-US" sz="800" dirty="0"/>
+              <a:t>&lt;</a:t>
+            </a:r>
+            <a:r>
+              <a:rPr lang="en-US" sz="800" dirty="0" err="1"/>
+              <a:t>CacheWarmingService</a:t>
+            </a:r>
+            <a:r>
+              <a:rPr lang="en-US" sz="800" dirty="0"/>
+              <a:t>&gt; logger)</a:t>
+            </a:r>
+          </a:p>
+          <a:p>
+            <a:r>
+              <a:rPr lang="en-US" sz="800" dirty="0"/>
+              <a:t>    {</a:t>
+            </a:r>
+          </a:p>
+          <a:p>
+            <a:r>
+              <a:rPr lang="en-US" sz="800" dirty="0"/>
+              <a:t>        _</a:t>
+            </a:r>
+            <a:r>
+              <a:rPr lang="en-US" sz="800" dirty="0" err="1"/>
+              <a:t>scopeFactory</a:t>
+            </a:r>
+            <a:r>
+              <a:rPr lang="en-US" sz="800" dirty="0"/>
+              <a:t> = </a:t>
+            </a:r>
+            <a:r>
+              <a:rPr lang="en-US" sz="800" dirty="0" err="1"/>
+              <a:t>scopeFactory</a:t>
+            </a:r>
+            <a:r>
+              <a:rPr lang="en-US" sz="800" dirty="0"/>
+              <a:t>;</a:t>
+            </a:r>
+          </a:p>
+          <a:p>
+            <a:r>
+              <a:rPr lang="en-US" sz="800" dirty="0"/>
+              <a:t>        _cache = cache;</a:t>
+            </a:r>
+          </a:p>
+          <a:p>
+            <a:r>
+              <a:rPr lang="en-US" sz="800" dirty="0"/>
+              <a:t>        _logger = logger;</a:t>
+            </a:r>
+          </a:p>
+          <a:p>
+            <a:r>
+              <a:rPr lang="en-US" sz="800" dirty="0"/>
+              <a:t>    }</a:t>
+            </a:r>
+          </a:p>
+          <a:p>
+            <a:endParaRPr lang="en-US" sz="800" dirty="0"/>
+          </a:p>
+          <a:p>
+            <a:r>
+              <a:rPr lang="en-US" sz="800" dirty="0"/>
+              <a:t>    protected override async Task </a:t>
+            </a:r>
+            <a:r>
+              <a:rPr lang="en-US" sz="800" dirty="0" err="1"/>
+              <a:t>ExecuteAsync</a:t>
+            </a:r>
+            <a:r>
+              <a:rPr lang="en-US" sz="800" dirty="0"/>
+              <a:t>(</a:t>
+            </a:r>
+            <a:r>
+              <a:rPr lang="en-US" sz="800" dirty="0" err="1"/>
+              <a:t>CancellationToken</a:t>
+            </a:r>
+            <a:r>
+              <a:rPr lang="en-US" sz="800" dirty="0"/>
+              <a:t> </a:t>
+            </a:r>
+            <a:r>
+              <a:rPr lang="en-US" sz="800" dirty="0" err="1"/>
+              <a:t>stoppingToken</a:t>
+            </a:r>
+            <a:r>
+              <a:rPr lang="en-US" sz="800" dirty="0"/>
+              <a:t>)</a:t>
+            </a:r>
+          </a:p>
+          <a:p>
+            <a:r>
+              <a:rPr lang="en-US" sz="800" dirty="0"/>
+              <a:t>    {</a:t>
+            </a:r>
+          </a:p>
+          <a:p>
+            <a:r>
+              <a:rPr lang="en-US" sz="800" dirty="0"/>
+              <a:t>        // Warm immediately on startup — don't wait for first timer tick</a:t>
+            </a:r>
+          </a:p>
+          <a:p>
+            <a:r>
+              <a:rPr lang="en-US" sz="800" dirty="0"/>
+              <a:t>        await </a:t>
+            </a:r>
+            <a:r>
+              <a:rPr lang="en-US" sz="800" dirty="0" err="1"/>
+              <a:t>LoadDataIntoCache</a:t>
+            </a:r>
+            <a:r>
+              <a:rPr lang="en-US" sz="800" dirty="0"/>
+              <a:t>(</a:t>
+            </a:r>
+            <a:r>
+              <a:rPr lang="en-US" sz="800" dirty="0" err="1"/>
+              <a:t>stoppingToken</a:t>
+            </a:r>
+            <a:r>
+              <a:rPr lang="en-US" sz="800" dirty="0"/>
+              <a:t>);</a:t>
+            </a:r>
+          </a:p>
+          <a:p>
+            <a:endParaRPr lang="en-US" sz="800" dirty="0"/>
+          </a:p>
+          <a:p>
+            <a:r>
+              <a:rPr lang="en-US" sz="800" dirty="0"/>
+              <a:t>        using var timer = new </a:t>
+            </a:r>
+            <a:r>
+              <a:rPr lang="en-US" sz="800" dirty="0" err="1"/>
+              <a:t>PeriodicTimer</a:t>
+            </a:r>
+            <a:r>
+              <a:rPr lang="en-US" sz="800" dirty="0"/>
+              <a:t>(_</a:t>
+            </a:r>
+            <a:r>
+              <a:rPr lang="en-US" sz="800" dirty="0" err="1"/>
+              <a:t>refreshInterval</a:t>
+            </a:r>
+            <a:r>
+              <a:rPr lang="en-US" sz="800" dirty="0"/>
+              <a:t>);</a:t>
+            </a:r>
+          </a:p>
+          <a:p>
+            <a:endParaRPr lang="en-US" sz="800" dirty="0"/>
+          </a:p>
+          <a:p>
+            <a:r>
+              <a:rPr lang="en-US" sz="800" dirty="0"/>
+              <a:t>        while (!</a:t>
+            </a:r>
+            <a:r>
+              <a:rPr lang="en-US" sz="800" dirty="0" err="1"/>
+              <a:t>stoppingToken.IsCancellationRequested</a:t>
+            </a:r>
+            <a:endParaRPr lang="en-US" sz="800" dirty="0"/>
+          </a:p>
+          <a:p>
+            <a:r>
+              <a:rPr lang="en-US" sz="800" dirty="0"/>
+              <a:t>               &amp;&amp; await </a:t>
+            </a:r>
+            <a:r>
+              <a:rPr lang="en-US" sz="800" dirty="0" err="1"/>
+              <a:t>timer.WaitForNextTickAsync</a:t>
+            </a:r>
+            <a:r>
+              <a:rPr lang="en-US" sz="800" dirty="0"/>
+              <a:t>(</a:t>
+            </a:r>
+            <a:r>
+              <a:rPr lang="en-US" sz="800" dirty="0" err="1"/>
+              <a:t>stoppingToken</a:t>
+            </a:r>
+            <a:r>
+              <a:rPr lang="en-US" sz="800" dirty="0"/>
+              <a:t>))</a:t>
+            </a:r>
+          </a:p>
+          <a:p>
+            <a:r>
+              <a:rPr lang="en-US" sz="800" dirty="0"/>
+              <a:t>        {</a:t>
+            </a:r>
+          </a:p>
+          <a:p>
+            <a:r>
+              <a:rPr lang="en-US" sz="800" dirty="0"/>
+              <a:t>            await </a:t>
+            </a:r>
+            <a:r>
+              <a:rPr lang="en-US" sz="800" dirty="0" err="1"/>
+              <a:t>LoadDataIntoCache</a:t>
+            </a:r>
+            <a:r>
+              <a:rPr lang="en-US" sz="800" dirty="0"/>
+              <a:t>(</a:t>
+            </a:r>
+            <a:r>
+              <a:rPr lang="en-US" sz="800" dirty="0" err="1"/>
+              <a:t>stoppingToken</a:t>
+            </a:r>
+            <a:r>
+              <a:rPr lang="en-US" sz="800" dirty="0"/>
+              <a:t>);</a:t>
+            </a:r>
+          </a:p>
+          <a:p>
+            <a:r>
+              <a:rPr lang="en-US" sz="800" dirty="0"/>
+              <a:t>        }</a:t>
+            </a:r>
+          </a:p>
+          <a:p>
+            <a:r>
+              <a:rPr lang="en-US" sz="800" dirty="0"/>
+              <a:t>    }</a:t>
+            </a:r>
+          </a:p>
+          <a:p>
+            <a:endParaRPr lang="en-US" sz="800" dirty="0"/>
+          </a:p>
+          <a:p>
+            <a:r>
+              <a:rPr lang="en-US" sz="800" dirty="0"/>
+              <a:t>    private async Task </a:t>
+            </a:r>
+            <a:r>
+              <a:rPr lang="en-US" sz="800" dirty="0" err="1"/>
+              <a:t>LoadDataIntoCache</a:t>
+            </a:r>
+            <a:r>
+              <a:rPr lang="en-US" sz="800" dirty="0"/>
+              <a:t>(</a:t>
+            </a:r>
+            <a:r>
+              <a:rPr lang="en-US" sz="800" dirty="0" err="1"/>
+              <a:t>CancellationToken</a:t>
+            </a:r>
+            <a:r>
+              <a:rPr lang="en-US" sz="800" dirty="0"/>
+              <a:t> </a:t>
+            </a:r>
+            <a:r>
+              <a:rPr lang="en-US" sz="800" dirty="0" err="1"/>
+              <a:t>ct</a:t>
+            </a:r>
+            <a:r>
+              <a:rPr lang="en-US" sz="800" dirty="0"/>
+              <a:t>)</a:t>
+            </a:r>
+          </a:p>
+          <a:p>
+            <a:r>
+              <a:rPr lang="en-US" sz="800" dirty="0"/>
+              <a:t>    {</a:t>
+            </a:r>
+          </a:p>
+          <a:p>
+            <a:r>
+              <a:rPr lang="en-US" sz="800" dirty="0"/>
+              <a:t>        try</a:t>
+            </a:r>
+          </a:p>
+          <a:p>
+            <a:r>
+              <a:rPr lang="en-US" sz="800" dirty="0"/>
+              <a:t>        {</a:t>
+            </a:r>
+          </a:p>
+          <a:p>
+            <a:r>
+              <a:rPr lang="en-US" sz="800" dirty="0"/>
+              <a:t>            // Use a scope because your data service is likely scoped/transient</a:t>
+            </a:r>
+          </a:p>
+          <a:p>
+            <a:r>
+              <a:rPr lang="en-US" sz="800" dirty="0"/>
+              <a:t>            using var scope = _</a:t>
+            </a:r>
+            <a:r>
+              <a:rPr lang="en-US" sz="800" dirty="0" err="1"/>
+              <a:t>scopeFactory.CreateScope</a:t>
+            </a:r>
+            <a:r>
+              <a:rPr lang="en-US" sz="800" dirty="0"/>
+              <a:t>();</a:t>
+            </a:r>
+          </a:p>
+          <a:p>
+            <a:r>
+              <a:rPr lang="en-US" sz="800" dirty="0"/>
+              <a:t>            var </a:t>
+            </a:r>
+            <a:r>
+              <a:rPr lang="en-US" sz="800" dirty="0" err="1"/>
+              <a:t>dataService</a:t>
+            </a:r>
+            <a:r>
+              <a:rPr lang="en-US" sz="800" dirty="0"/>
+              <a:t> = </a:t>
+            </a:r>
+            <a:r>
+              <a:rPr lang="en-US" sz="800" dirty="0" err="1"/>
+              <a:t>scope.ServiceProvider.GetRequiredService</a:t>
+            </a:r>
+            <a:r>
+              <a:rPr lang="en-US" sz="800" dirty="0"/>
+              <a:t>&lt;</a:t>
+            </a:r>
+            <a:r>
+              <a:rPr lang="en-US" sz="800" dirty="0" err="1"/>
+              <a:t>IMyDataService</a:t>
+            </a:r>
+            <a:r>
+              <a:rPr lang="en-US" sz="800" dirty="0"/>
+              <a:t>&gt;();</a:t>
+            </a:r>
+          </a:p>
+          <a:p>
+            <a:endParaRPr lang="en-US" sz="800" dirty="0"/>
+          </a:p>
+          <a:p>
+            <a:r>
+              <a:rPr lang="en-US" sz="800" dirty="0"/>
+              <a:t>            var data = await </a:t>
+            </a:r>
+            <a:r>
+              <a:rPr lang="en-US" sz="800" dirty="0" err="1"/>
+              <a:t>dataService.FetchDataAsync</a:t>
+            </a:r>
+            <a:r>
+              <a:rPr lang="en-US" sz="800" dirty="0"/>
+              <a:t>(</a:t>
+            </a:r>
+            <a:r>
+              <a:rPr lang="en-US" sz="800" dirty="0" err="1"/>
+              <a:t>ct</a:t>
+            </a:r>
+            <a:r>
+              <a:rPr lang="en-US" sz="800" dirty="0"/>
+              <a:t>);</a:t>
+            </a:r>
+          </a:p>
+          <a:p>
+            <a:endParaRPr lang="en-US" sz="800" dirty="0"/>
+          </a:p>
+          <a:p>
+            <a:r>
+              <a:rPr lang="en-US" sz="800" dirty="0"/>
+              <a:t>            var options = new </a:t>
+            </a:r>
+            <a:r>
+              <a:rPr lang="en-US" sz="800" dirty="0" err="1"/>
+              <a:t>MemoryCacheEntryOptions</a:t>
+            </a:r>
+            <a:endParaRPr lang="en-US" sz="800" dirty="0"/>
+          </a:p>
+          <a:p>
+            <a:r>
+              <a:rPr lang="en-US" sz="800" dirty="0"/>
+              <a:t>            {</a:t>
+            </a:r>
+          </a:p>
+          <a:p>
+            <a:r>
+              <a:rPr lang="en-US" sz="800" dirty="0"/>
+              <a:t>                // Safety net: if background service dies, cache expires</a:t>
+            </a:r>
+          </a:p>
+          <a:p>
+            <a:r>
+              <a:rPr lang="en-US" sz="800" dirty="0"/>
+              <a:t>                // rather than serving stale data forever</a:t>
+            </a:r>
+          </a:p>
+          <a:p>
+            <a:r>
+              <a:rPr lang="en-US" sz="800" dirty="0"/>
+              <a:t>                </a:t>
+            </a:r>
+            <a:r>
+              <a:rPr lang="en-US" sz="800" dirty="0" err="1"/>
+              <a:t>AbsoluteExpirationRelativeToNow</a:t>
+            </a:r>
+            <a:r>
+              <a:rPr lang="en-US" sz="800" dirty="0"/>
+              <a:t> = _</a:t>
+            </a:r>
+            <a:r>
+              <a:rPr lang="en-US" sz="800" dirty="0" err="1"/>
+              <a:t>refreshInterval</a:t>
+            </a:r>
+            <a:r>
+              <a:rPr lang="en-US" sz="800" dirty="0"/>
+              <a:t> * 3,</a:t>
+            </a:r>
+          </a:p>
+          <a:p>
+            <a:r>
+              <a:rPr lang="en-US" sz="800" dirty="0"/>
+              <a:t>                Priority = </a:t>
+            </a:r>
+            <a:r>
+              <a:rPr lang="en-US" sz="800" dirty="0" err="1"/>
+              <a:t>CacheItemPriority.NeverRemove</a:t>
+            </a:r>
+            <a:endParaRPr lang="en-US" sz="800" dirty="0"/>
+          </a:p>
+          <a:p>
+            <a:r>
+              <a:rPr lang="en-US" sz="800" dirty="0"/>
+              <a:t>            };</a:t>
+            </a:r>
+          </a:p>
+          <a:p>
+            <a:endParaRPr lang="en-US" sz="800" dirty="0"/>
+          </a:p>
+          <a:p>
+            <a:r>
+              <a:rPr lang="en-US" sz="800" dirty="0"/>
+              <a:t>            _</a:t>
+            </a:r>
+            <a:r>
+              <a:rPr lang="en-US" sz="800" dirty="0" err="1"/>
+              <a:t>cache.Set</a:t>
+            </a:r>
+            <a:r>
+              <a:rPr lang="en-US" sz="800" dirty="0"/>
+              <a:t>(</a:t>
+            </a:r>
+            <a:r>
+              <a:rPr lang="en-US" sz="800" dirty="0" err="1"/>
+              <a:t>CacheKeys.MyData</a:t>
+            </a:r>
+            <a:r>
+              <a:rPr lang="en-US" sz="800" dirty="0"/>
+              <a:t>, data, options);</a:t>
+            </a:r>
+          </a:p>
+          <a:p>
+            <a:endParaRPr lang="en-US" sz="800" dirty="0"/>
+          </a:p>
+          <a:p>
+            <a:r>
+              <a:rPr lang="en-US" sz="800" dirty="0"/>
+              <a:t>            _</a:t>
+            </a:r>
+            <a:r>
+              <a:rPr lang="en-US" sz="800" dirty="0" err="1"/>
+              <a:t>logger.LogInformation</a:t>
+            </a:r>
+            <a:r>
+              <a:rPr lang="en-US" sz="800" dirty="0"/>
+              <a:t>("Cache refreshed at {Time}", </a:t>
+            </a:r>
+            <a:r>
+              <a:rPr lang="en-US" sz="800" dirty="0" err="1"/>
+              <a:t>DateTimeOffset.UtcNow</a:t>
+            </a:r>
+            <a:r>
+              <a:rPr lang="en-US" sz="800" dirty="0"/>
+              <a:t>);</a:t>
+            </a:r>
+          </a:p>
+          <a:p>
+            <a:r>
+              <a:rPr lang="en-US" sz="800" dirty="0"/>
+              <a:t>        }</a:t>
+            </a:r>
+          </a:p>
+          <a:p>
+            <a:r>
+              <a:rPr lang="en-US" sz="800" dirty="0"/>
+              <a:t>        catch (Exception ex)</a:t>
+            </a:r>
+          </a:p>
+          <a:p>
+            <a:r>
+              <a:rPr lang="en-US" sz="800" dirty="0"/>
+              <a:t>        {</a:t>
+            </a:r>
+          </a:p>
+          <a:p>
+            <a:r>
+              <a:rPr lang="en-US" sz="800" dirty="0"/>
+              <a:t>            // Don't crash the service — log and keep old cached value</a:t>
+            </a:r>
+          </a:p>
+          <a:p>
+            <a:r>
+              <a:rPr lang="en-US" sz="800" dirty="0"/>
+              <a:t>            _</a:t>
+            </a:r>
+            <a:r>
+              <a:rPr lang="en-US" sz="800" dirty="0" err="1"/>
+              <a:t>logger.LogError</a:t>
+            </a:r>
+            <a:r>
+              <a:rPr lang="en-US" sz="800" dirty="0"/>
+              <a:t>(ex, "Failed to refresh cache. Serving stale data.");</a:t>
+            </a:r>
+          </a:p>
+          <a:p>
+            <a:r>
+              <a:rPr lang="en-US" sz="800" dirty="0"/>
+              <a:t>        }</a:t>
+            </a:r>
+          </a:p>
+          <a:p>
+            <a:r>
+              <a:rPr lang="en-US" sz="800" dirty="0"/>
+              <a:t>    }</a:t>
+            </a:r>
+          </a:p>
+          <a:p>
+            <a:r>
+              <a:rPr lang="en-US" sz="800" dirty="0"/>
+              <a:t>}</a:t>
+            </a:r>
+          </a:p>
+        </p:txBody>
+      </p:sp>
+      <p:graphicFrame>
+        <p:nvGraphicFramePr>
+          <p:cNvPr id="6" name="Table 5">
+            <a:extLst>
+              <a:ext uri="{FF2B5EF4-FFF2-40B4-BE49-F238E27FC236}">
+                <a16:creationId xmlns:a16="http://schemas.microsoft.com/office/drawing/2014/main" id="{4727E665-4A8E-0177-273B-991425F55603}"/>
+              </a:ext>
+            </a:extLst>
+          </p:cNvPr>
+          <p:cNvGraphicFramePr>
+            <a:graphicFrameLocks noGrp="1"/>
+          </p:cNvGraphicFramePr>
+          <p:nvPr>
+            <p:extLst>
+              <p:ext uri="{D42A27DB-BD31-4B8C-83A1-F6EECF244321}">
+                <p14:modId xmlns:p14="http://schemas.microsoft.com/office/powerpoint/2010/main" val="3563487046"/>
+              </p:ext>
+            </p:extLst>
+          </p:nvPr>
+        </p:nvGraphicFramePr>
+        <p:xfrm>
+          <a:off x="4435365" y="4971487"/>
+          <a:ext cx="7231117" cy="1828800"/>
+        </p:xfrm>
+        <a:graphic>
+          <a:graphicData uri="http://schemas.openxmlformats.org/drawingml/2006/table">
+            <a:tbl>
+              <a:tblPr/>
+              <a:tblGrid>
+                <a:gridCol w="2416930">
+                  <a:extLst>
+                    <a:ext uri="{9D8B030D-6E8A-4147-A177-3AD203B41FA5}">
+                      <a16:colId xmlns:a16="http://schemas.microsoft.com/office/drawing/2014/main" val="1342185484"/>
+                    </a:ext>
+                  </a:extLst>
+                </a:gridCol>
+                <a:gridCol w="4814187">
+                  <a:extLst>
+                    <a:ext uri="{9D8B030D-6E8A-4147-A177-3AD203B41FA5}">
+                      <a16:colId xmlns:a16="http://schemas.microsoft.com/office/drawing/2014/main" val="3941774552"/>
+                    </a:ext>
+                  </a:extLst>
+                </a:gridCol>
+              </a:tblGrid>
+              <a:tr h="0">
+                <a:tc>
+                  <a:txBody>
+                    <a:bodyPr/>
+                    <a:lstStyle/>
+                    <a:p>
+                      <a:pPr>
+                        <a:buNone/>
+                      </a:pPr>
+                      <a:r>
+                        <a:rPr lang="en-US" sz="1200"/>
+                        <a:t>Decision</a:t>
+                      </a:r>
+                    </a:p>
+                  </a:txBody>
+                  <a:tcPr anchor="ctr">
+                    <a:lnL>
+                      <a:noFill/>
+                    </a:lnL>
+                    <a:lnR>
+                      <a:noFill/>
+                    </a:lnR>
+                    <a:lnT>
+                      <a:noFill/>
+                    </a:lnT>
+                    <a:lnB>
+                      <a:noFill/>
+                    </a:lnB>
+                    <a:noFill/>
+                  </a:tcPr>
+                </a:tc>
+                <a:tc>
+                  <a:txBody>
+                    <a:bodyPr/>
+                    <a:lstStyle/>
+                    <a:p>
+                      <a:pPr>
+                        <a:buNone/>
+                      </a:pPr>
+                      <a:r>
+                        <a:rPr lang="en-US" sz="1200"/>
+                        <a:t>Recommendation</a:t>
+                      </a:r>
+                    </a:p>
+                  </a:txBody>
+                  <a:tcPr anchor="ctr">
+                    <a:lnL>
+                      <a:noFill/>
+                    </a:lnL>
+                    <a:lnR>
+                      <a:noFill/>
+                    </a:lnR>
+                    <a:lnT>
+                      <a:noFill/>
+                    </a:lnT>
+                    <a:lnB>
+                      <a:noFill/>
+                    </a:lnB>
+                    <a:noFill/>
+                  </a:tcPr>
+                </a:tc>
+                <a:extLst>
+                  <a:ext uri="{0D108BD9-81ED-4DB2-BD59-A6C34878D82A}">
+                    <a16:rowId xmlns:a16="http://schemas.microsoft.com/office/drawing/2014/main" val="3412906759"/>
+                  </a:ext>
+                </a:extLst>
+              </a:tr>
+              <a:tr h="0">
+                <a:tc>
+                  <a:txBody>
+                    <a:bodyPr/>
+                    <a:lstStyle/>
+                    <a:p>
+                      <a:pPr>
+                        <a:buNone/>
+                      </a:pPr>
+                      <a:r>
+                        <a:rPr lang="en-US" sz="1200" b="1"/>
+                        <a:t>First load</a:t>
+                      </a:r>
+                      <a:endParaRPr lang="en-US" sz="1200"/>
+                    </a:p>
+                  </a:txBody>
+                  <a:tcPr anchor="ctr">
+                    <a:lnL>
+                      <a:noFill/>
+                    </a:lnL>
+                    <a:lnR>
+                      <a:noFill/>
+                    </a:lnR>
+                    <a:lnT>
+                      <a:noFill/>
+                    </a:lnT>
+                    <a:lnB>
+                      <a:noFill/>
+                    </a:lnB>
+                    <a:noFill/>
+                  </a:tcPr>
+                </a:tc>
+                <a:tc>
+                  <a:txBody>
+                    <a:bodyPr/>
+                    <a:lstStyle/>
+                    <a:p>
+                      <a:pPr>
+                        <a:buNone/>
+                      </a:pPr>
+                      <a:r>
+                        <a:rPr lang="en-US" sz="1200"/>
+                        <a:t>Warm on startup, before timer fires</a:t>
+                      </a:r>
+                    </a:p>
+                  </a:txBody>
+                  <a:tcPr anchor="ctr">
+                    <a:lnL>
+                      <a:noFill/>
+                    </a:lnL>
+                    <a:lnR>
+                      <a:noFill/>
+                    </a:lnR>
+                    <a:lnT>
+                      <a:noFill/>
+                    </a:lnT>
+                    <a:lnB>
+                      <a:noFill/>
+                    </a:lnB>
+                    <a:noFill/>
+                  </a:tcPr>
+                </a:tc>
+                <a:extLst>
+                  <a:ext uri="{0D108BD9-81ED-4DB2-BD59-A6C34878D82A}">
+                    <a16:rowId xmlns:a16="http://schemas.microsoft.com/office/drawing/2014/main" val="4113124481"/>
+                  </a:ext>
+                </a:extLst>
+              </a:tr>
+              <a:tr h="0">
+                <a:tc>
+                  <a:txBody>
+                    <a:bodyPr/>
+                    <a:lstStyle/>
+                    <a:p>
+                      <a:pPr>
+                        <a:buNone/>
+                      </a:pPr>
+                      <a:r>
+                        <a:rPr lang="en-US" sz="1200" b="1"/>
+                        <a:t>Refresh failure</a:t>
+                      </a:r>
+                      <a:endParaRPr lang="en-US" sz="1200"/>
+                    </a:p>
+                  </a:txBody>
+                  <a:tcPr anchor="ctr">
+                    <a:lnL>
+                      <a:noFill/>
+                    </a:lnL>
+                    <a:lnR>
+                      <a:noFill/>
+                    </a:lnR>
+                    <a:lnT>
+                      <a:noFill/>
+                    </a:lnT>
+                    <a:lnB>
+                      <a:noFill/>
+                    </a:lnB>
+                    <a:noFill/>
+                  </a:tcPr>
+                </a:tc>
+                <a:tc>
+                  <a:txBody>
+                    <a:bodyPr/>
+                    <a:lstStyle/>
+                    <a:p>
+                      <a:pPr>
+                        <a:buNone/>
+                      </a:pPr>
+                      <a:r>
+                        <a:rPr lang="en-AU" sz="1200"/>
+                        <a:t>Log + keep stale value (don't crash)</a:t>
+                      </a:r>
+                    </a:p>
+                  </a:txBody>
+                  <a:tcPr anchor="ctr">
+                    <a:lnL>
+                      <a:noFill/>
+                    </a:lnL>
+                    <a:lnR>
+                      <a:noFill/>
+                    </a:lnR>
+                    <a:lnT>
+                      <a:noFill/>
+                    </a:lnT>
+                    <a:lnB>
+                      <a:noFill/>
+                    </a:lnB>
+                    <a:noFill/>
+                  </a:tcPr>
+                </a:tc>
+                <a:extLst>
+                  <a:ext uri="{0D108BD9-81ED-4DB2-BD59-A6C34878D82A}">
+                    <a16:rowId xmlns:a16="http://schemas.microsoft.com/office/drawing/2014/main" val="3204086310"/>
+                  </a:ext>
+                </a:extLst>
+              </a:tr>
+              <a:tr h="0">
+                <a:tc>
+                  <a:txBody>
+                    <a:bodyPr/>
+                    <a:lstStyle/>
+                    <a:p>
+                      <a:pPr>
+                        <a:buNone/>
+                      </a:pPr>
+                      <a:r>
+                        <a:rPr lang="en-US" sz="1200" b="1"/>
+                        <a:t>Expiry on cache entry</a:t>
+                      </a:r>
+                      <a:endParaRPr lang="en-US" sz="1200"/>
+                    </a:p>
+                  </a:txBody>
+                  <a:tcPr anchor="ctr">
+                    <a:lnL>
+                      <a:noFill/>
+                    </a:lnL>
+                    <a:lnR>
+                      <a:noFill/>
+                    </a:lnR>
+                    <a:lnT>
+                      <a:noFill/>
+                    </a:lnT>
+                    <a:lnB>
+                      <a:noFill/>
+                    </a:lnB>
+                    <a:noFill/>
+                  </a:tcPr>
+                </a:tc>
+                <a:tc>
+                  <a:txBody>
+                    <a:bodyPr/>
+                    <a:lstStyle/>
+                    <a:p>
+                      <a:pPr>
+                        <a:buNone/>
+                      </a:pPr>
+                      <a:r>
+                        <a:rPr lang="en-AU" sz="1200"/>
+                        <a:t>Set as a safety net (3× refresh interval)</a:t>
+                      </a:r>
+                    </a:p>
+                  </a:txBody>
+                  <a:tcPr anchor="ctr">
+                    <a:lnL>
+                      <a:noFill/>
+                    </a:lnL>
+                    <a:lnR>
+                      <a:noFill/>
+                    </a:lnR>
+                    <a:lnT>
+                      <a:noFill/>
+                    </a:lnT>
+                    <a:lnB>
+                      <a:noFill/>
+                    </a:lnB>
+                    <a:noFill/>
+                  </a:tcPr>
+                </a:tc>
+                <a:extLst>
+                  <a:ext uri="{0D108BD9-81ED-4DB2-BD59-A6C34878D82A}">
+                    <a16:rowId xmlns:a16="http://schemas.microsoft.com/office/drawing/2014/main" val="3586519124"/>
+                  </a:ext>
+                </a:extLst>
+              </a:tr>
+              <a:tr h="0">
+                <a:tc>
+                  <a:txBody>
+                    <a:bodyPr/>
+                    <a:lstStyle/>
+                    <a:p>
+                      <a:pPr>
+                        <a:buNone/>
+                      </a:pPr>
+                      <a:r>
+                        <a:rPr lang="en-US" sz="1200" b="1"/>
+                        <a:t>Scoped services</a:t>
+                      </a:r>
+                      <a:endParaRPr lang="en-US" sz="1200"/>
+                    </a:p>
+                  </a:txBody>
+                  <a:tcPr anchor="ctr">
+                    <a:lnL>
+                      <a:noFill/>
+                    </a:lnL>
+                    <a:lnR>
+                      <a:noFill/>
+                    </a:lnR>
+                    <a:lnT>
+                      <a:noFill/>
+                    </a:lnT>
+                    <a:lnB>
+                      <a:noFill/>
+                    </a:lnB>
+                    <a:noFill/>
+                  </a:tcPr>
+                </a:tc>
+                <a:tc>
+                  <a:txBody>
+                    <a:bodyPr/>
+                    <a:lstStyle/>
+                    <a:p>
+                      <a:pPr>
+                        <a:buNone/>
+                      </a:pPr>
+                      <a:r>
+                        <a:rPr lang="en-AU" sz="1200"/>
+                        <a:t>Use </a:t>
+                      </a:r>
+                      <a:r>
+                        <a:rPr lang="en-AU" sz="1200">
+                          <a:latin typeface="Courier New" panose="02070309020205020404" pitchFamily="49" charset="0"/>
+                        </a:rPr>
+                        <a:t>IServiceScopeFactory</a:t>
+                      </a:r>
+                      <a:r>
+                        <a:rPr lang="en-AU" sz="1200"/>
+                        <a:t> inside the singleton </a:t>
+                      </a:r>
+                      <a:r>
+                        <a:rPr lang="en-AU" sz="1200">
+                          <a:latin typeface="Courier New" panose="02070309020205020404" pitchFamily="49" charset="0"/>
+                        </a:rPr>
+                        <a:t>BackgroundService</a:t>
+                      </a:r>
+                      <a:endParaRPr lang="en-AU" sz="1200"/>
+                    </a:p>
+                  </a:txBody>
+                  <a:tcPr anchor="ctr">
+                    <a:lnL>
+                      <a:noFill/>
+                    </a:lnL>
+                    <a:lnR>
+                      <a:noFill/>
+                    </a:lnR>
+                    <a:lnT>
+                      <a:noFill/>
+                    </a:lnT>
+                    <a:lnB>
+                      <a:noFill/>
+                    </a:lnB>
+                    <a:noFill/>
+                  </a:tcPr>
+                </a:tc>
+                <a:extLst>
+                  <a:ext uri="{0D108BD9-81ED-4DB2-BD59-A6C34878D82A}">
+                    <a16:rowId xmlns:a16="http://schemas.microsoft.com/office/drawing/2014/main" val="2375508654"/>
+                  </a:ext>
+                </a:extLst>
+              </a:tr>
+              <a:tr h="0">
+                <a:tc>
+                  <a:txBody>
+                    <a:bodyPr/>
+                    <a:lstStyle/>
+                    <a:p>
+                      <a:pPr>
+                        <a:buNone/>
+                      </a:pPr>
+                      <a:r>
+                        <a:rPr lang="en-US" sz="1200" b="1">
+                          <a:latin typeface="Courier New" panose="02070309020205020404" pitchFamily="49" charset="0"/>
+                        </a:rPr>
+                        <a:t>PeriodicTimer</a:t>
+                      </a:r>
+                      <a:endParaRPr lang="en-US" sz="1200"/>
+                    </a:p>
+                  </a:txBody>
+                  <a:tcPr anchor="ctr">
+                    <a:lnL>
+                      <a:noFill/>
+                    </a:lnL>
+                    <a:lnR>
+                      <a:noFill/>
+                    </a:lnR>
+                    <a:lnT>
+                      <a:noFill/>
+                    </a:lnT>
+                    <a:lnB>
+                      <a:noFill/>
+                    </a:lnB>
+                    <a:noFill/>
+                  </a:tcPr>
+                </a:tc>
+                <a:tc>
+                  <a:txBody>
+                    <a:bodyPr/>
+                    <a:lstStyle/>
+                    <a:p>
+                      <a:pPr>
+                        <a:buNone/>
+                      </a:pPr>
+                      <a:r>
+                        <a:rPr lang="en-AU" sz="1200" dirty="0"/>
+                        <a:t>Prefer over </a:t>
+                      </a:r>
+                      <a:r>
+                        <a:rPr lang="en-AU" sz="1200" dirty="0">
+                          <a:latin typeface="Courier New" panose="02070309020205020404" pitchFamily="49" charset="0"/>
+                        </a:rPr>
+                        <a:t>Timer</a:t>
+                      </a:r>
+                      <a:r>
+                        <a:rPr lang="en-AU" sz="1200" dirty="0"/>
+                        <a:t> — it's async-native and won't overlap ticks</a:t>
+                      </a:r>
+                    </a:p>
+                  </a:txBody>
+                  <a:tcPr anchor="ctr">
+                    <a:lnL>
+                      <a:noFill/>
+                    </a:lnL>
+                    <a:lnR>
+                      <a:noFill/>
+                    </a:lnR>
+                    <a:lnT>
+                      <a:noFill/>
+                    </a:lnT>
+                    <a:lnB>
+                      <a:noFill/>
+                    </a:lnB>
+                    <a:noFill/>
+                  </a:tcPr>
+                </a:tc>
+                <a:extLst>
+                  <a:ext uri="{0D108BD9-81ED-4DB2-BD59-A6C34878D82A}">
+                    <a16:rowId xmlns:a16="http://schemas.microsoft.com/office/drawing/2014/main" val="2582219495"/>
+                  </a:ext>
+                </a:extLst>
+              </a:tr>
+            </a:tbl>
+          </a:graphicData>
+        </a:graphic>
+      </p:graphicFrame>
+      <p:sp>
+        <p:nvSpPr>
+          <p:cNvPr id="7" name="Rectangle 1">
+            <a:extLst>
+              <a:ext uri="{FF2B5EF4-FFF2-40B4-BE49-F238E27FC236}">
+                <a16:creationId xmlns:a16="http://schemas.microsoft.com/office/drawing/2014/main" id="{1E13A2BE-ED9F-380D-F50A-AD9CB7FF5A10}"/>
+              </a:ext>
+            </a:extLst>
+          </p:cNvPr>
+          <p:cNvSpPr>
+            <a:spLocks noChangeArrowheads="1"/>
+          </p:cNvSpPr>
+          <p:nvPr/>
+        </p:nvSpPr>
+        <p:spPr bwMode="auto">
+          <a:xfrm>
+            <a:off x="2919249" y="1421794"/>
+            <a:ext cx="3176751" cy="461665"/>
+          </a:xfrm>
+          <a:prstGeom prst="rect">
+            <a:avLst/>
+          </a:prstGeom>
+          <a:noFill/>
+          <a:ln>
+            <a:noFill/>
+          </a:ln>
+          <a:effectLst/>
+          <a:extLst>
+            <a:ext uri="{909E8E84-426E-40DD-AFC4-6F175D3DCCD1}">
+              <a14:hiddenFill xmlns:a14="http://schemas.microsoft.com/office/drawing/2010/main">
+                <a:solidFill>
+                  <a:schemeClr val="accent1"/>
+                </a:solidFill>
+              </a14:hiddenFill>
+            </a:ext>
+            <a:ext uri="{91240B29-F687-4F45-9708-019B960494DF}">
+              <a14:hiddenLine xmlns:a14="http://schemas.microsoft.com/office/drawing/2010/main" w="9525">
+                <a:solidFill>
+                  <a:schemeClr val="tx1"/>
+                </a:solidFill>
+                <a:miter lim="800000"/>
+                <a:headEnd/>
+                <a:tailEnd/>
+              </a14:hiddenLine>
+            </a:ext>
+            <a:ext uri="{AF507438-7753-43E0-B8FC-AC1667EBCBE1}">
+              <a14:hiddenEffects xmlns:a14="http://schemas.microsoft.com/office/drawing/2010/main">
+                <a:effectLst>
+                  <a:outerShdw dist="35921" dir="2700000" algn="ctr" rotWithShape="0">
+                    <a:schemeClr val="bg2"/>
+                  </a:outerShdw>
+                </a:effectLst>
+              </a14:hiddenEffects>
+            </a:ext>
+          </a:extLst>
+        </p:spPr>
+        <p:txBody>
+          <a:bodyPr vert="horz" wrap="square" lIns="91440" tIns="45720" rIns="91440" bIns="45720" numCol="1" anchor="ctr" anchorCtr="0" compatLnSpc="1">
+            <a:prstTxWarp prst="textNoShape">
+              <a:avLst/>
+            </a:prstTxWarp>
+            <a:spAutoFit/>
+          </a:bodyPr>
+          <a:lstStyle/>
+          <a:p>
+            <a:pPr marL="0" marR="0" lvl="0" indent="0" algn="l" defTabSz="914400" rtl="0" eaLnBrk="0" fontAlgn="base" latinLnBrk="0" hangingPunct="0">
+              <a:lnSpc>
+                <a:spcPct val="100000"/>
+              </a:lnSpc>
+              <a:spcBef>
+                <a:spcPct val="0"/>
+              </a:spcBef>
+              <a:spcAft>
+                <a:spcPct val="0"/>
+              </a:spcAft>
+              <a:buClrTx/>
+              <a:buSzTx/>
+              <a:buFontTx/>
+              <a:buNone/>
+              <a:tabLst/>
+            </a:pPr>
+            <a:r>
+              <a:rPr kumimoji="0" lang="en-US" altLang="en-US" sz="1200" b="1" i="0" u="none" strike="noStrike" cap="none" normalizeH="0" baseline="0" dirty="0">
+                <a:ln>
+                  <a:noFill/>
+                </a:ln>
+                <a:solidFill>
+                  <a:schemeClr val="tx1"/>
+                </a:solidFill>
+                <a:effectLst/>
+                <a:latin typeface="Arial" panose="020B0604020202020204" pitchFamily="34" charset="0"/>
+              </a:rPr>
+              <a:t>Key Design Decisions</a:t>
+            </a:r>
+          </a:p>
+          <a:p>
+            <a:pPr marL="0" marR="0" lvl="0" indent="0" algn="l" defTabSz="914400" rtl="0" eaLnBrk="0" fontAlgn="base" latinLnBrk="0" hangingPunct="0">
+              <a:lnSpc>
+                <a:spcPct val="100000"/>
+              </a:lnSpc>
+              <a:spcBef>
+                <a:spcPct val="0"/>
+              </a:spcBef>
+              <a:spcAft>
+                <a:spcPct val="0"/>
+              </a:spcAft>
+              <a:buClrTx/>
+              <a:buSzTx/>
+              <a:buFontTx/>
+              <a:buNone/>
+              <a:tabLst/>
+            </a:pPr>
+            <a:endParaRPr kumimoji="0" lang="en-US" altLang="en-US" sz="1200" b="0" i="0" u="none" strike="noStrike" cap="none" normalizeH="0" baseline="0" dirty="0">
+              <a:ln>
+                <a:noFill/>
+              </a:ln>
+              <a:solidFill>
+                <a:schemeClr val="tx1"/>
+              </a:solidFill>
+              <a:effectLst/>
+              <a:latin typeface="Arial" panose="020B0604020202020204" pitchFamily="34" charset="0"/>
+            </a:endParaRPr>
+          </a:p>
+        </p:txBody>
+      </p:sp>
+    </p:spTree>
+    <p:extLst>
+      <p:ext uri="{BB962C8B-B14F-4D97-AF65-F5344CB8AC3E}">
+        <p14:creationId xmlns:p14="http://schemas.microsoft.com/office/powerpoint/2010/main" val="3201186787"/>
+      </p:ext>
+    </p:extLst>
+  </p:cSld>
+  <p:clrMapOvr>
+    <a:masterClrMapping/>
+  </p:clrMapOvr>
+</p:sld>
+</file>
+
+<file path=ppt/slides/slide29.xml><?xml version="1.0" encoding="utf-8"?>
+<p:sld xmlns:a="http://schemas.openxmlformats.org/drawingml/2006/main" xmlns:r="http://schemas.openxmlformats.org/officeDocument/2006/relationships" xmlns:p="http://schemas.openxmlformats.org/presentationml/2006/main">
+  <p:cSld>
+    <p:spTree>
+      <p:nvGrpSpPr>
+        <p:cNvPr id="1" name=""/>
+        <p:cNvGrpSpPr/>
+        <p:nvPr/>
+      </p:nvGrpSpPr>
+      <p:grpSpPr>
+        <a:xfrm>
+          <a:off x="0" y="0"/>
+          <a:ext cx="0" cy="0"/>
+          <a:chOff x="0" y="0"/>
+          <a:chExt cx="0" cy="0"/>
+        </a:xfrm>
+      </p:grpSpPr>
+      <p:sp>
+        <p:nvSpPr>
+          <p:cNvPr id="2" name="Rectangle 1">
+            <a:extLst>
+              <a:ext uri="{FF2B5EF4-FFF2-40B4-BE49-F238E27FC236}">
+                <a16:creationId xmlns:a16="http://schemas.microsoft.com/office/drawing/2014/main" id="{EA9AC83A-23B9-E7E4-0BE0-3FEC60E6D6BE}"/>
+              </a:ext>
+            </a:extLst>
+          </p:cNvPr>
+          <p:cNvSpPr>
+            <a:spLocks noChangeArrowheads="1"/>
+          </p:cNvSpPr>
+          <p:nvPr/>
+        </p:nvSpPr>
+        <p:spPr bwMode="auto">
+          <a:xfrm>
+            <a:off x="189186" y="535119"/>
+            <a:ext cx="5811415" cy="1938992"/>
+          </a:xfrm>
+          <a:prstGeom prst="rect">
+            <a:avLst/>
+          </a:prstGeom>
+          <a:noFill/>
+          <a:ln>
+            <a:noFill/>
+          </a:ln>
+          <a:effectLst/>
+          <a:extLst>
+            <a:ext uri="{909E8E84-426E-40DD-AFC4-6F175D3DCCD1}">
+              <a14:hiddenFill xmlns:a14="http://schemas.microsoft.com/office/drawing/2010/main">
+                <a:solidFill>
+                  <a:schemeClr val="accent1"/>
+                </a:solidFill>
+              </a14:hiddenFill>
+            </a:ext>
+            <a:ext uri="{91240B29-F687-4F45-9708-019B960494DF}">
+              <a14:hiddenLine xmlns:a14="http://schemas.microsoft.com/office/drawing/2010/main" w="9525">
+                <a:solidFill>
+                  <a:schemeClr val="tx1"/>
+                </a:solidFill>
+                <a:miter lim="800000"/>
+                <a:headEnd/>
+                <a:tailEnd/>
+              </a14:hiddenLine>
+            </a:ext>
+            <a:ext uri="{AF507438-7753-43E0-B8FC-AC1667EBCBE1}">
+              <a14:hiddenEffects xmlns:a14="http://schemas.microsoft.com/office/drawing/2010/main">
+                <a:effectLst>
+                  <a:outerShdw dist="35921" dir="2700000" algn="ctr" rotWithShape="0">
+                    <a:schemeClr val="bg2"/>
+                  </a:outerShdw>
+                </a:effectLst>
+              </a14:hiddenEffects>
+            </a:ext>
+          </a:extLst>
+        </p:spPr>
+        <p:txBody>
+          <a:bodyPr vert="horz" wrap="square" lIns="91440" tIns="45720" rIns="91440" bIns="45720" numCol="1" anchor="ctr" anchorCtr="0" compatLnSpc="1">
+            <a:prstTxWarp prst="textNoShape">
+              <a:avLst/>
+            </a:prstTxWarp>
+            <a:spAutoFit/>
+          </a:bodyPr>
+          <a:lstStyle/>
+          <a:p>
+            <a:pPr marL="0" marR="0" lvl="0" indent="0" algn="l" defTabSz="914400" rtl="0" eaLnBrk="0" fontAlgn="base" latinLnBrk="0" hangingPunct="0">
+              <a:lnSpc>
+                <a:spcPct val="100000"/>
+              </a:lnSpc>
+              <a:spcBef>
+                <a:spcPct val="0"/>
+              </a:spcBef>
+              <a:spcAft>
+                <a:spcPct val="0"/>
+              </a:spcAft>
+              <a:buClrTx/>
+              <a:buSzTx/>
+              <a:buFontTx/>
+              <a:buNone/>
+              <a:tabLst/>
+            </a:pPr>
+            <a:r>
+              <a:rPr kumimoji="0" lang="en-US" altLang="en-US" sz="1200" b="1" i="0" u="none" strike="noStrike" cap="none" normalizeH="0" baseline="0" dirty="0">
+                <a:ln>
+                  <a:noFill/>
+                </a:ln>
+                <a:solidFill>
+                  <a:schemeClr val="tx1"/>
+                </a:solidFill>
+                <a:effectLst/>
+                <a:latin typeface="Arial" panose="020B0604020202020204" pitchFamily="34" charset="0"/>
+              </a:rPr>
+              <a:t>The Core Problem: Lifetime Mismatch</a:t>
+            </a:r>
+          </a:p>
+          <a:p>
+            <a:pPr marL="0" marR="0" lvl="0" indent="0" algn="l" defTabSz="914400" rtl="0" eaLnBrk="0" fontAlgn="base" latinLnBrk="0" hangingPunct="0">
+              <a:lnSpc>
+                <a:spcPct val="100000"/>
+              </a:lnSpc>
+              <a:spcBef>
+                <a:spcPct val="0"/>
+              </a:spcBef>
+              <a:spcAft>
+                <a:spcPct val="0"/>
+              </a:spcAft>
+              <a:buClrTx/>
+              <a:buSzTx/>
+              <a:buFontTx/>
+              <a:buNone/>
+              <a:tabLst/>
+            </a:pPr>
+            <a:r>
+              <a:rPr kumimoji="0" lang="en-US" altLang="en-US" sz="1200" b="0" i="0" u="none" strike="noStrike" cap="none" normalizeH="0" baseline="0" dirty="0">
+                <a:ln>
+                  <a:noFill/>
+                </a:ln>
+                <a:solidFill>
+                  <a:schemeClr val="tx1"/>
+                </a:solidFill>
+                <a:effectLst/>
+                <a:latin typeface="Arial" panose="020B0604020202020204" pitchFamily="34" charset="0"/>
+              </a:rPr>
+              <a:t>In .NET DI, every service has a </a:t>
+            </a:r>
+            <a:r>
+              <a:rPr kumimoji="0" lang="en-US" altLang="en-US" sz="1200" b="1" i="0" u="none" strike="noStrike" cap="none" normalizeH="0" baseline="0" dirty="0">
+                <a:ln>
+                  <a:noFill/>
+                </a:ln>
+                <a:solidFill>
+                  <a:schemeClr val="tx1"/>
+                </a:solidFill>
+                <a:effectLst/>
+                <a:latin typeface="Arial" panose="020B0604020202020204" pitchFamily="34" charset="0"/>
+              </a:rPr>
+              <a:t>lifetime</a:t>
+            </a:r>
+            <a:r>
+              <a:rPr kumimoji="0" lang="en-US" altLang="en-US" sz="1200" b="0" i="0" u="none" strike="noStrike" cap="none" normalizeH="0" baseline="0" dirty="0">
+                <a:ln>
+                  <a:noFill/>
+                </a:ln>
+                <a:solidFill>
+                  <a:schemeClr val="tx1"/>
+                </a:solidFill>
+                <a:effectLst/>
+                <a:latin typeface="Arial" panose="020B0604020202020204" pitchFamily="34" charset="0"/>
+              </a:rPr>
+              <a:t>:</a:t>
+            </a:r>
+          </a:p>
+          <a:p>
+            <a:pPr marL="0" marR="0" lvl="0" indent="0" algn="l" defTabSz="914400" rtl="0" eaLnBrk="0" fontAlgn="base" latinLnBrk="0" hangingPunct="0">
+              <a:lnSpc>
+                <a:spcPct val="100000"/>
+              </a:lnSpc>
+              <a:spcBef>
+                <a:spcPct val="0"/>
+              </a:spcBef>
+              <a:spcAft>
+                <a:spcPct val="0"/>
+              </a:spcAft>
+              <a:buClrTx/>
+              <a:buSzTx/>
+              <a:buFontTx/>
+              <a:buNone/>
+              <a:tabLst/>
+            </a:pPr>
+            <a:r>
+              <a:rPr kumimoji="0" lang="en-US" altLang="en-US" sz="1200" b="0" i="0" u="none" strike="noStrike" cap="none" normalizeH="0" baseline="0" dirty="0">
+                <a:ln>
+                  <a:noFill/>
+                </a:ln>
+                <a:solidFill>
+                  <a:srgbClr val="14181F"/>
+                </a:solidFill>
+                <a:effectLst/>
+                <a:latin typeface="var(--font-mono)"/>
+              </a:rPr>
+              <a:t>Singleton ── one instance for the entire app lifetime </a:t>
+            </a:r>
+          </a:p>
+          <a:p>
+            <a:pPr marL="0" marR="0" lvl="0" indent="0" algn="l" defTabSz="914400" rtl="0" eaLnBrk="0" fontAlgn="base" latinLnBrk="0" hangingPunct="0">
+              <a:lnSpc>
+                <a:spcPct val="100000"/>
+              </a:lnSpc>
+              <a:spcBef>
+                <a:spcPct val="0"/>
+              </a:spcBef>
+              <a:spcAft>
+                <a:spcPct val="0"/>
+              </a:spcAft>
+              <a:buClrTx/>
+              <a:buSzTx/>
+              <a:buFontTx/>
+              <a:buNone/>
+              <a:tabLst/>
+            </a:pPr>
+            <a:r>
+              <a:rPr kumimoji="0" lang="en-US" altLang="en-US" sz="1200" b="0" i="0" u="none" strike="noStrike" cap="none" normalizeH="0" baseline="0" dirty="0">
+                <a:ln>
+                  <a:noFill/>
+                </a:ln>
+                <a:solidFill>
+                  <a:srgbClr val="14181F"/>
+                </a:solidFill>
+                <a:effectLst/>
+                <a:latin typeface="var(--font-mono)"/>
+              </a:rPr>
+              <a:t>Scoped ── one instance per HTTP request (or per scope)</a:t>
+            </a:r>
+          </a:p>
+          <a:p>
+            <a:pPr marL="0" marR="0" lvl="0" indent="0" algn="l" defTabSz="914400" rtl="0" eaLnBrk="0" fontAlgn="base" latinLnBrk="0" hangingPunct="0">
+              <a:lnSpc>
+                <a:spcPct val="100000"/>
+              </a:lnSpc>
+              <a:spcBef>
+                <a:spcPct val="0"/>
+              </a:spcBef>
+              <a:spcAft>
+                <a:spcPct val="0"/>
+              </a:spcAft>
+              <a:buClrTx/>
+              <a:buSzTx/>
+              <a:buFontTx/>
+              <a:buNone/>
+              <a:tabLst/>
+            </a:pPr>
+            <a:r>
+              <a:rPr kumimoji="0" lang="en-US" altLang="en-US" sz="1200" b="0" i="0" u="none" strike="noStrike" cap="none" normalizeH="0" baseline="0" dirty="0">
+                <a:ln>
+                  <a:noFill/>
+                </a:ln>
+                <a:solidFill>
+                  <a:srgbClr val="14181F"/>
+                </a:solidFill>
+                <a:effectLst/>
+                <a:latin typeface="var(--font-mono)"/>
+              </a:rPr>
+              <a:t>Transient ── new instance every time it's resolved</a:t>
+            </a:r>
+            <a:endParaRPr kumimoji="0" lang="en-US" altLang="en-US" sz="1200" b="0" i="0" u="none" strike="noStrike" cap="none" normalizeH="0" baseline="0" dirty="0">
+              <a:ln>
+                <a:noFill/>
+              </a:ln>
+              <a:solidFill>
+                <a:schemeClr val="tx1"/>
+              </a:solidFill>
+              <a:effectLst/>
+            </a:endParaRPr>
+          </a:p>
+          <a:p>
+            <a:pPr marL="0" marR="0" lvl="0" indent="0" algn="l" defTabSz="914400" rtl="0" eaLnBrk="0" fontAlgn="base" latinLnBrk="0" hangingPunct="0">
+              <a:lnSpc>
+                <a:spcPct val="100000"/>
+              </a:lnSpc>
+              <a:spcBef>
+                <a:spcPct val="0"/>
+              </a:spcBef>
+              <a:spcAft>
+                <a:spcPct val="0"/>
+              </a:spcAft>
+              <a:buClrTx/>
+              <a:buSzTx/>
+              <a:buFontTx/>
+              <a:buNone/>
+              <a:tabLst/>
+            </a:pPr>
+            <a:endParaRPr kumimoji="0" lang="en-US" altLang="en-US" sz="1200" b="0" i="0" u="none" strike="noStrike" cap="none" normalizeH="0" baseline="0" dirty="0">
+              <a:ln>
+                <a:noFill/>
+              </a:ln>
+              <a:solidFill>
+                <a:schemeClr val="tx1"/>
+              </a:solidFill>
+              <a:effectLst/>
+              <a:latin typeface="Arial Unicode MS"/>
+            </a:endParaRPr>
+          </a:p>
+          <a:p>
+            <a:pPr marL="0" marR="0" lvl="0" indent="0" algn="l" defTabSz="914400" rtl="0" eaLnBrk="0" fontAlgn="base" latinLnBrk="0" hangingPunct="0">
+              <a:lnSpc>
+                <a:spcPct val="100000"/>
+              </a:lnSpc>
+              <a:spcBef>
+                <a:spcPct val="0"/>
+              </a:spcBef>
+              <a:spcAft>
+                <a:spcPct val="0"/>
+              </a:spcAft>
+              <a:buClrTx/>
+              <a:buSzTx/>
+              <a:buFontTx/>
+              <a:buNone/>
+              <a:tabLst/>
+            </a:pPr>
+            <a:r>
+              <a:rPr kumimoji="0" lang="en-US" altLang="en-US" sz="1200" b="0" i="0" u="none" strike="noStrike" cap="none" normalizeH="0" baseline="0" dirty="0" err="1">
+                <a:ln>
+                  <a:noFill/>
+                </a:ln>
+                <a:solidFill>
+                  <a:schemeClr val="tx1"/>
+                </a:solidFill>
+                <a:effectLst/>
+                <a:latin typeface="Arial Unicode MS"/>
+              </a:rPr>
+              <a:t>BackgroundService</a:t>
+            </a:r>
+            <a:r>
+              <a:rPr kumimoji="0" lang="en-US" altLang="en-US" sz="1200" b="0" i="0" u="none" strike="noStrike" cap="none" normalizeH="0" baseline="0" dirty="0">
+                <a:ln>
+                  <a:noFill/>
+                </a:ln>
+                <a:solidFill>
+                  <a:schemeClr val="tx1"/>
+                </a:solidFill>
+                <a:effectLst/>
+              </a:rPr>
+              <a:t> (registered via </a:t>
+            </a:r>
+            <a:r>
+              <a:rPr kumimoji="0" lang="en-US" altLang="en-US" sz="1200" b="0" i="0" u="none" strike="noStrike" cap="none" normalizeH="0" baseline="0" dirty="0" err="1">
+                <a:ln>
+                  <a:noFill/>
+                </a:ln>
+                <a:solidFill>
+                  <a:schemeClr val="tx1"/>
+                </a:solidFill>
+                <a:effectLst/>
+                <a:latin typeface="Arial Unicode MS"/>
+              </a:rPr>
+              <a:t>AddHostedService</a:t>
+            </a:r>
+            <a:r>
+              <a:rPr kumimoji="0" lang="en-US" altLang="en-US" sz="1200" b="0" i="0" u="none" strike="noStrike" cap="none" normalizeH="0" baseline="0" dirty="0">
+                <a:ln>
+                  <a:noFill/>
+                </a:ln>
+                <a:solidFill>
+                  <a:schemeClr val="tx1"/>
+                </a:solidFill>
+                <a:effectLst/>
+              </a:rPr>
+              <a:t>) is always a </a:t>
+            </a:r>
+            <a:r>
+              <a:rPr kumimoji="0" lang="en-US" altLang="en-US" sz="1200" b="1" i="0" u="none" strike="noStrike" cap="none" normalizeH="0" baseline="0" dirty="0">
+                <a:ln>
+                  <a:noFill/>
+                </a:ln>
+                <a:solidFill>
+                  <a:schemeClr val="tx1"/>
+                </a:solidFill>
+                <a:effectLst/>
+                <a:latin typeface="Arial" panose="020B0604020202020204" pitchFamily="34" charset="0"/>
+              </a:rPr>
+              <a:t>Singleton</a:t>
+            </a:r>
+            <a:r>
+              <a:rPr kumimoji="0" lang="en-US" altLang="en-US" sz="1200" b="0" i="0" u="none" strike="noStrike" cap="none" normalizeH="0" baseline="0" dirty="0">
+                <a:ln>
+                  <a:noFill/>
+                </a:ln>
+                <a:solidFill>
+                  <a:schemeClr val="tx1"/>
+                </a:solidFill>
+                <a:effectLst/>
+                <a:latin typeface="Arial" panose="020B0604020202020204" pitchFamily="34" charset="0"/>
+              </a:rPr>
+              <a:t>.</a:t>
+            </a:r>
+          </a:p>
+          <a:p>
+            <a:pPr marL="0" marR="0" lvl="0" indent="0" algn="l" defTabSz="914400" rtl="0" eaLnBrk="0" fontAlgn="base" latinLnBrk="0" hangingPunct="0">
+              <a:lnSpc>
+                <a:spcPct val="100000"/>
+              </a:lnSpc>
+              <a:spcBef>
+                <a:spcPct val="0"/>
+              </a:spcBef>
+              <a:spcAft>
+                <a:spcPct val="0"/>
+              </a:spcAft>
+              <a:buClrTx/>
+              <a:buSzTx/>
+              <a:buFontTx/>
+              <a:buNone/>
+              <a:tabLst/>
+            </a:pPr>
+            <a:r>
+              <a:rPr kumimoji="0" lang="en-US" altLang="en-US" sz="1200" b="0" i="0" u="none" strike="noStrike" cap="none" normalizeH="0" baseline="0" dirty="0">
+                <a:ln>
+                  <a:noFill/>
+                </a:ln>
+                <a:solidFill>
+                  <a:schemeClr val="tx1"/>
+                </a:solidFill>
+                <a:effectLst/>
+                <a:latin typeface="Arial" panose="020B0604020202020204" pitchFamily="34" charset="0"/>
+              </a:rPr>
+              <a:t>Your data/DB services (e.g. </a:t>
+            </a:r>
+            <a:r>
+              <a:rPr kumimoji="0" lang="en-US" altLang="en-US" sz="1200" b="0" i="0" u="none" strike="noStrike" cap="none" normalizeH="0" baseline="0" dirty="0" err="1">
+                <a:ln>
+                  <a:noFill/>
+                </a:ln>
+                <a:solidFill>
+                  <a:schemeClr val="tx1"/>
+                </a:solidFill>
+                <a:effectLst/>
+                <a:latin typeface="Arial Unicode MS"/>
+              </a:rPr>
+              <a:t>DbContext</a:t>
+            </a:r>
+            <a:r>
+              <a:rPr kumimoji="0" lang="en-US" altLang="en-US" sz="1200" b="0" i="0" u="none" strike="noStrike" cap="none" normalizeH="0" baseline="0" dirty="0">
+                <a:ln>
+                  <a:noFill/>
+                </a:ln>
+                <a:solidFill>
+                  <a:schemeClr val="tx1"/>
+                </a:solidFill>
+                <a:effectLst/>
+              </a:rPr>
+              <a:t>, </a:t>
+            </a:r>
+            <a:r>
+              <a:rPr kumimoji="0" lang="en-US" altLang="en-US" sz="1200" b="0" i="0" u="none" strike="noStrike" cap="none" normalizeH="0" baseline="0" dirty="0" err="1">
+                <a:ln>
+                  <a:noFill/>
+                </a:ln>
+                <a:solidFill>
+                  <a:schemeClr val="tx1"/>
+                </a:solidFill>
+                <a:effectLst/>
+                <a:latin typeface="Arial Unicode MS"/>
+              </a:rPr>
+              <a:t>IMyDataService</a:t>
+            </a:r>
+            <a:r>
+              <a:rPr kumimoji="0" lang="en-US" altLang="en-US" sz="1200" b="0" i="0" u="none" strike="noStrike" cap="none" normalizeH="0" baseline="0" dirty="0">
+                <a:ln>
+                  <a:noFill/>
+                </a:ln>
+                <a:solidFill>
+                  <a:schemeClr val="tx1"/>
+                </a:solidFill>
+                <a:effectLst/>
+              </a:rPr>
+              <a:t>) are typically </a:t>
+            </a:r>
+            <a:r>
+              <a:rPr kumimoji="0" lang="en-US" altLang="en-US" sz="1200" b="1" i="0" u="none" strike="noStrike" cap="none" normalizeH="0" baseline="0" dirty="0">
+                <a:ln>
+                  <a:noFill/>
+                </a:ln>
+                <a:solidFill>
+                  <a:schemeClr val="tx1"/>
+                </a:solidFill>
+                <a:effectLst/>
+                <a:latin typeface="Arial" panose="020B0604020202020204" pitchFamily="34" charset="0"/>
+              </a:rPr>
+              <a:t>Scoped</a:t>
+            </a:r>
+            <a:r>
+              <a:rPr kumimoji="0" lang="en-US" altLang="en-US" sz="1200" b="0" i="0" u="none" strike="noStrike" cap="none" normalizeH="0" baseline="0" dirty="0">
+                <a:ln>
+                  <a:noFill/>
+                </a:ln>
+                <a:solidFill>
+                  <a:schemeClr val="tx1"/>
+                </a:solidFill>
+                <a:effectLst/>
+                <a:latin typeface="Arial" panose="020B0604020202020204" pitchFamily="34" charset="0"/>
+              </a:rPr>
+              <a:t>.</a:t>
+            </a:r>
+          </a:p>
+          <a:p>
+            <a:pPr marL="0" marR="0" lvl="0" indent="0" algn="l" defTabSz="914400" rtl="0" eaLnBrk="0" fontAlgn="base" latinLnBrk="0" hangingPunct="0">
+              <a:lnSpc>
+                <a:spcPct val="100000"/>
+              </a:lnSpc>
+              <a:spcBef>
+                <a:spcPct val="0"/>
+              </a:spcBef>
+              <a:spcAft>
+                <a:spcPct val="0"/>
+              </a:spcAft>
+              <a:buClrTx/>
+              <a:buSzTx/>
+              <a:buFontTx/>
+              <a:buNone/>
+              <a:tabLst/>
+            </a:pPr>
+            <a:r>
+              <a:rPr kumimoji="0" lang="en-US" altLang="en-US" sz="1200" b="0" i="0" u="none" strike="noStrike" cap="none" normalizeH="0" baseline="0" dirty="0">
+                <a:ln>
+                  <a:noFill/>
+                </a:ln>
+                <a:solidFill>
+                  <a:srgbClr val="14181F"/>
+                </a:solidFill>
+                <a:effectLst/>
+                <a:latin typeface="var(--font-mono)"/>
+              </a:rPr>
+              <a:t>❌ Singleton cannot directly inject a Scoped service Singleton lives forever Scoped lives for a short time → DI will throw an </a:t>
+            </a:r>
+            <a:r>
+              <a:rPr kumimoji="0" lang="en-US" altLang="en-US" sz="1200" b="0" i="0" u="none" strike="noStrike" cap="none" normalizeH="0" baseline="0" dirty="0" err="1">
+                <a:ln>
+                  <a:noFill/>
+                </a:ln>
+                <a:solidFill>
+                  <a:srgbClr val="14181F"/>
+                </a:solidFill>
+                <a:effectLst/>
+                <a:latin typeface="var(--font-mono)"/>
+              </a:rPr>
+              <a:t>InvalidOperationException</a:t>
+            </a:r>
+            <a:r>
+              <a:rPr kumimoji="0" lang="en-US" altLang="en-US" sz="1200" b="0" i="0" u="none" strike="noStrike" cap="none" normalizeH="0" baseline="0" dirty="0">
+                <a:ln>
+                  <a:noFill/>
+                </a:ln>
+                <a:solidFill>
+                  <a:srgbClr val="14181F"/>
+                </a:solidFill>
+                <a:effectLst/>
+                <a:latin typeface="var(--font-mono)"/>
+              </a:rPr>
+              <a:t> at startup</a:t>
+            </a:r>
+            <a:endParaRPr kumimoji="0" lang="en-US" altLang="en-US" sz="1200" b="0" i="0" u="none" strike="noStrike" cap="none" normalizeH="0" baseline="0" dirty="0">
+              <a:ln>
+                <a:noFill/>
+              </a:ln>
+              <a:solidFill>
+                <a:schemeClr val="tx1"/>
+              </a:solidFill>
+              <a:effectLst/>
+              <a:latin typeface="Arial" panose="020B0604020202020204" pitchFamily="34" charset="0"/>
+            </a:endParaRPr>
+          </a:p>
+        </p:txBody>
+      </p:sp>
+      <p:sp>
+        <p:nvSpPr>
+          <p:cNvPr id="4" name="Rectangle 3">
+            <a:extLst>
+              <a:ext uri="{FF2B5EF4-FFF2-40B4-BE49-F238E27FC236}">
+                <a16:creationId xmlns:a16="http://schemas.microsoft.com/office/drawing/2014/main" id="{25BD6427-ECE1-4FFF-F776-EE4518763C7C}"/>
+              </a:ext>
+            </a:extLst>
+          </p:cNvPr>
+          <p:cNvSpPr>
+            <a:spLocks noChangeArrowheads="1"/>
+          </p:cNvSpPr>
+          <p:nvPr/>
+        </p:nvSpPr>
+        <p:spPr bwMode="auto">
+          <a:xfrm>
+            <a:off x="95398" y="3919340"/>
+            <a:ext cx="5022337" cy="2492990"/>
+          </a:xfrm>
+          <a:prstGeom prst="rect">
+            <a:avLst/>
+          </a:prstGeom>
+          <a:noFill/>
+          <a:ln>
+            <a:noFill/>
+          </a:ln>
+          <a:effectLst/>
+          <a:extLst>
+            <a:ext uri="{909E8E84-426E-40DD-AFC4-6F175D3DCCD1}">
+              <a14:hiddenFill xmlns:a14="http://schemas.microsoft.com/office/drawing/2010/main">
+                <a:solidFill>
+                  <a:schemeClr val="accent1"/>
+                </a:solidFill>
+              </a14:hiddenFill>
+            </a:ext>
+            <a:ext uri="{91240B29-F687-4F45-9708-019B960494DF}">
+              <a14:hiddenLine xmlns:a14="http://schemas.microsoft.com/office/drawing/2010/main" w="9525">
+                <a:solidFill>
+                  <a:schemeClr val="tx1"/>
+                </a:solidFill>
+                <a:miter lim="800000"/>
+                <a:headEnd/>
+                <a:tailEnd/>
+              </a14:hiddenLine>
+            </a:ext>
+            <a:ext uri="{AF507438-7753-43E0-B8FC-AC1667EBCBE1}">
+              <a14:hiddenEffects xmlns:a14="http://schemas.microsoft.com/office/drawing/2010/main">
+                <a:effectLst>
+                  <a:outerShdw dist="35921" dir="2700000" algn="ctr" rotWithShape="0">
+                    <a:schemeClr val="bg2"/>
+                  </a:outerShdw>
+                </a:effectLst>
+              </a14:hiddenEffects>
+            </a:ext>
+          </a:extLst>
+        </p:spPr>
+        <p:txBody>
+          <a:bodyPr vert="horz" wrap="none" lIns="91440" tIns="45720" rIns="91440" bIns="45720" numCol="1" anchor="ctr" anchorCtr="0" compatLnSpc="1">
+            <a:prstTxWarp prst="textNoShape">
+              <a:avLst/>
+            </a:prstTxWarp>
+            <a:spAutoFit/>
+          </a:bodyPr>
+          <a:lstStyle/>
+          <a:p>
+            <a:pPr lvl="0" eaLnBrk="0" fontAlgn="base" hangingPunct="0">
+              <a:spcBef>
+                <a:spcPct val="0"/>
+              </a:spcBef>
+              <a:spcAft>
+                <a:spcPct val="0"/>
+              </a:spcAft>
+            </a:pPr>
+            <a:r>
+              <a:rPr lang="en-US" altLang="en-US" sz="1200" b="1" dirty="0"/>
+              <a:t>App Lifetime</a:t>
+            </a:r>
+          </a:p>
+          <a:p>
+            <a:pPr lvl="0" eaLnBrk="0" fontAlgn="base" hangingPunct="0">
+              <a:spcBef>
+                <a:spcPct val="0"/>
+              </a:spcBef>
+              <a:spcAft>
+                <a:spcPct val="0"/>
+              </a:spcAft>
+            </a:pPr>
+            <a:r>
+              <a:rPr lang="en-US" altLang="en-US" sz="1200" b="1" dirty="0"/>
+              <a:t>├── </a:t>
+            </a:r>
+            <a:r>
+              <a:rPr lang="en-US" altLang="en-US" sz="1200" b="1" dirty="0" err="1"/>
+              <a:t>CacheWarmingService</a:t>
+            </a:r>
+            <a:r>
+              <a:rPr lang="en-US" altLang="en-US" sz="1200" b="1" dirty="0"/>
+              <a:t> (Singleton) ← holds </a:t>
+            </a:r>
+            <a:r>
+              <a:rPr lang="en-US" altLang="en-US" sz="1200" b="1" dirty="0" err="1"/>
+              <a:t>IServiceScopeFactory</a:t>
+            </a:r>
+            <a:endParaRPr lang="en-US" altLang="en-US" sz="1200" b="1" dirty="0"/>
+          </a:p>
+          <a:p>
+            <a:pPr lvl="0" eaLnBrk="0" fontAlgn="base" hangingPunct="0">
+              <a:spcBef>
+                <a:spcPct val="0"/>
+              </a:spcBef>
+              <a:spcAft>
+                <a:spcPct val="0"/>
+              </a:spcAft>
+            </a:pPr>
+            <a:r>
+              <a:rPr lang="en-US" altLang="en-US" sz="1200" b="1" dirty="0"/>
+              <a:t>│</a:t>
+            </a:r>
+          </a:p>
+          <a:p>
+            <a:pPr lvl="0" eaLnBrk="0" fontAlgn="base" hangingPunct="0">
+              <a:spcBef>
+                <a:spcPct val="0"/>
+              </a:spcBef>
+              <a:spcAft>
+                <a:spcPct val="0"/>
+              </a:spcAft>
+            </a:pPr>
+            <a:r>
+              <a:rPr lang="en-US" altLang="en-US" sz="1200" b="1" dirty="0"/>
+              <a:t>│   [Timer tick #1]</a:t>
+            </a:r>
+          </a:p>
+          <a:p>
+            <a:pPr lvl="0" eaLnBrk="0" fontAlgn="base" hangingPunct="0">
+              <a:spcBef>
+                <a:spcPct val="0"/>
+              </a:spcBef>
+              <a:spcAft>
+                <a:spcPct val="0"/>
+              </a:spcAft>
+            </a:pPr>
+            <a:r>
+              <a:rPr lang="en-US" altLang="en-US" sz="1200" b="1" dirty="0"/>
+              <a:t>│   ├── </a:t>
+            </a:r>
+            <a:r>
+              <a:rPr lang="en-US" altLang="en-US" sz="1200" b="1" dirty="0" err="1"/>
+              <a:t>CreateScope</a:t>
+            </a:r>
+            <a:r>
+              <a:rPr lang="en-US" altLang="en-US" sz="1200" b="1" dirty="0"/>
+              <a:t>()</a:t>
+            </a:r>
+          </a:p>
+          <a:p>
+            <a:pPr lvl="0" eaLnBrk="0" fontAlgn="base" hangingPunct="0">
+              <a:spcBef>
+                <a:spcPct val="0"/>
+              </a:spcBef>
+              <a:spcAft>
+                <a:spcPct val="0"/>
+              </a:spcAft>
+            </a:pPr>
+            <a:r>
+              <a:rPr lang="en-US" altLang="en-US" sz="1200" b="1" dirty="0"/>
+              <a:t>│   │   └── Resolve </a:t>
+            </a:r>
+            <a:r>
+              <a:rPr lang="en-US" altLang="en-US" sz="1200" b="1" dirty="0" err="1"/>
+              <a:t>IMyDataService</a:t>
+            </a:r>
+            <a:r>
+              <a:rPr lang="en-US" altLang="en-US" sz="1200" b="1" dirty="0"/>
+              <a:t>  ← fresh scoped instance</a:t>
+            </a:r>
+          </a:p>
+          <a:p>
+            <a:pPr lvl="0" eaLnBrk="0" fontAlgn="base" hangingPunct="0">
+              <a:spcBef>
+                <a:spcPct val="0"/>
+              </a:spcBef>
+              <a:spcAft>
+                <a:spcPct val="0"/>
+              </a:spcAft>
+            </a:pPr>
+            <a:r>
+              <a:rPr lang="en-US" altLang="en-US" sz="1200" b="1" dirty="0"/>
+              <a:t>│   │   └── Call </a:t>
+            </a:r>
+            <a:r>
+              <a:rPr lang="en-US" altLang="en-US" sz="1200" b="1" dirty="0" err="1"/>
+              <a:t>FetchDataAsync</a:t>
+            </a:r>
+            <a:r>
+              <a:rPr lang="en-US" altLang="en-US" sz="1200" b="1" dirty="0"/>
+              <a:t>()</a:t>
+            </a:r>
+          </a:p>
+          <a:p>
+            <a:pPr lvl="0" eaLnBrk="0" fontAlgn="base" hangingPunct="0">
+              <a:spcBef>
+                <a:spcPct val="0"/>
+              </a:spcBef>
+              <a:spcAft>
+                <a:spcPct val="0"/>
+              </a:spcAft>
+            </a:pPr>
+            <a:r>
+              <a:rPr lang="en-US" altLang="en-US" sz="1200" b="1" dirty="0"/>
+              <a:t>│   └── </a:t>
+            </a:r>
+            <a:r>
+              <a:rPr lang="en-US" altLang="en-US" sz="1200" b="1" dirty="0" err="1"/>
+              <a:t>scope.Dispose</a:t>
+            </a:r>
+            <a:r>
+              <a:rPr lang="en-US" altLang="en-US" sz="1200" b="1" dirty="0"/>
+              <a:t>()             ← scoped instance cleaned up</a:t>
+            </a:r>
+          </a:p>
+          <a:p>
+            <a:pPr lvl="0" eaLnBrk="0" fontAlgn="base" hangingPunct="0">
+              <a:spcBef>
+                <a:spcPct val="0"/>
+              </a:spcBef>
+              <a:spcAft>
+                <a:spcPct val="0"/>
+              </a:spcAft>
+            </a:pPr>
+            <a:r>
+              <a:rPr lang="en-US" altLang="en-US" sz="1200" b="1" dirty="0"/>
+              <a:t>│</a:t>
+            </a:r>
+          </a:p>
+          <a:p>
+            <a:pPr lvl="0" eaLnBrk="0" fontAlgn="base" hangingPunct="0">
+              <a:spcBef>
+                <a:spcPct val="0"/>
+              </a:spcBef>
+              <a:spcAft>
+                <a:spcPct val="0"/>
+              </a:spcAft>
+            </a:pPr>
+            <a:r>
+              <a:rPr lang="en-US" altLang="en-US" sz="1200" b="1" dirty="0"/>
+              <a:t>│   [Timer tick #2]</a:t>
+            </a:r>
+          </a:p>
+          <a:p>
+            <a:pPr lvl="0" eaLnBrk="0" fontAlgn="base" hangingPunct="0">
+              <a:spcBef>
+                <a:spcPct val="0"/>
+              </a:spcBef>
+              <a:spcAft>
+                <a:spcPct val="0"/>
+              </a:spcAft>
+            </a:pPr>
+            <a:r>
+              <a:rPr lang="en-US" altLang="en-US" sz="1200" b="1" dirty="0"/>
+              <a:t>│   ├── </a:t>
+            </a:r>
+            <a:r>
+              <a:rPr lang="en-US" altLang="en-US" sz="1200" b="1" dirty="0" err="1"/>
+              <a:t>CreateScope</a:t>
+            </a:r>
+            <a:r>
+              <a:rPr lang="en-US" altLang="en-US" sz="1200" b="1" dirty="0"/>
+              <a:t>()</a:t>
+            </a:r>
+          </a:p>
+          <a:p>
+            <a:pPr lvl="0" eaLnBrk="0" fontAlgn="base" hangingPunct="0">
+              <a:spcBef>
+                <a:spcPct val="0"/>
+              </a:spcBef>
+              <a:spcAft>
+                <a:spcPct val="0"/>
+              </a:spcAft>
+            </a:pPr>
+            <a:r>
+              <a:rPr lang="en-US" altLang="en-US" sz="1200" b="1" dirty="0"/>
+              <a:t>│   │   └── Resolve </a:t>
+            </a:r>
+            <a:r>
+              <a:rPr lang="en-US" altLang="en-US" sz="1200" b="1" dirty="0" err="1"/>
+              <a:t>IMyDataService</a:t>
+            </a:r>
+            <a:r>
+              <a:rPr lang="en-US" altLang="en-US" sz="1200" b="1" dirty="0"/>
+              <a:t>  ← another fresh instance</a:t>
+            </a:r>
+          </a:p>
+          <a:p>
+            <a:pPr lvl="0" eaLnBrk="0" fontAlgn="base" hangingPunct="0">
+              <a:spcBef>
+                <a:spcPct val="0"/>
+              </a:spcBef>
+              <a:spcAft>
+                <a:spcPct val="0"/>
+              </a:spcAft>
+            </a:pPr>
+            <a:r>
+              <a:rPr lang="en-US" altLang="en-US" sz="1200" b="1" dirty="0"/>
+              <a:t>│   └── </a:t>
+            </a:r>
+            <a:r>
+              <a:rPr lang="en-US" altLang="en-US" sz="1200" b="1" dirty="0" err="1"/>
+              <a:t>scope.Dispose</a:t>
+            </a:r>
+            <a:r>
+              <a:rPr lang="en-US" altLang="en-US" sz="1200" b="1" dirty="0"/>
+              <a:t>()</a:t>
+            </a:r>
+            <a:endParaRPr kumimoji="0" lang="en-US" altLang="en-US" sz="1200" b="0" i="0" u="none" strike="noStrike" cap="none" normalizeH="0" baseline="0" dirty="0">
+              <a:ln>
+                <a:noFill/>
+              </a:ln>
+              <a:solidFill>
+                <a:schemeClr val="tx1"/>
+              </a:solidFill>
+              <a:effectLst/>
+              <a:latin typeface="Arial" panose="020B0604020202020204" pitchFamily="34" charset="0"/>
+            </a:endParaRPr>
+          </a:p>
+        </p:txBody>
+      </p:sp>
+      <p:sp>
+        <p:nvSpPr>
+          <p:cNvPr id="6" name="TextBox 5">
+            <a:extLst>
+              <a:ext uri="{FF2B5EF4-FFF2-40B4-BE49-F238E27FC236}">
+                <a16:creationId xmlns:a16="http://schemas.microsoft.com/office/drawing/2014/main" id="{92AB4E4F-5E31-1AB8-4B6C-890DDFFBC61B}"/>
+              </a:ext>
+            </a:extLst>
+          </p:cNvPr>
+          <p:cNvSpPr txBox="1"/>
+          <p:nvPr/>
+        </p:nvSpPr>
+        <p:spPr>
+          <a:xfrm>
+            <a:off x="6000602" y="258120"/>
+            <a:ext cx="6096000" cy="5632311"/>
+          </a:xfrm>
+          <a:prstGeom prst="rect">
+            <a:avLst/>
+          </a:prstGeom>
+          <a:noFill/>
+        </p:spPr>
+        <p:txBody>
+          <a:bodyPr wrap="square">
+            <a:spAutoFit/>
+          </a:bodyPr>
+          <a:lstStyle/>
+          <a:p>
+            <a:r>
+              <a:rPr lang="en-US" dirty="0"/>
+              <a:t>DI Container</a:t>
+            </a:r>
+          </a:p>
+          <a:p>
+            <a:r>
+              <a:rPr lang="en-US" dirty="0"/>
+              <a:t>│</a:t>
+            </a:r>
+          </a:p>
+          <a:p>
+            <a:r>
+              <a:rPr lang="en-US" dirty="0"/>
+              <a:t>├── [Singleton]  </a:t>
+            </a:r>
+            <a:r>
+              <a:rPr lang="en-US" dirty="0" err="1"/>
+              <a:t>CacheWarmingService</a:t>
+            </a:r>
+            <a:endParaRPr lang="en-US" dirty="0"/>
+          </a:p>
+          <a:p>
+            <a:r>
+              <a:rPr lang="en-US" dirty="0"/>
+              <a:t>│       │</a:t>
+            </a:r>
+          </a:p>
+          <a:p>
+            <a:r>
+              <a:rPr lang="en-US" dirty="0"/>
+              <a:t>│       └── holds: </a:t>
+            </a:r>
+            <a:r>
+              <a:rPr lang="en-US" dirty="0" err="1"/>
+              <a:t>IServiceScopeFactory</a:t>
+            </a:r>
+            <a:r>
+              <a:rPr lang="en-US" dirty="0"/>
+              <a:t>  ← also singleton, safe ✅</a:t>
+            </a:r>
+          </a:p>
+          <a:p>
+            <a:r>
+              <a:rPr lang="en-US" dirty="0"/>
+              <a:t>│</a:t>
+            </a:r>
+          </a:p>
+          <a:p>
+            <a:r>
+              <a:rPr lang="en-US" dirty="0"/>
+              <a:t>│</a:t>
+            </a:r>
+          </a:p>
+          <a:p>
+            <a:r>
+              <a:rPr lang="en-US" dirty="0"/>
+              <a:t>├── [Scope A]  (HTTP Request 1)</a:t>
+            </a:r>
+          </a:p>
+          <a:p>
+            <a:r>
+              <a:rPr lang="en-US" dirty="0"/>
+              <a:t>│       └── </a:t>
+            </a:r>
+            <a:r>
+              <a:rPr lang="en-US" dirty="0" err="1"/>
+              <a:t>IMyDataService</a:t>
+            </a:r>
+            <a:r>
+              <a:rPr lang="en-US" dirty="0"/>
+              <a:t> → </a:t>
+            </a:r>
+            <a:r>
+              <a:rPr lang="en-US" dirty="0" err="1"/>
+              <a:t>MyDataService</a:t>
+            </a:r>
+            <a:endParaRPr lang="en-US" dirty="0"/>
+          </a:p>
+          <a:p>
+            <a:r>
+              <a:rPr lang="en-US" dirty="0"/>
+              <a:t>│               └── </a:t>
+            </a:r>
+            <a:r>
+              <a:rPr lang="en-US" dirty="0" err="1"/>
+              <a:t>AppDbContext</a:t>
+            </a:r>
+            <a:r>
+              <a:rPr lang="en-US" dirty="0"/>
+              <a:t>  (disposed when request ends)</a:t>
+            </a:r>
+          </a:p>
+          <a:p>
+            <a:r>
+              <a:rPr lang="en-US" dirty="0"/>
+              <a:t>│</a:t>
+            </a:r>
+          </a:p>
+          <a:p>
+            <a:r>
+              <a:rPr lang="en-US" dirty="0"/>
+              <a:t>├── [Scope B]  (HTTP Request 2)</a:t>
+            </a:r>
+          </a:p>
+          <a:p>
+            <a:r>
+              <a:rPr lang="en-US" dirty="0"/>
+              <a:t>│       └── </a:t>
+            </a:r>
+            <a:r>
+              <a:rPr lang="en-US" dirty="0" err="1"/>
+              <a:t>IMyDataService</a:t>
+            </a:r>
+            <a:r>
+              <a:rPr lang="en-US" dirty="0"/>
+              <a:t> → </a:t>
+            </a:r>
+            <a:r>
+              <a:rPr lang="en-US" dirty="0" err="1"/>
+              <a:t>MyDataService</a:t>
+            </a:r>
+            <a:endParaRPr lang="en-US" dirty="0"/>
+          </a:p>
+          <a:p>
+            <a:r>
+              <a:rPr lang="en-US" dirty="0"/>
+              <a:t>│               └── </a:t>
+            </a:r>
+            <a:r>
+              <a:rPr lang="en-US" dirty="0" err="1"/>
+              <a:t>AppDbContext</a:t>
+            </a:r>
+            <a:endParaRPr lang="en-US" dirty="0"/>
+          </a:p>
+          <a:p>
+            <a:r>
+              <a:rPr lang="en-US" dirty="0"/>
+              <a:t>│</a:t>
+            </a:r>
+          </a:p>
+          <a:p>
+            <a:r>
+              <a:rPr lang="en-US" dirty="0"/>
+              <a:t>└── [Scope C]  (manually created by </a:t>
+            </a:r>
+            <a:r>
+              <a:rPr lang="en-US" dirty="0" err="1"/>
+              <a:t>CacheWarmingService</a:t>
+            </a:r>
+            <a:r>
+              <a:rPr lang="en-US" dirty="0"/>
+              <a:t> timer tick)</a:t>
+            </a:r>
+          </a:p>
+          <a:p>
+            <a:r>
+              <a:rPr lang="en-US" dirty="0"/>
+              <a:t>        └── </a:t>
+            </a:r>
+            <a:r>
+              <a:rPr lang="en-US" dirty="0" err="1"/>
+              <a:t>IMyDataService</a:t>
+            </a:r>
+            <a:r>
+              <a:rPr lang="en-US" dirty="0"/>
+              <a:t> → </a:t>
+            </a:r>
+            <a:r>
+              <a:rPr lang="en-US" dirty="0" err="1"/>
+              <a:t>MyDataService</a:t>
+            </a:r>
+            <a:r>
+              <a:rPr lang="en-US" dirty="0"/>
+              <a:t>   ← fresh, isolated</a:t>
+            </a:r>
+          </a:p>
+          <a:p>
+            <a:r>
+              <a:rPr lang="en-US" dirty="0"/>
+              <a:t>                └── </a:t>
+            </a:r>
+            <a:r>
+              <a:rPr lang="en-US" dirty="0" err="1"/>
+              <a:t>AppDbContext</a:t>
+            </a:r>
+            <a:r>
+              <a:rPr lang="en-US" dirty="0"/>
+              <a:t>             ← disposed after tick ✅</a:t>
+            </a:r>
+          </a:p>
+        </p:txBody>
+      </p:sp>
+    </p:spTree>
+    <p:extLst>
+      <p:ext uri="{BB962C8B-B14F-4D97-AF65-F5344CB8AC3E}">
+        <p14:creationId xmlns:p14="http://schemas.microsoft.com/office/powerpoint/2010/main" val="966070069"/>
+      </p:ext>
+    </p:extLst>
+  </p:cSld>
+  <p:clrMapOvr>
+    <a:masterClrMapping/>
+  </p:clrMapOvr>
+</p:sld>
+</file>
+
 <file path=ppt/slides/slide3.xml><?xml version="1.0" encoding="utf-8"?>
 <p:sld xmlns:a="http://schemas.openxmlformats.org/drawingml/2006/main" xmlns:r="http://schemas.openxmlformats.org/officeDocument/2006/relationships" xmlns:p="http://schemas.openxmlformats.org/presentationml/2006/main">
   <p:cSld>
@@ -13727,6 +16433,3468 @@
     <p:extLst>
       <p:ext uri="{BB962C8B-B14F-4D97-AF65-F5344CB8AC3E}">
         <p14:creationId xmlns:p14="http://schemas.microsoft.com/office/powerpoint/2010/main" val="505737701"/>
+      </p:ext>
+    </p:extLst>
+  </p:cSld>
+  <p:clrMapOvr>
+    <a:masterClrMapping/>
+  </p:clrMapOvr>
+</p:sld>
+</file>
+
+<file path=ppt/slides/slide30.xml><?xml version="1.0" encoding="utf-8"?>
+<p:sld xmlns:a="http://schemas.openxmlformats.org/drawingml/2006/main" xmlns:r="http://schemas.openxmlformats.org/officeDocument/2006/relationships" xmlns:p="http://schemas.openxmlformats.org/presentationml/2006/main">
+  <p:cSld>
+    <p:spTree>
+      <p:nvGrpSpPr>
+        <p:cNvPr id="1" name=""/>
+        <p:cNvGrpSpPr/>
+        <p:nvPr/>
+      </p:nvGrpSpPr>
+      <p:grpSpPr>
+        <a:xfrm>
+          <a:off x="0" y="0"/>
+          <a:ext cx="0" cy="0"/>
+          <a:chOff x="0" y="0"/>
+          <a:chExt cx="0" cy="0"/>
+        </a:xfrm>
+      </p:grpSpPr>
+      <p:graphicFrame>
+        <p:nvGraphicFramePr>
+          <p:cNvPr id="2" name="Table 1">
+            <a:extLst>
+              <a:ext uri="{FF2B5EF4-FFF2-40B4-BE49-F238E27FC236}">
+                <a16:creationId xmlns:a16="http://schemas.microsoft.com/office/drawing/2014/main" id="{83A4181F-2DEC-A829-CBC6-B9B84AE574E7}"/>
+              </a:ext>
+            </a:extLst>
+          </p:cNvPr>
+          <p:cNvGraphicFramePr>
+            <a:graphicFrameLocks noGrp="1"/>
+          </p:cNvGraphicFramePr>
+          <p:nvPr>
+            <p:extLst>
+              <p:ext uri="{D42A27DB-BD31-4B8C-83A1-F6EECF244321}">
+                <p14:modId xmlns:p14="http://schemas.microsoft.com/office/powerpoint/2010/main" val="3948128090"/>
+              </p:ext>
+            </p:extLst>
+          </p:nvPr>
+        </p:nvGraphicFramePr>
+        <p:xfrm>
+          <a:off x="94593" y="-68490"/>
+          <a:ext cx="11753193" cy="1645920"/>
+        </p:xfrm>
+        <a:graphic>
+          <a:graphicData uri="http://schemas.openxmlformats.org/drawingml/2006/table">
+            <a:tbl>
+              <a:tblPr/>
+              <a:tblGrid>
+                <a:gridCol w="2633968">
+                  <a:extLst>
+                    <a:ext uri="{9D8B030D-6E8A-4147-A177-3AD203B41FA5}">
+                      <a16:colId xmlns:a16="http://schemas.microsoft.com/office/drawing/2014/main" val="1028025386"/>
+                    </a:ext>
+                  </a:extLst>
+                </a:gridCol>
+                <a:gridCol w="4515695">
+                  <a:extLst>
+                    <a:ext uri="{9D8B030D-6E8A-4147-A177-3AD203B41FA5}">
+                      <a16:colId xmlns:a16="http://schemas.microsoft.com/office/drawing/2014/main" val="3102508683"/>
+                    </a:ext>
+                  </a:extLst>
+                </a:gridCol>
+                <a:gridCol w="4603530">
+                  <a:extLst>
+                    <a:ext uri="{9D8B030D-6E8A-4147-A177-3AD203B41FA5}">
+                      <a16:colId xmlns:a16="http://schemas.microsoft.com/office/drawing/2014/main" val="3300723508"/>
+                    </a:ext>
+                  </a:extLst>
+                </a:gridCol>
+              </a:tblGrid>
+              <a:tr h="0">
+                <a:tc>
+                  <a:txBody>
+                    <a:bodyPr/>
+                    <a:lstStyle/>
+                    <a:p>
+                      <a:pPr>
+                        <a:buNone/>
+                      </a:pPr>
+                      <a:endParaRPr lang="en-US" sz="1200"/>
+                    </a:p>
+                  </a:txBody>
+                  <a:tcPr anchor="ctr">
+                    <a:lnL>
+                      <a:noFill/>
+                    </a:lnL>
+                    <a:lnR>
+                      <a:noFill/>
+                    </a:lnR>
+                    <a:lnT>
+                      <a:noFill/>
+                    </a:lnT>
+                    <a:lnB>
+                      <a:noFill/>
+                    </a:lnB>
+                    <a:noFill/>
+                  </a:tcPr>
+                </a:tc>
+                <a:tc>
+                  <a:txBody>
+                    <a:bodyPr/>
+                    <a:lstStyle/>
+                    <a:p>
+                      <a:pPr>
+                        <a:buNone/>
+                      </a:pPr>
+                      <a:r>
+                        <a:rPr lang="en-US" sz="1200">
+                          <a:latin typeface="Courier New" panose="02070309020205020404" pitchFamily="49" charset="0"/>
+                        </a:rPr>
+                        <a:t>app.Services.CreateScope()</a:t>
+                      </a:r>
+                      <a:r>
+                        <a:rPr lang="en-US" sz="1200"/>
+                        <a:t> in Program.cs</a:t>
+                      </a:r>
+                    </a:p>
+                  </a:txBody>
+                  <a:tcPr anchor="ctr">
+                    <a:lnL>
+                      <a:noFill/>
+                    </a:lnL>
+                    <a:lnR>
+                      <a:noFill/>
+                    </a:lnR>
+                    <a:lnT>
+                      <a:noFill/>
+                    </a:lnT>
+                    <a:lnB>
+                      <a:noFill/>
+                    </a:lnB>
+                    <a:noFill/>
+                  </a:tcPr>
+                </a:tc>
+                <a:tc>
+                  <a:txBody>
+                    <a:bodyPr/>
+                    <a:lstStyle/>
+                    <a:p>
+                      <a:pPr>
+                        <a:buNone/>
+                      </a:pPr>
+                      <a:r>
+                        <a:rPr lang="en-US" sz="1200">
+                          <a:latin typeface="Courier New" panose="02070309020205020404" pitchFamily="49" charset="0"/>
+                        </a:rPr>
+                        <a:t>_scopeFactory.CreateScope()</a:t>
+                      </a:r>
+                      <a:r>
+                        <a:rPr lang="en-US" sz="1200"/>
+                        <a:t> in BackgroundService</a:t>
+                      </a:r>
+                    </a:p>
+                  </a:txBody>
+                  <a:tcPr anchor="ctr">
+                    <a:lnL>
+                      <a:noFill/>
+                    </a:lnL>
+                    <a:lnR>
+                      <a:noFill/>
+                    </a:lnR>
+                    <a:lnT>
+                      <a:noFill/>
+                    </a:lnT>
+                    <a:lnB>
+                      <a:noFill/>
+                    </a:lnB>
+                    <a:noFill/>
+                  </a:tcPr>
+                </a:tc>
+                <a:extLst>
+                  <a:ext uri="{0D108BD9-81ED-4DB2-BD59-A6C34878D82A}">
+                    <a16:rowId xmlns:a16="http://schemas.microsoft.com/office/drawing/2014/main" val="222580058"/>
+                  </a:ext>
+                </a:extLst>
+              </a:tr>
+              <a:tr h="0">
+                <a:tc>
+                  <a:txBody>
+                    <a:bodyPr/>
+                    <a:lstStyle/>
+                    <a:p>
+                      <a:pPr>
+                        <a:buNone/>
+                      </a:pPr>
+                      <a:r>
+                        <a:rPr lang="en-US" sz="1200" b="1"/>
+                        <a:t>Who calls it</a:t>
+                      </a:r>
+                      <a:endParaRPr lang="en-US" sz="1200"/>
+                    </a:p>
+                  </a:txBody>
+                  <a:tcPr anchor="ctr">
+                    <a:lnL>
+                      <a:noFill/>
+                    </a:lnL>
+                    <a:lnR>
+                      <a:noFill/>
+                    </a:lnR>
+                    <a:lnT>
+                      <a:noFill/>
+                    </a:lnT>
+                    <a:lnB>
+                      <a:noFill/>
+                    </a:lnB>
+                    <a:noFill/>
+                  </a:tcPr>
+                </a:tc>
+                <a:tc>
+                  <a:txBody>
+                    <a:bodyPr/>
+                    <a:lstStyle/>
+                    <a:p>
+                      <a:pPr>
+                        <a:buNone/>
+                      </a:pPr>
+                      <a:r>
+                        <a:rPr lang="en-US" sz="1200"/>
+                        <a:t>App startup code</a:t>
+                      </a:r>
+                    </a:p>
+                  </a:txBody>
+                  <a:tcPr anchor="ctr">
+                    <a:lnL>
+                      <a:noFill/>
+                    </a:lnL>
+                    <a:lnR>
+                      <a:noFill/>
+                    </a:lnR>
+                    <a:lnT>
+                      <a:noFill/>
+                    </a:lnT>
+                    <a:lnB>
+                      <a:noFill/>
+                    </a:lnB>
+                    <a:noFill/>
+                  </a:tcPr>
+                </a:tc>
+                <a:tc>
+                  <a:txBody>
+                    <a:bodyPr/>
+                    <a:lstStyle/>
+                    <a:p>
+                      <a:pPr>
+                        <a:buNone/>
+                      </a:pPr>
+                      <a:r>
+                        <a:rPr lang="en-US" sz="1200"/>
+                        <a:t>Singleton background service</a:t>
+                      </a:r>
+                    </a:p>
+                  </a:txBody>
+                  <a:tcPr anchor="ctr">
+                    <a:lnL>
+                      <a:noFill/>
+                    </a:lnL>
+                    <a:lnR>
+                      <a:noFill/>
+                    </a:lnR>
+                    <a:lnT>
+                      <a:noFill/>
+                    </a:lnT>
+                    <a:lnB>
+                      <a:noFill/>
+                    </a:lnB>
+                    <a:noFill/>
+                  </a:tcPr>
+                </a:tc>
+                <a:extLst>
+                  <a:ext uri="{0D108BD9-81ED-4DB2-BD59-A6C34878D82A}">
+                    <a16:rowId xmlns:a16="http://schemas.microsoft.com/office/drawing/2014/main" val="2324369735"/>
+                  </a:ext>
+                </a:extLst>
+              </a:tr>
+              <a:tr h="0">
+                <a:tc>
+                  <a:txBody>
+                    <a:bodyPr/>
+                    <a:lstStyle/>
+                    <a:p>
+                      <a:pPr>
+                        <a:buNone/>
+                      </a:pPr>
+                      <a:r>
+                        <a:rPr lang="en-US" sz="1200" b="1"/>
+                        <a:t>When</a:t>
+                      </a:r>
+                      <a:endParaRPr lang="en-US" sz="1200"/>
+                    </a:p>
+                  </a:txBody>
+                  <a:tcPr anchor="ctr">
+                    <a:lnL>
+                      <a:noFill/>
+                    </a:lnL>
+                    <a:lnR>
+                      <a:noFill/>
+                    </a:lnR>
+                    <a:lnT>
+                      <a:noFill/>
+                    </a:lnT>
+                    <a:lnB>
+                      <a:noFill/>
+                    </a:lnB>
+                    <a:noFill/>
+                  </a:tcPr>
+                </a:tc>
+                <a:tc>
+                  <a:txBody>
+                    <a:bodyPr/>
+                    <a:lstStyle/>
+                    <a:p>
+                      <a:pPr>
+                        <a:buNone/>
+                      </a:pPr>
+                      <a:r>
+                        <a:rPr lang="en-US" sz="1200"/>
+                        <a:t>Once, before </a:t>
+                      </a:r>
+                      <a:r>
+                        <a:rPr lang="en-US" sz="1200">
+                          <a:latin typeface="Courier New" panose="02070309020205020404" pitchFamily="49" charset="0"/>
+                        </a:rPr>
+                        <a:t>app.Run()</a:t>
+                      </a:r>
+                      <a:endParaRPr lang="en-US" sz="1200"/>
+                    </a:p>
+                  </a:txBody>
+                  <a:tcPr anchor="ctr">
+                    <a:lnL>
+                      <a:noFill/>
+                    </a:lnL>
+                    <a:lnR>
+                      <a:noFill/>
+                    </a:lnR>
+                    <a:lnT>
+                      <a:noFill/>
+                    </a:lnT>
+                    <a:lnB>
+                      <a:noFill/>
+                    </a:lnB>
+                    <a:noFill/>
+                  </a:tcPr>
+                </a:tc>
+                <a:tc>
+                  <a:txBody>
+                    <a:bodyPr/>
+                    <a:lstStyle/>
+                    <a:p>
+                      <a:pPr>
+                        <a:buNone/>
+                      </a:pPr>
+                      <a:r>
+                        <a:rPr lang="en-AU" sz="1200"/>
+                        <a:t>Repeatedly, on each timer tick</a:t>
+                      </a:r>
+                    </a:p>
+                  </a:txBody>
+                  <a:tcPr anchor="ctr">
+                    <a:lnL>
+                      <a:noFill/>
+                    </a:lnL>
+                    <a:lnR>
+                      <a:noFill/>
+                    </a:lnR>
+                    <a:lnT>
+                      <a:noFill/>
+                    </a:lnT>
+                    <a:lnB>
+                      <a:noFill/>
+                    </a:lnB>
+                    <a:noFill/>
+                  </a:tcPr>
+                </a:tc>
+                <a:extLst>
+                  <a:ext uri="{0D108BD9-81ED-4DB2-BD59-A6C34878D82A}">
+                    <a16:rowId xmlns:a16="http://schemas.microsoft.com/office/drawing/2014/main" val="953671089"/>
+                  </a:ext>
+                </a:extLst>
+              </a:tr>
+              <a:tr h="0">
+                <a:tc>
+                  <a:txBody>
+                    <a:bodyPr/>
+                    <a:lstStyle/>
+                    <a:p>
+                      <a:pPr>
+                        <a:buNone/>
+                      </a:pPr>
+                      <a:r>
+                        <a:rPr lang="en-US" sz="1200" b="1"/>
+                        <a:t>Scope lifetime</a:t>
+                      </a:r>
+                      <a:endParaRPr lang="en-US" sz="1200"/>
+                    </a:p>
+                  </a:txBody>
+                  <a:tcPr anchor="ctr">
+                    <a:lnL>
+                      <a:noFill/>
+                    </a:lnL>
+                    <a:lnR>
+                      <a:noFill/>
+                    </a:lnR>
+                    <a:lnT>
+                      <a:noFill/>
+                    </a:lnT>
+                    <a:lnB>
+                      <a:noFill/>
+                    </a:lnB>
+                    <a:noFill/>
+                  </a:tcPr>
+                </a:tc>
+                <a:tc>
+                  <a:txBody>
+                    <a:bodyPr/>
+                    <a:lstStyle/>
+                    <a:p>
+                      <a:pPr>
+                        <a:buNone/>
+                      </a:pPr>
+                      <a:r>
+                        <a:rPr lang="en-US" sz="1200"/>
+                        <a:t>Until </a:t>
+                      </a:r>
+                      <a:r>
+                        <a:rPr lang="en-US" sz="1200">
+                          <a:latin typeface="Courier New" panose="02070309020205020404" pitchFamily="49" charset="0"/>
+                        </a:rPr>
+                        <a:t>using</a:t>
+                      </a:r>
+                      <a:r>
+                        <a:rPr lang="en-US" sz="1200"/>
+                        <a:t> block ends</a:t>
+                      </a:r>
+                    </a:p>
+                  </a:txBody>
+                  <a:tcPr anchor="ctr">
+                    <a:lnL>
+                      <a:noFill/>
+                    </a:lnL>
+                    <a:lnR>
+                      <a:noFill/>
+                    </a:lnR>
+                    <a:lnT>
+                      <a:noFill/>
+                    </a:lnT>
+                    <a:lnB>
+                      <a:noFill/>
+                    </a:lnB>
+                    <a:noFill/>
+                  </a:tcPr>
+                </a:tc>
+                <a:tc>
+                  <a:txBody>
+                    <a:bodyPr/>
+                    <a:lstStyle/>
+                    <a:p>
+                      <a:pPr>
+                        <a:buNone/>
+                      </a:pPr>
+                      <a:r>
+                        <a:rPr lang="en-US" sz="1200"/>
+                        <a:t>Until </a:t>
+                      </a:r>
+                      <a:r>
+                        <a:rPr lang="en-US" sz="1200">
+                          <a:latin typeface="Courier New" panose="02070309020205020404" pitchFamily="49" charset="0"/>
+                        </a:rPr>
+                        <a:t>using</a:t>
+                      </a:r>
+                      <a:r>
+                        <a:rPr lang="en-US" sz="1200"/>
+                        <a:t> block ends</a:t>
+                      </a:r>
+                    </a:p>
+                  </a:txBody>
+                  <a:tcPr anchor="ctr">
+                    <a:lnL>
+                      <a:noFill/>
+                    </a:lnL>
+                    <a:lnR>
+                      <a:noFill/>
+                    </a:lnR>
+                    <a:lnT>
+                      <a:noFill/>
+                    </a:lnT>
+                    <a:lnB>
+                      <a:noFill/>
+                    </a:lnB>
+                    <a:noFill/>
+                  </a:tcPr>
+                </a:tc>
+                <a:extLst>
+                  <a:ext uri="{0D108BD9-81ED-4DB2-BD59-A6C34878D82A}">
+                    <a16:rowId xmlns:a16="http://schemas.microsoft.com/office/drawing/2014/main" val="616425134"/>
+                  </a:ext>
+                </a:extLst>
+              </a:tr>
+              <a:tr h="0">
+                <a:tc>
+                  <a:txBody>
+                    <a:bodyPr/>
+                    <a:lstStyle/>
+                    <a:p>
+                      <a:pPr>
+                        <a:buNone/>
+                      </a:pPr>
+                      <a:r>
+                        <a:rPr lang="en-US" sz="1200" b="1"/>
+                        <a:t>Scoped services</a:t>
+                      </a:r>
+                      <a:endParaRPr lang="en-US" sz="1200"/>
+                    </a:p>
+                  </a:txBody>
+                  <a:tcPr anchor="ctr">
+                    <a:lnL>
+                      <a:noFill/>
+                    </a:lnL>
+                    <a:lnR>
+                      <a:noFill/>
+                    </a:lnR>
+                    <a:lnT>
+                      <a:noFill/>
+                    </a:lnT>
+                    <a:lnB>
+                      <a:noFill/>
+                    </a:lnB>
+                    <a:noFill/>
+                  </a:tcPr>
+                </a:tc>
+                <a:tc>
+                  <a:txBody>
+                    <a:bodyPr/>
+                    <a:lstStyle/>
+                    <a:p>
+                      <a:pPr>
+                        <a:buNone/>
+                      </a:pPr>
+                      <a:r>
+                        <a:rPr lang="en-US" sz="1200"/>
+                        <a:t>Fresh instance, then disposed</a:t>
+                      </a:r>
+                    </a:p>
+                  </a:txBody>
+                  <a:tcPr anchor="ctr">
+                    <a:lnL>
+                      <a:noFill/>
+                    </a:lnL>
+                    <a:lnR>
+                      <a:noFill/>
+                    </a:lnR>
+                    <a:lnT>
+                      <a:noFill/>
+                    </a:lnT>
+                    <a:lnB>
+                      <a:noFill/>
+                    </a:lnB>
+                    <a:noFill/>
+                  </a:tcPr>
+                </a:tc>
+                <a:tc>
+                  <a:txBody>
+                    <a:bodyPr/>
+                    <a:lstStyle/>
+                    <a:p>
+                      <a:pPr>
+                        <a:buNone/>
+                      </a:pPr>
+                      <a:r>
+                        <a:rPr lang="en-US" sz="1200"/>
+                        <a:t>Fresh instance, then disposed</a:t>
+                      </a:r>
+                    </a:p>
+                  </a:txBody>
+                  <a:tcPr anchor="ctr">
+                    <a:lnL>
+                      <a:noFill/>
+                    </a:lnL>
+                    <a:lnR>
+                      <a:noFill/>
+                    </a:lnR>
+                    <a:lnT>
+                      <a:noFill/>
+                    </a:lnT>
+                    <a:lnB>
+                      <a:noFill/>
+                    </a:lnB>
+                    <a:noFill/>
+                  </a:tcPr>
+                </a:tc>
+                <a:extLst>
+                  <a:ext uri="{0D108BD9-81ED-4DB2-BD59-A6C34878D82A}">
+                    <a16:rowId xmlns:a16="http://schemas.microsoft.com/office/drawing/2014/main" val="2296037110"/>
+                  </a:ext>
+                </a:extLst>
+              </a:tr>
+              <a:tr h="0">
+                <a:tc>
+                  <a:txBody>
+                    <a:bodyPr/>
+                    <a:lstStyle/>
+                    <a:p>
+                      <a:pPr>
+                        <a:buNone/>
+                      </a:pPr>
+                      <a:r>
+                        <a:rPr lang="en-US" sz="1200" b="1"/>
+                        <a:t>Mechanism</a:t>
+                      </a:r>
+                      <a:endParaRPr lang="en-US" sz="1200"/>
+                    </a:p>
+                  </a:txBody>
+                  <a:tcPr anchor="ctr">
+                    <a:lnL>
+                      <a:noFill/>
+                    </a:lnL>
+                    <a:lnR>
+                      <a:noFill/>
+                    </a:lnR>
+                    <a:lnT>
+                      <a:noFill/>
+                    </a:lnT>
+                    <a:lnB>
+                      <a:noFill/>
+                    </a:lnB>
+                    <a:noFill/>
+                  </a:tcPr>
+                </a:tc>
+                <a:tc>
+                  <a:txBody>
+                    <a:bodyPr/>
+                    <a:lstStyle/>
+                    <a:p>
+                      <a:pPr>
+                        <a:buNone/>
+                      </a:pPr>
+                      <a:r>
+                        <a:rPr lang="en-US" sz="1200"/>
+                        <a:t>Same</a:t>
+                      </a:r>
+                    </a:p>
+                  </a:txBody>
+                  <a:tcPr anchor="ctr">
+                    <a:lnL>
+                      <a:noFill/>
+                    </a:lnL>
+                    <a:lnR>
+                      <a:noFill/>
+                    </a:lnR>
+                    <a:lnT>
+                      <a:noFill/>
+                    </a:lnT>
+                    <a:lnB>
+                      <a:noFill/>
+                    </a:lnB>
+                    <a:noFill/>
+                  </a:tcPr>
+                </a:tc>
+                <a:tc>
+                  <a:txBody>
+                    <a:bodyPr/>
+                    <a:lstStyle/>
+                    <a:p>
+                      <a:pPr>
+                        <a:buNone/>
+                      </a:pPr>
+                      <a:r>
+                        <a:rPr lang="en-US" sz="1200" dirty="0"/>
+                        <a:t>Same</a:t>
+                      </a:r>
+                    </a:p>
+                  </a:txBody>
+                  <a:tcPr anchor="ctr">
+                    <a:lnL>
+                      <a:noFill/>
+                    </a:lnL>
+                    <a:lnR>
+                      <a:noFill/>
+                    </a:lnR>
+                    <a:lnT>
+                      <a:noFill/>
+                    </a:lnT>
+                    <a:lnB>
+                      <a:noFill/>
+                    </a:lnB>
+                    <a:noFill/>
+                  </a:tcPr>
+                </a:tc>
+                <a:extLst>
+                  <a:ext uri="{0D108BD9-81ED-4DB2-BD59-A6C34878D82A}">
+                    <a16:rowId xmlns:a16="http://schemas.microsoft.com/office/drawing/2014/main" val="1759122614"/>
+                  </a:ext>
+                </a:extLst>
+              </a:tr>
+            </a:tbl>
+          </a:graphicData>
+        </a:graphic>
+      </p:graphicFrame>
+      <p:graphicFrame>
+        <p:nvGraphicFramePr>
+          <p:cNvPr id="13" name="Table 12">
+            <a:extLst>
+              <a:ext uri="{FF2B5EF4-FFF2-40B4-BE49-F238E27FC236}">
+                <a16:creationId xmlns:a16="http://schemas.microsoft.com/office/drawing/2014/main" id="{10E6C1F5-2B52-CA17-8814-8B958CFBC543}"/>
+              </a:ext>
+            </a:extLst>
+          </p:cNvPr>
+          <p:cNvGraphicFramePr>
+            <a:graphicFrameLocks noGrp="1"/>
+          </p:cNvGraphicFramePr>
+          <p:nvPr/>
+        </p:nvGraphicFramePr>
+        <p:xfrm>
+          <a:off x="838200" y="2721134"/>
+          <a:ext cx="10515600" cy="2560320"/>
+        </p:xfrm>
+        <a:graphic>
+          <a:graphicData uri="http://schemas.openxmlformats.org/drawingml/2006/table">
+            <a:tbl>
+              <a:tblPr/>
+              <a:tblGrid>
+                <a:gridCol w="3505200">
+                  <a:extLst>
+                    <a:ext uri="{9D8B030D-6E8A-4147-A177-3AD203B41FA5}">
+                      <a16:colId xmlns:a16="http://schemas.microsoft.com/office/drawing/2014/main" val="1984051664"/>
+                    </a:ext>
+                  </a:extLst>
+                </a:gridCol>
+                <a:gridCol w="3505200">
+                  <a:extLst>
+                    <a:ext uri="{9D8B030D-6E8A-4147-A177-3AD203B41FA5}">
+                      <a16:colId xmlns:a16="http://schemas.microsoft.com/office/drawing/2014/main" val="2553215554"/>
+                    </a:ext>
+                  </a:extLst>
+                </a:gridCol>
+                <a:gridCol w="3505200">
+                  <a:extLst>
+                    <a:ext uri="{9D8B030D-6E8A-4147-A177-3AD203B41FA5}">
+                      <a16:colId xmlns:a16="http://schemas.microsoft.com/office/drawing/2014/main" val="2944645218"/>
+                    </a:ext>
+                  </a:extLst>
+                </a:gridCol>
+              </a:tblGrid>
+              <a:tr h="0">
+                <a:tc>
+                  <a:txBody>
+                    <a:bodyPr/>
+                    <a:lstStyle/>
+                    <a:p>
+                      <a:pPr>
+                        <a:buNone/>
+                      </a:pPr>
+                      <a:endParaRPr lang="en-US"/>
+                    </a:p>
+                  </a:txBody>
+                  <a:tcPr anchor="ctr">
+                    <a:lnL>
+                      <a:noFill/>
+                    </a:lnL>
+                    <a:lnR>
+                      <a:noFill/>
+                    </a:lnR>
+                    <a:lnT>
+                      <a:noFill/>
+                    </a:lnT>
+                    <a:lnB>
+                      <a:noFill/>
+                    </a:lnB>
+                    <a:noFill/>
+                  </a:tcPr>
+                </a:tc>
+                <a:tc>
+                  <a:txBody>
+                    <a:bodyPr/>
+                    <a:lstStyle/>
+                    <a:p>
+                      <a:pPr>
+                        <a:buNone/>
+                      </a:pPr>
+                      <a:r>
+                        <a:rPr lang="en-US">
+                          <a:latin typeface="Courier New" panose="02070309020205020404" pitchFamily="49" charset="0"/>
+                        </a:rPr>
+                        <a:t>AddHostedService</a:t>
+                      </a:r>
+                      <a:endParaRPr lang="en-US"/>
+                    </a:p>
+                  </a:txBody>
+                  <a:tcPr anchor="ctr">
+                    <a:lnL>
+                      <a:noFill/>
+                    </a:lnL>
+                    <a:lnR>
+                      <a:noFill/>
+                    </a:lnR>
+                    <a:lnT>
+                      <a:noFill/>
+                    </a:lnT>
+                    <a:lnB>
+                      <a:noFill/>
+                    </a:lnB>
+                    <a:noFill/>
+                  </a:tcPr>
+                </a:tc>
+                <a:tc>
+                  <a:txBody>
+                    <a:bodyPr/>
+                    <a:lstStyle/>
+                    <a:p>
+                      <a:pPr>
+                        <a:buNone/>
+                      </a:pPr>
+                      <a:r>
+                        <a:rPr lang="en-US">
+                          <a:latin typeface="Courier New" panose="02070309020205020404" pitchFamily="49" charset="0"/>
+                        </a:rPr>
+                        <a:t>AddSingleton</a:t>
+                      </a:r>
+                      <a:endParaRPr lang="en-US"/>
+                    </a:p>
+                  </a:txBody>
+                  <a:tcPr anchor="ctr">
+                    <a:lnL>
+                      <a:noFill/>
+                    </a:lnL>
+                    <a:lnR>
+                      <a:noFill/>
+                    </a:lnR>
+                    <a:lnT>
+                      <a:noFill/>
+                    </a:lnT>
+                    <a:lnB>
+                      <a:noFill/>
+                    </a:lnB>
+                    <a:noFill/>
+                  </a:tcPr>
+                </a:tc>
+                <a:extLst>
+                  <a:ext uri="{0D108BD9-81ED-4DB2-BD59-A6C34878D82A}">
+                    <a16:rowId xmlns:a16="http://schemas.microsoft.com/office/drawing/2014/main" val="2247616813"/>
+                  </a:ext>
+                </a:extLst>
+              </a:tr>
+              <a:tr h="0">
+                <a:tc>
+                  <a:txBody>
+                    <a:bodyPr/>
+                    <a:lstStyle/>
+                    <a:p>
+                      <a:pPr>
+                        <a:buNone/>
+                      </a:pPr>
+                      <a:r>
+                        <a:rPr lang="en-US" b="1"/>
+                        <a:t>Lifetime</a:t>
+                      </a:r>
+                      <a:endParaRPr lang="en-US"/>
+                    </a:p>
+                  </a:txBody>
+                  <a:tcPr anchor="ctr">
+                    <a:lnL>
+                      <a:noFill/>
+                    </a:lnL>
+                    <a:lnR>
+                      <a:noFill/>
+                    </a:lnR>
+                    <a:lnT>
+                      <a:noFill/>
+                    </a:lnT>
+                    <a:lnB>
+                      <a:noFill/>
+                    </a:lnB>
+                    <a:noFill/>
+                  </a:tcPr>
+                </a:tc>
+                <a:tc>
+                  <a:txBody>
+                    <a:bodyPr/>
+                    <a:lstStyle/>
+                    <a:p>
+                      <a:pPr>
+                        <a:buNone/>
+                      </a:pPr>
+                      <a:r>
+                        <a:rPr lang="en-US"/>
+                        <a:t>Singleton</a:t>
+                      </a:r>
+                    </a:p>
+                  </a:txBody>
+                  <a:tcPr anchor="ctr">
+                    <a:lnL>
+                      <a:noFill/>
+                    </a:lnL>
+                    <a:lnR>
+                      <a:noFill/>
+                    </a:lnR>
+                    <a:lnT>
+                      <a:noFill/>
+                    </a:lnT>
+                    <a:lnB>
+                      <a:noFill/>
+                    </a:lnB>
+                    <a:noFill/>
+                  </a:tcPr>
+                </a:tc>
+                <a:tc>
+                  <a:txBody>
+                    <a:bodyPr/>
+                    <a:lstStyle/>
+                    <a:p>
+                      <a:pPr>
+                        <a:buNone/>
+                      </a:pPr>
+                      <a:r>
+                        <a:rPr lang="en-US"/>
+                        <a:t>Singleton</a:t>
+                      </a:r>
+                    </a:p>
+                  </a:txBody>
+                  <a:tcPr anchor="ctr">
+                    <a:lnL>
+                      <a:noFill/>
+                    </a:lnL>
+                    <a:lnR>
+                      <a:noFill/>
+                    </a:lnR>
+                    <a:lnT>
+                      <a:noFill/>
+                    </a:lnT>
+                    <a:lnB>
+                      <a:noFill/>
+                    </a:lnB>
+                    <a:noFill/>
+                  </a:tcPr>
+                </a:tc>
+                <a:extLst>
+                  <a:ext uri="{0D108BD9-81ED-4DB2-BD59-A6C34878D82A}">
+                    <a16:rowId xmlns:a16="http://schemas.microsoft.com/office/drawing/2014/main" val="3111356935"/>
+                  </a:ext>
+                </a:extLst>
+              </a:tr>
+              <a:tr h="0">
+                <a:tc>
+                  <a:txBody>
+                    <a:bodyPr/>
+                    <a:lstStyle/>
+                    <a:p>
+                      <a:pPr>
+                        <a:buNone/>
+                      </a:pPr>
+                      <a:r>
+                        <a:rPr lang="en-US" b="1"/>
+                        <a:t>Auto-started by host</a:t>
+                      </a:r>
+                      <a:endParaRPr lang="en-US"/>
+                    </a:p>
+                  </a:txBody>
+                  <a:tcPr anchor="ctr">
+                    <a:lnL>
+                      <a:noFill/>
+                    </a:lnL>
+                    <a:lnR>
+                      <a:noFill/>
+                    </a:lnR>
+                    <a:lnT>
+                      <a:noFill/>
+                    </a:lnT>
+                    <a:lnB>
+                      <a:noFill/>
+                    </a:lnB>
+                    <a:noFill/>
+                  </a:tcPr>
+                </a:tc>
+                <a:tc>
+                  <a:txBody>
+                    <a:bodyPr/>
+                    <a:lstStyle/>
+                    <a:p>
+                      <a:pPr>
+                        <a:buNone/>
+                      </a:pPr>
+                      <a:r>
+                        <a:rPr lang="en-US"/>
+                        <a:t>✅ Yes</a:t>
+                      </a:r>
+                    </a:p>
+                  </a:txBody>
+                  <a:tcPr anchor="ctr">
+                    <a:lnL>
+                      <a:noFill/>
+                    </a:lnL>
+                    <a:lnR>
+                      <a:noFill/>
+                    </a:lnR>
+                    <a:lnT>
+                      <a:noFill/>
+                    </a:lnT>
+                    <a:lnB>
+                      <a:noFill/>
+                    </a:lnB>
+                    <a:noFill/>
+                  </a:tcPr>
+                </a:tc>
+                <a:tc>
+                  <a:txBody>
+                    <a:bodyPr/>
+                    <a:lstStyle/>
+                    <a:p>
+                      <a:pPr>
+                        <a:buNone/>
+                      </a:pPr>
+                      <a:r>
+                        <a:rPr lang="en-US"/>
+                        <a:t>❌ No</a:t>
+                      </a:r>
+                    </a:p>
+                  </a:txBody>
+                  <a:tcPr anchor="ctr">
+                    <a:lnL>
+                      <a:noFill/>
+                    </a:lnL>
+                    <a:lnR>
+                      <a:noFill/>
+                    </a:lnR>
+                    <a:lnT>
+                      <a:noFill/>
+                    </a:lnT>
+                    <a:lnB>
+                      <a:noFill/>
+                    </a:lnB>
+                    <a:noFill/>
+                  </a:tcPr>
+                </a:tc>
+                <a:extLst>
+                  <a:ext uri="{0D108BD9-81ED-4DB2-BD59-A6C34878D82A}">
+                    <a16:rowId xmlns:a16="http://schemas.microsoft.com/office/drawing/2014/main" val="2487833997"/>
+                  </a:ext>
+                </a:extLst>
+              </a:tr>
+              <a:tr h="0">
+                <a:tc>
+                  <a:txBody>
+                    <a:bodyPr/>
+                    <a:lstStyle/>
+                    <a:p>
+                      <a:pPr>
+                        <a:buNone/>
+                      </a:pPr>
+                      <a:r>
+                        <a:rPr lang="en-US" b="1">
+                          <a:latin typeface="Courier New" panose="02070309020205020404" pitchFamily="49" charset="0"/>
+                        </a:rPr>
+                        <a:t>ExecuteAsync</a:t>
+                      </a:r>
+                      <a:r>
+                        <a:rPr lang="en-US" b="1"/>
+                        <a:t> runs</a:t>
+                      </a:r>
+                      <a:endParaRPr lang="en-US"/>
+                    </a:p>
+                  </a:txBody>
+                  <a:tcPr anchor="ctr">
+                    <a:lnL>
+                      <a:noFill/>
+                    </a:lnL>
+                    <a:lnR>
+                      <a:noFill/>
+                    </a:lnR>
+                    <a:lnT>
+                      <a:noFill/>
+                    </a:lnT>
+                    <a:lnB>
+                      <a:noFill/>
+                    </a:lnB>
+                    <a:noFill/>
+                  </a:tcPr>
+                </a:tc>
+                <a:tc>
+                  <a:txBody>
+                    <a:bodyPr/>
+                    <a:lstStyle/>
+                    <a:p>
+                      <a:pPr>
+                        <a:buNone/>
+                      </a:pPr>
+                      <a:r>
+                        <a:rPr lang="en-US"/>
+                        <a:t>✅ Yes</a:t>
+                      </a:r>
+                    </a:p>
+                  </a:txBody>
+                  <a:tcPr anchor="ctr">
+                    <a:lnL>
+                      <a:noFill/>
+                    </a:lnL>
+                    <a:lnR>
+                      <a:noFill/>
+                    </a:lnR>
+                    <a:lnT>
+                      <a:noFill/>
+                    </a:lnT>
+                    <a:lnB>
+                      <a:noFill/>
+                    </a:lnB>
+                    <a:noFill/>
+                  </a:tcPr>
+                </a:tc>
+                <a:tc>
+                  <a:txBody>
+                    <a:bodyPr/>
+                    <a:lstStyle/>
+                    <a:p>
+                      <a:pPr>
+                        <a:buNone/>
+                      </a:pPr>
+                      <a:r>
+                        <a:rPr lang="en-US"/>
+                        <a:t>❌ No</a:t>
+                      </a:r>
+                    </a:p>
+                  </a:txBody>
+                  <a:tcPr anchor="ctr">
+                    <a:lnL>
+                      <a:noFill/>
+                    </a:lnL>
+                    <a:lnR>
+                      <a:noFill/>
+                    </a:lnR>
+                    <a:lnT>
+                      <a:noFill/>
+                    </a:lnT>
+                    <a:lnB>
+                      <a:noFill/>
+                    </a:lnB>
+                    <a:noFill/>
+                  </a:tcPr>
+                </a:tc>
+                <a:extLst>
+                  <a:ext uri="{0D108BD9-81ED-4DB2-BD59-A6C34878D82A}">
+                    <a16:rowId xmlns:a16="http://schemas.microsoft.com/office/drawing/2014/main" val="387986355"/>
+                  </a:ext>
+                </a:extLst>
+              </a:tr>
+              <a:tr h="0">
+                <a:tc>
+                  <a:txBody>
+                    <a:bodyPr/>
+                    <a:lstStyle/>
+                    <a:p>
+                      <a:pPr>
+                        <a:buNone/>
+                      </a:pPr>
+                      <a:r>
+                        <a:rPr lang="en-US" b="1"/>
+                        <a:t>Graceful shutdown</a:t>
+                      </a:r>
+                      <a:endParaRPr lang="en-US"/>
+                    </a:p>
+                  </a:txBody>
+                  <a:tcPr anchor="ctr">
+                    <a:lnL>
+                      <a:noFill/>
+                    </a:lnL>
+                    <a:lnR>
+                      <a:noFill/>
+                    </a:lnR>
+                    <a:lnT>
+                      <a:noFill/>
+                    </a:lnT>
+                    <a:lnB>
+                      <a:noFill/>
+                    </a:lnB>
+                    <a:noFill/>
+                  </a:tcPr>
+                </a:tc>
+                <a:tc>
+                  <a:txBody>
+                    <a:bodyPr/>
+                    <a:lstStyle/>
+                    <a:p>
+                      <a:pPr>
+                        <a:buNone/>
+                      </a:pPr>
+                      <a:r>
+                        <a:rPr lang="en-US"/>
+                        <a:t>✅ </a:t>
+                      </a:r>
+                      <a:r>
+                        <a:rPr lang="en-US">
+                          <a:latin typeface="Courier New" panose="02070309020205020404" pitchFamily="49" charset="0"/>
+                        </a:rPr>
+                        <a:t>StopAsync()</a:t>
+                      </a:r>
+                      <a:r>
+                        <a:rPr lang="en-US"/>
+                        <a:t> called</a:t>
+                      </a:r>
+                    </a:p>
+                  </a:txBody>
+                  <a:tcPr anchor="ctr">
+                    <a:lnL>
+                      <a:noFill/>
+                    </a:lnL>
+                    <a:lnR>
+                      <a:noFill/>
+                    </a:lnR>
+                    <a:lnT>
+                      <a:noFill/>
+                    </a:lnT>
+                    <a:lnB>
+                      <a:noFill/>
+                    </a:lnB>
+                    <a:noFill/>
+                  </a:tcPr>
+                </a:tc>
+                <a:tc>
+                  <a:txBody>
+                    <a:bodyPr/>
+                    <a:lstStyle/>
+                    <a:p>
+                      <a:pPr>
+                        <a:buNone/>
+                      </a:pPr>
+                      <a:r>
+                        <a:rPr lang="en-US"/>
+                        <a:t>❌ Never called</a:t>
+                      </a:r>
+                    </a:p>
+                  </a:txBody>
+                  <a:tcPr anchor="ctr">
+                    <a:lnL>
+                      <a:noFill/>
+                    </a:lnL>
+                    <a:lnR>
+                      <a:noFill/>
+                    </a:lnR>
+                    <a:lnT>
+                      <a:noFill/>
+                    </a:lnT>
+                    <a:lnB>
+                      <a:noFill/>
+                    </a:lnB>
+                    <a:noFill/>
+                  </a:tcPr>
+                </a:tc>
+                <a:extLst>
+                  <a:ext uri="{0D108BD9-81ED-4DB2-BD59-A6C34878D82A}">
+                    <a16:rowId xmlns:a16="http://schemas.microsoft.com/office/drawing/2014/main" val="4161586960"/>
+                  </a:ext>
+                </a:extLst>
+              </a:tr>
+              <a:tr h="0">
+                <a:tc>
+                  <a:txBody>
+                    <a:bodyPr/>
+                    <a:lstStyle/>
+                    <a:p>
+                      <a:pPr>
+                        <a:buNone/>
+                      </a:pPr>
+                      <a:r>
+                        <a:rPr lang="en-US" b="1"/>
+                        <a:t>Cancellation on stop</a:t>
+                      </a:r>
+                      <a:endParaRPr lang="en-US"/>
+                    </a:p>
+                  </a:txBody>
+                  <a:tcPr anchor="ctr">
+                    <a:lnL>
+                      <a:noFill/>
+                    </a:lnL>
+                    <a:lnR>
+                      <a:noFill/>
+                    </a:lnR>
+                    <a:lnT>
+                      <a:noFill/>
+                    </a:lnT>
+                    <a:lnB>
+                      <a:noFill/>
+                    </a:lnB>
+                    <a:noFill/>
+                  </a:tcPr>
+                </a:tc>
+                <a:tc>
+                  <a:txBody>
+                    <a:bodyPr/>
+                    <a:lstStyle/>
+                    <a:p>
+                      <a:pPr>
+                        <a:buNone/>
+                      </a:pPr>
+                      <a:r>
+                        <a:rPr lang="en-US"/>
+                        <a:t>✅ </a:t>
+                      </a:r>
+                      <a:r>
+                        <a:rPr lang="en-US">
+                          <a:latin typeface="Courier New" panose="02070309020205020404" pitchFamily="49" charset="0"/>
+                        </a:rPr>
+                        <a:t>stoppingToken</a:t>
+                      </a:r>
+                      <a:r>
+                        <a:rPr lang="en-US"/>
+                        <a:t> cancelled</a:t>
+                      </a:r>
+                    </a:p>
+                  </a:txBody>
+                  <a:tcPr anchor="ctr">
+                    <a:lnL>
+                      <a:noFill/>
+                    </a:lnL>
+                    <a:lnR>
+                      <a:noFill/>
+                    </a:lnR>
+                    <a:lnT>
+                      <a:noFill/>
+                    </a:lnT>
+                    <a:lnB>
+                      <a:noFill/>
+                    </a:lnB>
+                    <a:noFill/>
+                  </a:tcPr>
+                </a:tc>
+                <a:tc>
+                  <a:txBody>
+                    <a:bodyPr/>
+                    <a:lstStyle/>
+                    <a:p>
+                      <a:pPr>
+                        <a:buNone/>
+                      </a:pPr>
+                      <a:r>
+                        <a:rPr lang="en-US"/>
+                        <a:t>❌ No token</a:t>
+                      </a:r>
+                    </a:p>
+                  </a:txBody>
+                  <a:tcPr anchor="ctr">
+                    <a:lnL>
+                      <a:noFill/>
+                    </a:lnL>
+                    <a:lnR>
+                      <a:noFill/>
+                    </a:lnR>
+                    <a:lnT>
+                      <a:noFill/>
+                    </a:lnT>
+                    <a:lnB>
+                      <a:noFill/>
+                    </a:lnB>
+                    <a:noFill/>
+                  </a:tcPr>
+                </a:tc>
+                <a:extLst>
+                  <a:ext uri="{0D108BD9-81ED-4DB2-BD59-A6C34878D82A}">
+                    <a16:rowId xmlns:a16="http://schemas.microsoft.com/office/drawing/2014/main" val="2981845120"/>
+                  </a:ext>
+                </a:extLst>
+              </a:tr>
+              <a:tr h="0">
+                <a:tc>
+                  <a:txBody>
+                    <a:bodyPr/>
+                    <a:lstStyle/>
+                    <a:p>
+                      <a:pPr>
+                        <a:buNone/>
+                      </a:pPr>
+                      <a:r>
+                        <a:rPr lang="en-US" b="1"/>
+                        <a:t>Resolvable from DI</a:t>
+                      </a:r>
+                      <a:endParaRPr lang="en-US"/>
+                    </a:p>
+                  </a:txBody>
+                  <a:tcPr anchor="ctr">
+                    <a:lnL>
+                      <a:noFill/>
+                    </a:lnL>
+                    <a:lnR>
+                      <a:noFill/>
+                    </a:lnR>
+                    <a:lnT>
+                      <a:noFill/>
+                    </a:lnT>
+                    <a:lnB>
+                      <a:noFill/>
+                    </a:lnB>
+                    <a:noFill/>
+                  </a:tcPr>
+                </a:tc>
+                <a:tc>
+                  <a:txBody>
+                    <a:bodyPr/>
+                    <a:lstStyle/>
+                    <a:p>
+                      <a:pPr>
+                        <a:buNone/>
+                      </a:pPr>
+                      <a:r>
+                        <a:rPr lang="en-US"/>
+                        <a:t>⚠️ Only as </a:t>
+                      </a:r>
+                      <a:r>
+                        <a:rPr lang="en-US">
+                          <a:latin typeface="Courier New" panose="02070309020205020404" pitchFamily="49" charset="0"/>
+                        </a:rPr>
+                        <a:t>IHostedService</a:t>
+                      </a:r>
+                      <a:endParaRPr lang="en-US"/>
+                    </a:p>
+                  </a:txBody>
+                  <a:tcPr anchor="ctr">
+                    <a:lnL>
+                      <a:noFill/>
+                    </a:lnL>
+                    <a:lnR>
+                      <a:noFill/>
+                    </a:lnR>
+                    <a:lnT>
+                      <a:noFill/>
+                    </a:lnT>
+                    <a:lnB>
+                      <a:noFill/>
+                    </a:lnB>
+                    <a:noFill/>
+                  </a:tcPr>
+                </a:tc>
+                <a:tc>
+                  <a:txBody>
+                    <a:bodyPr/>
+                    <a:lstStyle/>
+                    <a:p>
+                      <a:pPr>
+                        <a:buNone/>
+                      </a:pPr>
+                      <a:r>
+                        <a:rPr lang="en-US" dirty="0"/>
+                        <a:t>✅ As itself</a:t>
+                      </a:r>
+                    </a:p>
+                  </a:txBody>
+                  <a:tcPr anchor="ctr">
+                    <a:lnL>
+                      <a:noFill/>
+                    </a:lnL>
+                    <a:lnR>
+                      <a:noFill/>
+                    </a:lnR>
+                    <a:lnT>
+                      <a:noFill/>
+                    </a:lnT>
+                    <a:lnB>
+                      <a:noFill/>
+                    </a:lnB>
+                    <a:noFill/>
+                  </a:tcPr>
+                </a:tc>
+                <a:extLst>
+                  <a:ext uri="{0D108BD9-81ED-4DB2-BD59-A6C34878D82A}">
+                    <a16:rowId xmlns:a16="http://schemas.microsoft.com/office/drawing/2014/main" val="1910005098"/>
+                  </a:ext>
+                </a:extLst>
+              </a:tr>
+            </a:tbl>
+          </a:graphicData>
+        </a:graphic>
+      </p:graphicFrame>
+    </p:spTree>
+    <p:extLst>
+      <p:ext uri="{BB962C8B-B14F-4D97-AF65-F5344CB8AC3E}">
+        <p14:creationId xmlns:p14="http://schemas.microsoft.com/office/powerpoint/2010/main" val="2742048838"/>
+      </p:ext>
+    </p:extLst>
+  </p:cSld>
+  <p:clrMapOvr>
+    <a:masterClrMapping/>
+  </p:clrMapOvr>
+</p:sld>
+</file>
+
+<file path=ppt/slides/slide31.xml><?xml version="1.0" encoding="utf-8"?>
+<p:sld xmlns:a="http://schemas.openxmlformats.org/drawingml/2006/main" xmlns:r="http://schemas.openxmlformats.org/officeDocument/2006/relationships" xmlns:p="http://schemas.openxmlformats.org/presentationml/2006/main">
+  <p:cSld>
+    <p:spTree>
+      <p:nvGrpSpPr>
+        <p:cNvPr id="1" name=""/>
+        <p:cNvGrpSpPr/>
+        <p:nvPr/>
+      </p:nvGrpSpPr>
+      <p:grpSpPr>
+        <a:xfrm>
+          <a:off x="0" y="0"/>
+          <a:ext cx="0" cy="0"/>
+          <a:chOff x="0" y="0"/>
+          <a:chExt cx="0" cy="0"/>
+        </a:xfrm>
+      </p:grpSpPr>
+      <p:sp>
+        <p:nvSpPr>
+          <p:cNvPr id="6" name="TextBox 5">
+            <a:extLst>
+              <a:ext uri="{FF2B5EF4-FFF2-40B4-BE49-F238E27FC236}">
+                <a16:creationId xmlns:a16="http://schemas.microsoft.com/office/drawing/2014/main" id="{3F502B9A-7F0D-F54D-C6B9-4F0AAD561585}"/>
+              </a:ext>
+            </a:extLst>
+          </p:cNvPr>
+          <p:cNvSpPr txBox="1"/>
+          <p:nvPr/>
+        </p:nvSpPr>
+        <p:spPr>
+          <a:xfrm>
+            <a:off x="6358757" y="769530"/>
+            <a:ext cx="6096000" cy="307777"/>
+          </a:xfrm>
+          <a:prstGeom prst="rect">
+            <a:avLst/>
+          </a:prstGeom>
+          <a:noFill/>
+        </p:spPr>
+        <p:txBody>
+          <a:bodyPr wrap="square">
+            <a:spAutoFit/>
+          </a:bodyPr>
+          <a:lstStyle/>
+          <a:p>
+            <a:r>
+              <a:rPr lang="en-US" sz="1400" b="1" dirty="0" err="1"/>
+              <a:t>AddHostedService</a:t>
+            </a:r>
+            <a:r>
+              <a:rPr lang="en-US" sz="1400" b="1" dirty="0"/>
+              <a:t>&lt;T&gt;  =  </a:t>
+            </a:r>
+            <a:r>
+              <a:rPr lang="en-US" sz="1400" b="1" dirty="0" err="1"/>
+              <a:t>AddSingleton</a:t>
+            </a:r>
+            <a:r>
+              <a:rPr lang="en-US" sz="1400" b="1" dirty="0"/>
+              <a:t>&lt;</a:t>
+            </a:r>
+            <a:r>
+              <a:rPr lang="en-US" sz="1400" b="1" dirty="0" err="1"/>
+              <a:t>IHostedService</a:t>
+            </a:r>
+            <a:r>
+              <a:rPr lang="en-US" sz="1400" b="1" dirty="0"/>
+              <a:t>, T&gt;</a:t>
+            </a:r>
+          </a:p>
+        </p:txBody>
+      </p:sp>
+      <p:sp>
+        <p:nvSpPr>
+          <p:cNvPr id="8" name="TextBox 7">
+            <a:extLst>
+              <a:ext uri="{FF2B5EF4-FFF2-40B4-BE49-F238E27FC236}">
+                <a16:creationId xmlns:a16="http://schemas.microsoft.com/office/drawing/2014/main" id="{FCB35F43-4CA2-1CEE-F18E-D0D211AD9BDC}"/>
+              </a:ext>
+            </a:extLst>
+          </p:cNvPr>
+          <p:cNvSpPr txBox="1"/>
+          <p:nvPr/>
+        </p:nvSpPr>
+        <p:spPr>
+          <a:xfrm>
+            <a:off x="6358757" y="197404"/>
+            <a:ext cx="6096000" cy="523220"/>
+          </a:xfrm>
+          <a:prstGeom prst="rect">
+            <a:avLst/>
+          </a:prstGeom>
+          <a:noFill/>
+        </p:spPr>
+        <p:txBody>
+          <a:bodyPr wrap="square">
+            <a:spAutoFit/>
+          </a:bodyPr>
+          <a:lstStyle/>
+          <a:p>
+            <a:pPr>
+              <a:buNone/>
+            </a:pPr>
+            <a:r>
+              <a:rPr lang="en-AU" sz="1400" b="1" dirty="0" err="1">
+                <a:latin typeface="Courier New" panose="02070309020205020404" pitchFamily="49" charset="0"/>
+              </a:rPr>
+              <a:t>AddHostedService</a:t>
+            </a:r>
+            <a:endParaRPr lang="en-AU" sz="1400" b="1" dirty="0"/>
+          </a:p>
+          <a:p>
+            <a:pPr>
+              <a:buNone/>
+            </a:pPr>
+            <a:r>
+              <a:rPr lang="en-AU" sz="1400" dirty="0"/>
+              <a:t>Registers the service as </a:t>
+            </a:r>
+            <a:r>
+              <a:rPr lang="en-AU" sz="1400" b="1" dirty="0"/>
+              <a:t>both</a:t>
+            </a:r>
+            <a:r>
+              <a:rPr lang="en-AU" sz="1400" dirty="0"/>
+              <a:t> a Singleton </a:t>
+            </a:r>
+            <a:r>
+              <a:rPr lang="en-AU" sz="1400" b="1" dirty="0"/>
+              <a:t>and</a:t>
+            </a:r>
+            <a:r>
+              <a:rPr lang="en-AU" sz="1400" dirty="0"/>
+              <a:t> an </a:t>
+            </a:r>
+            <a:r>
+              <a:rPr lang="en-AU" sz="1400" dirty="0" err="1">
+                <a:latin typeface="Courier New" panose="02070309020205020404" pitchFamily="49" charset="0"/>
+              </a:rPr>
+              <a:t>IHostedService</a:t>
+            </a:r>
+            <a:r>
+              <a:rPr lang="en-AU" sz="1400" dirty="0"/>
+              <a:t>:</a:t>
+            </a:r>
+          </a:p>
+        </p:txBody>
+      </p:sp>
+      <p:sp>
+        <p:nvSpPr>
+          <p:cNvPr id="10" name="TextBox 9">
+            <a:extLst>
+              <a:ext uri="{FF2B5EF4-FFF2-40B4-BE49-F238E27FC236}">
+                <a16:creationId xmlns:a16="http://schemas.microsoft.com/office/drawing/2014/main" id="{9F5BBC43-9975-269F-4497-223C9DE03D8B}"/>
+              </a:ext>
+            </a:extLst>
+          </p:cNvPr>
+          <p:cNvSpPr txBox="1"/>
+          <p:nvPr/>
+        </p:nvSpPr>
+        <p:spPr>
+          <a:xfrm>
+            <a:off x="6096000" y="1874204"/>
+            <a:ext cx="6096000" cy="3693319"/>
+          </a:xfrm>
+          <a:prstGeom prst="rect">
+            <a:avLst/>
+          </a:prstGeom>
+          <a:noFill/>
+        </p:spPr>
+        <p:txBody>
+          <a:bodyPr wrap="square">
+            <a:spAutoFit/>
+          </a:bodyPr>
+          <a:lstStyle/>
+          <a:p>
+            <a:r>
+              <a:rPr lang="en-US" dirty="0"/>
+              <a:t>App Startup</a:t>
+            </a:r>
+          </a:p>
+          <a:p>
+            <a:r>
+              <a:rPr lang="en-US" dirty="0"/>
+              <a:t>├── Host resolves all </a:t>
+            </a:r>
+            <a:r>
+              <a:rPr lang="en-US" dirty="0" err="1"/>
+              <a:t>IHostedService</a:t>
+            </a:r>
+            <a:r>
+              <a:rPr lang="en-US" dirty="0"/>
+              <a:t> registrations</a:t>
+            </a:r>
+          </a:p>
+          <a:p>
+            <a:r>
+              <a:rPr lang="en-US" dirty="0"/>
+              <a:t>├── Calls </a:t>
+            </a:r>
+            <a:r>
+              <a:rPr lang="en-US" dirty="0" err="1"/>
+              <a:t>StartAsync</a:t>
+            </a:r>
+            <a:r>
+              <a:rPr lang="en-US" dirty="0"/>
+              <a:t>() on each one        ← your </a:t>
+            </a:r>
+            <a:r>
+              <a:rPr lang="en-US" dirty="0" err="1"/>
+              <a:t>ExecuteAsync</a:t>
+            </a:r>
+            <a:r>
+              <a:rPr lang="en-US" dirty="0"/>
+              <a:t> begins</a:t>
+            </a:r>
+          </a:p>
+          <a:p>
+            <a:r>
+              <a:rPr lang="en-US" dirty="0"/>
+              <a:t>│</a:t>
+            </a:r>
+          </a:p>
+          <a:p>
+            <a:r>
+              <a:rPr lang="en-US" dirty="0"/>
+              <a:t>App Running</a:t>
+            </a:r>
+          </a:p>
+          <a:p>
+            <a:r>
+              <a:rPr lang="en-US" dirty="0"/>
+              <a:t>├── Your timer/loop runs in background</a:t>
+            </a:r>
+          </a:p>
+          <a:p>
+            <a:r>
+              <a:rPr lang="en-US" dirty="0"/>
+              <a:t>│</a:t>
+            </a:r>
+          </a:p>
+          <a:p>
+            <a:r>
+              <a:rPr lang="en-US" dirty="0"/>
+              <a:t>App Shutdown (</a:t>
+            </a:r>
+            <a:r>
+              <a:rPr lang="en-US" dirty="0" err="1"/>
+              <a:t>Ctrl+C</a:t>
+            </a:r>
+            <a:r>
+              <a:rPr lang="en-US" dirty="0"/>
+              <a:t> / SIGTERM)</a:t>
+            </a:r>
+          </a:p>
+          <a:p>
+            <a:r>
+              <a:rPr lang="en-US" dirty="0"/>
+              <a:t>├── Host calls </a:t>
+            </a:r>
+            <a:r>
+              <a:rPr lang="en-US" dirty="0" err="1"/>
+              <a:t>StopAsync</a:t>
+            </a:r>
+            <a:r>
+              <a:rPr lang="en-US" dirty="0"/>
+              <a:t>() on each one    ← </a:t>
+            </a:r>
+            <a:r>
+              <a:rPr lang="en-US" dirty="0" err="1"/>
+              <a:t>CancellationToken</a:t>
+            </a:r>
+            <a:r>
+              <a:rPr lang="en-US" dirty="0"/>
+              <a:t> is cancelled</a:t>
+            </a:r>
+          </a:p>
+          <a:p>
+            <a:r>
+              <a:rPr lang="en-US" dirty="0"/>
+              <a:t>├── Waits for graceful shutdown</a:t>
+            </a:r>
+          </a:p>
+          <a:p>
+            <a:r>
+              <a:rPr lang="en-US" dirty="0"/>
+              <a:t>└── Then disposes</a:t>
+            </a:r>
+          </a:p>
+        </p:txBody>
+      </p:sp>
+      <p:sp>
+        <p:nvSpPr>
+          <p:cNvPr id="12" name="TextBox 11">
+            <a:extLst>
+              <a:ext uri="{FF2B5EF4-FFF2-40B4-BE49-F238E27FC236}">
+                <a16:creationId xmlns:a16="http://schemas.microsoft.com/office/drawing/2014/main" id="{1F42C3C3-F0BA-1488-9724-816D2B11A8AE}"/>
+              </a:ext>
+            </a:extLst>
+          </p:cNvPr>
+          <p:cNvSpPr txBox="1"/>
+          <p:nvPr/>
+        </p:nvSpPr>
+        <p:spPr>
+          <a:xfrm>
+            <a:off x="94593" y="1874204"/>
+            <a:ext cx="6264164" cy="3139321"/>
+          </a:xfrm>
+          <a:prstGeom prst="rect">
+            <a:avLst/>
+          </a:prstGeom>
+          <a:noFill/>
+        </p:spPr>
+        <p:txBody>
+          <a:bodyPr wrap="square">
+            <a:spAutoFit/>
+          </a:bodyPr>
+          <a:lstStyle/>
+          <a:p>
+            <a:r>
+              <a:rPr lang="en-US" dirty="0"/>
+              <a:t>App Startup</a:t>
+            </a:r>
+          </a:p>
+          <a:p>
+            <a:r>
+              <a:rPr lang="en-US" dirty="0"/>
+              <a:t>├── </a:t>
+            </a:r>
+            <a:r>
+              <a:rPr lang="en-US" dirty="0" err="1"/>
+              <a:t>CacheWarmingService</a:t>
+            </a:r>
+            <a:r>
+              <a:rPr lang="en-US" dirty="0"/>
+              <a:t> is NOT started automatically</a:t>
+            </a:r>
+          </a:p>
+          <a:p>
+            <a:r>
+              <a:rPr lang="en-US" dirty="0"/>
+              <a:t>├── Nothing calls </a:t>
+            </a:r>
+            <a:r>
+              <a:rPr lang="en-US" dirty="0" err="1"/>
+              <a:t>StartAsync</a:t>
+            </a:r>
+            <a:r>
+              <a:rPr lang="en-US" dirty="0"/>
+              <a:t>() / </a:t>
+            </a:r>
+            <a:r>
+              <a:rPr lang="en-US" dirty="0" err="1"/>
+              <a:t>ExecuteAsync</a:t>
+            </a:r>
+            <a:r>
+              <a:rPr lang="en-US" dirty="0"/>
+              <a:t>()</a:t>
+            </a:r>
+          </a:p>
+          <a:p>
+            <a:r>
+              <a:rPr lang="en-US" dirty="0"/>
+              <a:t>│</a:t>
+            </a:r>
+          </a:p>
+          <a:p>
+            <a:r>
+              <a:rPr lang="en-US" dirty="0"/>
+              <a:t>App Running</a:t>
+            </a:r>
+          </a:p>
+          <a:p>
+            <a:r>
+              <a:rPr lang="en-US" dirty="0"/>
+              <a:t>├── Service only exists if something resolves it from DI</a:t>
+            </a:r>
+          </a:p>
+          <a:p>
+            <a:r>
+              <a:rPr lang="en-US" dirty="0"/>
+              <a:t>├── Your background loop never runs ❌</a:t>
+            </a:r>
+          </a:p>
+          <a:p>
+            <a:r>
+              <a:rPr lang="en-US" dirty="0"/>
+              <a:t>│</a:t>
+            </a:r>
+          </a:p>
+          <a:p>
+            <a:r>
+              <a:rPr lang="en-US" dirty="0"/>
+              <a:t>App Shutdown</a:t>
+            </a:r>
+          </a:p>
+          <a:p>
+            <a:r>
+              <a:rPr lang="en-US" dirty="0"/>
+              <a:t>├── </a:t>
+            </a:r>
+            <a:r>
+              <a:rPr lang="en-US" dirty="0" err="1"/>
+              <a:t>StopAsync</a:t>
+            </a:r>
+            <a:r>
+              <a:rPr lang="en-US" dirty="0"/>
+              <a:t>() is never called</a:t>
+            </a:r>
+          </a:p>
+          <a:p>
+            <a:r>
+              <a:rPr lang="en-US" dirty="0"/>
+              <a:t>├── No graceful shutdown ❌</a:t>
+            </a:r>
+          </a:p>
+        </p:txBody>
+      </p:sp>
+      <p:sp>
+        <p:nvSpPr>
+          <p:cNvPr id="4" name="TextBox 3">
+            <a:extLst>
+              <a:ext uri="{FF2B5EF4-FFF2-40B4-BE49-F238E27FC236}">
+                <a16:creationId xmlns:a16="http://schemas.microsoft.com/office/drawing/2014/main" id="{2BC21CD3-2EA7-4B5E-873B-0CA2FFF9207B}"/>
+              </a:ext>
+            </a:extLst>
+          </p:cNvPr>
+          <p:cNvSpPr txBox="1"/>
+          <p:nvPr/>
+        </p:nvSpPr>
+        <p:spPr>
+          <a:xfrm>
+            <a:off x="94593" y="258844"/>
+            <a:ext cx="6096000" cy="1600438"/>
+          </a:xfrm>
+          <a:prstGeom prst="rect">
+            <a:avLst/>
+          </a:prstGeom>
+          <a:noFill/>
+        </p:spPr>
+        <p:txBody>
+          <a:bodyPr wrap="square">
+            <a:spAutoFit/>
+          </a:bodyPr>
+          <a:lstStyle/>
+          <a:p>
+            <a:r>
+              <a:rPr lang="en-US" sz="1400" b="1" dirty="0"/>
+              <a:t>They Are Not The Same!</a:t>
+            </a:r>
+          </a:p>
+          <a:p>
+            <a:endParaRPr lang="en-US" sz="1400" dirty="0"/>
+          </a:p>
+          <a:p>
+            <a:r>
+              <a:rPr lang="en-US" sz="1400" dirty="0"/>
+              <a:t>// Option A</a:t>
+            </a:r>
+          </a:p>
+          <a:p>
+            <a:r>
+              <a:rPr lang="en-US" sz="1400" dirty="0" err="1"/>
+              <a:t>builder.Services.</a:t>
+            </a:r>
+            <a:r>
+              <a:rPr lang="en-US" sz="1400" b="1" dirty="0" err="1"/>
+              <a:t>AddHostedService</a:t>
+            </a:r>
+            <a:r>
+              <a:rPr lang="en-US" sz="1400" dirty="0"/>
+              <a:t>&lt;</a:t>
+            </a:r>
+            <a:r>
+              <a:rPr lang="en-US" sz="1400" dirty="0" err="1"/>
+              <a:t>CacheWarmingService</a:t>
+            </a:r>
+            <a:r>
+              <a:rPr lang="en-US" sz="1400" dirty="0"/>
+              <a:t>&gt;();</a:t>
+            </a:r>
+          </a:p>
+          <a:p>
+            <a:endParaRPr lang="en-US" sz="1400" dirty="0"/>
+          </a:p>
+          <a:p>
+            <a:r>
+              <a:rPr lang="en-US" sz="1400" dirty="0"/>
+              <a:t>// Option B</a:t>
+            </a:r>
+          </a:p>
+          <a:p>
+            <a:r>
+              <a:rPr lang="en-US" sz="1400" dirty="0" err="1"/>
+              <a:t>builder.Services.</a:t>
+            </a:r>
+            <a:r>
+              <a:rPr lang="en-US" sz="1400" b="1" dirty="0" err="1"/>
+              <a:t>AddSingleton</a:t>
+            </a:r>
+            <a:r>
+              <a:rPr lang="en-US" sz="1400" dirty="0"/>
+              <a:t>&lt;</a:t>
+            </a:r>
+            <a:r>
+              <a:rPr lang="en-US" sz="1400" dirty="0" err="1"/>
+              <a:t>CacheWarmingService</a:t>
+            </a:r>
+            <a:r>
+              <a:rPr lang="en-US" sz="1400" dirty="0"/>
+              <a:t>&gt;();</a:t>
+            </a:r>
+          </a:p>
+        </p:txBody>
+      </p:sp>
+    </p:spTree>
+    <p:extLst>
+      <p:ext uri="{BB962C8B-B14F-4D97-AF65-F5344CB8AC3E}">
+        <p14:creationId xmlns:p14="http://schemas.microsoft.com/office/powerpoint/2010/main" val="1821879256"/>
+      </p:ext>
+    </p:extLst>
+  </p:cSld>
+  <p:clrMapOvr>
+    <a:masterClrMapping/>
+  </p:clrMapOvr>
+</p:sld>
+</file>
+
+<file path=ppt/slides/slide32.xml><?xml version="1.0" encoding="utf-8"?>
+<p:sld xmlns:a="http://schemas.openxmlformats.org/drawingml/2006/main" xmlns:r="http://schemas.openxmlformats.org/officeDocument/2006/relationships" xmlns:p="http://schemas.openxmlformats.org/presentationml/2006/main">
+  <p:cSld>
+    <p:spTree>
+      <p:nvGrpSpPr>
+        <p:cNvPr id="1" name=""/>
+        <p:cNvGrpSpPr/>
+        <p:nvPr/>
+      </p:nvGrpSpPr>
+      <p:grpSpPr>
+        <a:xfrm>
+          <a:off x="0" y="0"/>
+          <a:ext cx="0" cy="0"/>
+          <a:chOff x="0" y="0"/>
+          <a:chExt cx="0" cy="0"/>
+        </a:xfrm>
+      </p:grpSpPr>
+      <p:sp>
+        <p:nvSpPr>
+          <p:cNvPr id="3" name="TextBox 2">
+            <a:extLst>
+              <a:ext uri="{FF2B5EF4-FFF2-40B4-BE49-F238E27FC236}">
+                <a16:creationId xmlns:a16="http://schemas.microsoft.com/office/drawing/2014/main" id="{61DB5A47-5DFA-E547-D8A3-37005F91B208}"/>
+              </a:ext>
+            </a:extLst>
+          </p:cNvPr>
+          <p:cNvSpPr txBox="1"/>
+          <p:nvPr/>
+        </p:nvSpPr>
+        <p:spPr>
+          <a:xfrm>
+            <a:off x="220717" y="995827"/>
+            <a:ext cx="7683062" cy="738664"/>
+          </a:xfrm>
+          <a:prstGeom prst="rect">
+            <a:avLst/>
+          </a:prstGeom>
+          <a:noFill/>
+        </p:spPr>
+        <p:txBody>
+          <a:bodyPr wrap="square">
+            <a:spAutoFit/>
+          </a:bodyPr>
+          <a:lstStyle/>
+          <a:p>
+            <a:r>
+              <a:rPr lang="en-US" sz="1400" dirty="0" err="1"/>
+              <a:t>builder.Services.AddHostedService</a:t>
+            </a:r>
+            <a:r>
+              <a:rPr lang="en-US" sz="1400" dirty="0"/>
+              <a:t>&lt;</a:t>
+            </a:r>
+            <a:r>
+              <a:rPr lang="en-US" sz="1400" dirty="0" err="1"/>
+              <a:t>CacheWarmingService</a:t>
+            </a:r>
+            <a:r>
+              <a:rPr lang="en-US" sz="1400" dirty="0"/>
+              <a:t>&gt;();</a:t>
+            </a:r>
+          </a:p>
+          <a:p>
+            <a:r>
+              <a:rPr lang="en-US" sz="1400" dirty="0" err="1"/>
+              <a:t>builder.Services.AddHostedService</a:t>
+            </a:r>
+            <a:r>
+              <a:rPr lang="en-US" sz="1400" dirty="0"/>
+              <a:t>&lt;</a:t>
+            </a:r>
+            <a:r>
+              <a:rPr lang="en-US" sz="1400" dirty="0" err="1"/>
+              <a:t>EmailQueueService</a:t>
+            </a:r>
+            <a:r>
+              <a:rPr lang="en-US" sz="1400" dirty="0"/>
+              <a:t>&gt;();</a:t>
+            </a:r>
+          </a:p>
+          <a:p>
+            <a:r>
+              <a:rPr lang="en-US" sz="1400" dirty="0" err="1"/>
+              <a:t>builder.Services.AddHostedService</a:t>
+            </a:r>
+            <a:r>
+              <a:rPr lang="en-US" sz="1400" dirty="0"/>
+              <a:t>&lt;</a:t>
+            </a:r>
+            <a:r>
+              <a:rPr lang="en-US" sz="1400" dirty="0" err="1"/>
+              <a:t>ReportGeneratorService</a:t>
+            </a:r>
+            <a:r>
+              <a:rPr lang="en-US" sz="1400" dirty="0"/>
+              <a:t>&gt;();</a:t>
+            </a:r>
+          </a:p>
+        </p:txBody>
+      </p:sp>
+      <p:sp>
+        <p:nvSpPr>
+          <p:cNvPr id="5" name="TextBox 4">
+            <a:extLst>
+              <a:ext uri="{FF2B5EF4-FFF2-40B4-BE49-F238E27FC236}">
+                <a16:creationId xmlns:a16="http://schemas.microsoft.com/office/drawing/2014/main" id="{B6CB1295-DAD0-56F1-28ED-7D8C3CC82E05}"/>
+              </a:ext>
+            </a:extLst>
+          </p:cNvPr>
+          <p:cNvSpPr txBox="1"/>
+          <p:nvPr/>
+        </p:nvSpPr>
+        <p:spPr>
+          <a:xfrm>
+            <a:off x="4939860" y="2268653"/>
+            <a:ext cx="6096000" cy="738664"/>
+          </a:xfrm>
+          <a:prstGeom prst="rect">
+            <a:avLst/>
+          </a:prstGeom>
+          <a:noFill/>
+        </p:spPr>
+        <p:txBody>
+          <a:bodyPr wrap="square">
+            <a:spAutoFit/>
+          </a:bodyPr>
+          <a:lstStyle/>
+          <a:p>
+            <a:r>
+              <a:rPr lang="en-US" sz="1400" dirty="0" err="1"/>
+              <a:t>IHostedService</a:t>
+            </a:r>
+            <a:r>
+              <a:rPr lang="en-US" sz="1400" dirty="0"/>
+              <a:t>  →  </a:t>
+            </a:r>
+            <a:r>
+              <a:rPr lang="en-US" sz="1400" dirty="0" err="1"/>
+              <a:t>CacheWarmingService</a:t>
+            </a:r>
+            <a:endParaRPr lang="en-US" sz="1400" dirty="0"/>
+          </a:p>
+          <a:p>
+            <a:r>
+              <a:rPr lang="en-US" sz="1400" dirty="0" err="1"/>
+              <a:t>IHostedService</a:t>
+            </a:r>
+            <a:r>
+              <a:rPr lang="en-US" sz="1400" dirty="0"/>
+              <a:t>  →  </a:t>
+            </a:r>
+            <a:r>
+              <a:rPr lang="en-US" sz="1400" dirty="0" err="1"/>
+              <a:t>EmailQueueService</a:t>
+            </a:r>
+            <a:endParaRPr lang="en-US" sz="1400" dirty="0"/>
+          </a:p>
+          <a:p>
+            <a:r>
+              <a:rPr lang="en-US" sz="1400" dirty="0" err="1"/>
+              <a:t>IHostedService</a:t>
+            </a:r>
+            <a:r>
+              <a:rPr lang="en-US" sz="1400" dirty="0"/>
+              <a:t>  →  </a:t>
+            </a:r>
+            <a:r>
+              <a:rPr lang="en-US" sz="1400" dirty="0" err="1"/>
+              <a:t>ReportGeneratorService</a:t>
+            </a:r>
+            <a:endParaRPr lang="en-US" sz="1400" dirty="0"/>
+          </a:p>
+        </p:txBody>
+      </p:sp>
+      <p:sp>
+        <p:nvSpPr>
+          <p:cNvPr id="6" name="Rectangle 5">
+            <a:extLst>
+              <a:ext uri="{FF2B5EF4-FFF2-40B4-BE49-F238E27FC236}">
+                <a16:creationId xmlns:a16="http://schemas.microsoft.com/office/drawing/2014/main" id="{27CEFBBB-3B0B-748B-F49D-C7BF651A86D3}"/>
+              </a:ext>
+            </a:extLst>
+          </p:cNvPr>
+          <p:cNvSpPr>
+            <a:spLocks noChangeArrowheads="1"/>
+          </p:cNvSpPr>
+          <p:nvPr/>
+        </p:nvSpPr>
+        <p:spPr bwMode="auto">
+          <a:xfrm>
+            <a:off x="115613" y="0"/>
+            <a:ext cx="13510493" cy="646331"/>
+          </a:xfrm>
+          <a:prstGeom prst="rect">
+            <a:avLst/>
+          </a:prstGeom>
+          <a:noFill/>
+          <a:ln>
+            <a:noFill/>
+          </a:ln>
+          <a:effectLst/>
+          <a:extLst>
+            <a:ext uri="{909E8E84-426E-40DD-AFC4-6F175D3DCCD1}">
+              <a14:hiddenFill xmlns:a14="http://schemas.microsoft.com/office/drawing/2010/main">
+                <a:solidFill>
+                  <a:schemeClr val="accent1"/>
+                </a:solidFill>
+              </a14:hiddenFill>
+            </a:ext>
+            <a:ext uri="{91240B29-F687-4F45-9708-019B960494DF}">
+              <a14:hiddenLine xmlns:a14="http://schemas.microsoft.com/office/drawing/2010/main" w="9525">
+                <a:solidFill>
+                  <a:schemeClr val="tx1"/>
+                </a:solidFill>
+                <a:miter lim="800000"/>
+                <a:headEnd/>
+                <a:tailEnd/>
+              </a14:hiddenLine>
+            </a:ext>
+            <a:ext uri="{AF507438-7753-43E0-B8FC-AC1667EBCBE1}">
+              <a14:hiddenEffects xmlns:a14="http://schemas.microsoft.com/office/drawing/2010/main">
+                <a:effectLst>
+                  <a:outerShdw dist="35921" dir="2700000" algn="ctr" rotWithShape="0">
+                    <a:schemeClr val="bg2"/>
+                  </a:outerShdw>
+                </a:effectLst>
+              </a14:hiddenEffects>
+            </a:ext>
+          </a:extLst>
+        </p:spPr>
+        <p:txBody>
+          <a:bodyPr vert="horz" wrap="none" lIns="91440" tIns="45720" rIns="91440" bIns="45720" numCol="1" anchor="ctr" anchorCtr="0" compatLnSpc="1">
+            <a:prstTxWarp prst="textNoShape">
+              <a:avLst/>
+            </a:prstTxWarp>
+            <a:spAutoFit/>
+          </a:bodyPr>
+          <a:lstStyle/>
+          <a:p>
+            <a:pPr marL="0" marR="0" lvl="0" indent="0" algn="l" defTabSz="914400" rtl="0" eaLnBrk="0" fontAlgn="base" latinLnBrk="0" hangingPunct="0">
+              <a:lnSpc>
+                <a:spcPct val="100000"/>
+              </a:lnSpc>
+              <a:spcBef>
+                <a:spcPct val="0"/>
+              </a:spcBef>
+              <a:spcAft>
+                <a:spcPct val="0"/>
+              </a:spcAft>
+              <a:buClrTx/>
+              <a:buSzTx/>
+              <a:buFontTx/>
+              <a:buNone/>
+              <a:tabLst/>
+            </a:pPr>
+            <a:r>
+              <a:rPr kumimoji="0" lang="en-US" altLang="en-US" b="0" i="0" u="none" strike="noStrike" cap="none" normalizeH="0" baseline="0" dirty="0" err="1">
+                <a:ln>
+                  <a:noFill/>
+                </a:ln>
+                <a:solidFill>
+                  <a:schemeClr val="tx1"/>
+                </a:solidFill>
+                <a:effectLst/>
+                <a:latin typeface="Arial" panose="020B0604020202020204" pitchFamily="34" charset="0"/>
+              </a:rPr>
+              <a:t>app.Services.GetRequiredService</a:t>
+            </a:r>
+            <a:r>
+              <a:rPr kumimoji="0" lang="en-US" altLang="en-US" b="0" i="0" u="none" strike="noStrike" cap="none" normalizeH="0" baseline="0" dirty="0">
+                <a:ln>
+                  <a:noFill/>
+                </a:ln>
+                <a:solidFill>
+                  <a:schemeClr val="tx1"/>
+                </a:solidFill>
+                <a:effectLst/>
+                <a:latin typeface="Arial" panose="020B0604020202020204" pitchFamily="34" charset="0"/>
+              </a:rPr>
+              <a:t>&lt;</a:t>
+            </a:r>
+            <a:r>
+              <a:rPr kumimoji="0" lang="en-US" altLang="en-US" b="0" i="0" u="none" strike="noStrike" cap="none" normalizeH="0" baseline="0" dirty="0" err="1">
+                <a:ln>
+                  <a:noFill/>
+                </a:ln>
+                <a:solidFill>
+                  <a:schemeClr val="tx1"/>
+                </a:solidFill>
+                <a:effectLst/>
+                <a:latin typeface="Arial" panose="020B0604020202020204" pitchFamily="34" charset="0"/>
+              </a:rPr>
+              <a:t>IHostedService</a:t>
+            </a:r>
+            <a:r>
+              <a:rPr kumimoji="0" lang="en-US" altLang="en-US" b="0" i="0" u="none" strike="noStrike" cap="none" normalizeH="0" baseline="0" dirty="0">
+                <a:ln>
+                  <a:noFill/>
+                </a:ln>
+                <a:solidFill>
+                  <a:schemeClr val="tx1"/>
+                </a:solidFill>
+                <a:effectLst/>
+                <a:latin typeface="Arial" panose="020B0604020202020204" pitchFamily="34" charset="0"/>
+              </a:rPr>
+              <a:t>&gt;();</a:t>
+            </a:r>
+          </a:p>
+          <a:p>
+            <a:pPr marL="0" marR="0" lvl="0" indent="0" algn="l" defTabSz="914400" rtl="0" eaLnBrk="0" fontAlgn="base" latinLnBrk="0" hangingPunct="0">
+              <a:lnSpc>
+                <a:spcPct val="100000"/>
+              </a:lnSpc>
+              <a:spcBef>
+                <a:spcPct val="0"/>
+              </a:spcBef>
+              <a:spcAft>
+                <a:spcPct val="0"/>
+              </a:spcAft>
+              <a:buClrTx/>
+              <a:buSzTx/>
+              <a:buFontTx/>
+              <a:buNone/>
+              <a:tabLst/>
+            </a:pPr>
+            <a:r>
+              <a:rPr kumimoji="0" lang="en-US" altLang="en-US" b="0" i="0" u="none" strike="noStrike" cap="none" normalizeH="0" baseline="0" dirty="0">
+                <a:ln>
+                  <a:noFill/>
+                </a:ln>
+                <a:solidFill>
+                  <a:schemeClr val="tx1"/>
+                </a:solidFill>
+                <a:effectLst/>
+                <a:latin typeface="Arial" panose="020B0604020202020204" pitchFamily="34" charset="0"/>
+              </a:rPr>
+              <a:t>With multiple hosted services, </a:t>
+            </a:r>
+            <a:r>
+              <a:rPr kumimoji="0" lang="en-US" altLang="en-US" b="0" i="0" u="none" strike="noStrike" cap="none" normalizeH="0" baseline="0" dirty="0" err="1">
+                <a:ln>
+                  <a:noFill/>
+                </a:ln>
+                <a:solidFill>
+                  <a:schemeClr val="tx1"/>
+                </a:solidFill>
+                <a:effectLst/>
+                <a:latin typeface="Arial Unicode MS"/>
+              </a:rPr>
+              <a:t>GetRequiredService</a:t>
+            </a:r>
+            <a:r>
+              <a:rPr kumimoji="0" lang="en-US" altLang="en-US" b="0" i="0" u="none" strike="noStrike" cap="none" normalizeH="0" baseline="0" dirty="0">
+                <a:ln>
+                  <a:noFill/>
+                </a:ln>
+                <a:solidFill>
+                  <a:schemeClr val="tx1"/>
+                </a:solidFill>
+                <a:effectLst/>
+                <a:latin typeface="Arial Unicode MS"/>
+              </a:rPr>
+              <a:t>&lt;</a:t>
+            </a:r>
+            <a:r>
+              <a:rPr kumimoji="0" lang="en-US" altLang="en-US" b="0" i="0" u="none" strike="noStrike" cap="none" normalizeH="0" baseline="0" dirty="0" err="1">
+                <a:ln>
+                  <a:noFill/>
+                </a:ln>
+                <a:solidFill>
+                  <a:schemeClr val="tx1"/>
+                </a:solidFill>
+                <a:effectLst/>
+                <a:latin typeface="Arial Unicode MS"/>
+              </a:rPr>
+              <a:t>IHostedService</a:t>
+            </a:r>
+            <a:r>
+              <a:rPr kumimoji="0" lang="en-US" altLang="en-US" b="0" i="0" u="none" strike="noStrike" cap="none" normalizeH="0" baseline="0" dirty="0">
+                <a:ln>
+                  <a:noFill/>
+                </a:ln>
+                <a:solidFill>
+                  <a:schemeClr val="tx1"/>
+                </a:solidFill>
+                <a:effectLst/>
+                <a:latin typeface="Arial Unicode MS"/>
+              </a:rPr>
+              <a:t>&gt;()</a:t>
+            </a:r>
+            <a:r>
+              <a:rPr kumimoji="0" lang="en-US" altLang="en-US" b="0" i="0" u="none" strike="noStrike" cap="none" normalizeH="0" baseline="0" dirty="0">
+                <a:ln>
+                  <a:noFill/>
+                </a:ln>
+                <a:solidFill>
+                  <a:schemeClr val="tx1"/>
+                </a:solidFill>
+                <a:effectLst/>
+              </a:rPr>
+              <a:t> only returns </a:t>
+            </a:r>
+            <a:r>
+              <a:rPr kumimoji="0" lang="en-US" altLang="en-US" b="1" i="0" u="none" strike="noStrike" cap="none" normalizeH="0" baseline="0" dirty="0">
+                <a:ln>
+                  <a:noFill/>
+                </a:ln>
+                <a:solidFill>
+                  <a:schemeClr val="tx1"/>
+                </a:solidFill>
+                <a:effectLst/>
+                <a:latin typeface="Arial" panose="020B0604020202020204" pitchFamily="34" charset="0"/>
+              </a:rPr>
+              <a:t>one</a:t>
+            </a:r>
+            <a:r>
+              <a:rPr kumimoji="0" lang="en-US" altLang="en-US" b="0" i="0" u="none" strike="noStrike" cap="none" normalizeH="0" baseline="0" dirty="0">
+                <a:ln>
+                  <a:noFill/>
+                </a:ln>
+                <a:solidFill>
+                  <a:schemeClr val="tx1"/>
+                </a:solidFill>
+                <a:effectLst/>
+                <a:latin typeface="Arial" panose="020B0604020202020204" pitchFamily="34" charset="0"/>
+              </a:rPr>
+              <a:t> — the last registered. </a:t>
+            </a:r>
+            <a:r>
+              <a:rPr kumimoji="0" lang="en-US" altLang="en-US" b="1" i="0" u="none" strike="noStrike" cap="none" normalizeH="0" baseline="0" dirty="0">
+                <a:ln>
+                  <a:noFill/>
+                </a:ln>
+                <a:solidFill>
+                  <a:schemeClr val="tx1"/>
+                </a:solidFill>
+                <a:effectLst/>
+                <a:latin typeface="Arial" panose="020B0604020202020204" pitchFamily="34" charset="0"/>
+              </a:rPr>
+              <a:t>This is a real pitfall.</a:t>
+            </a:r>
+          </a:p>
+        </p:txBody>
+      </p:sp>
+      <p:sp>
+        <p:nvSpPr>
+          <p:cNvPr id="8" name="TextBox 7">
+            <a:extLst>
+              <a:ext uri="{FF2B5EF4-FFF2-40B4-BE49-F238E27FC236}">
+                <a16:creationId xmlns:a16="http://schemas.microsoft.com/office/drawing/2014/main" id="{C1DC4B6F-1503-D7A0-AD3E-66EFFE5E4A61}"/>
+              </a:ext>
+            </a:extLst>
+          </p:cNvPr>
+          <p:cNvSpPr txBox="1"/>
+          <p:nvPr/>
+        </p:nvSpPr>
+        <p:spPr>
+          <a:xfrm>
+            <a:off x="220717" y="1899321"/>
+            <a:ext cx="6810702" cy="369332"/>
+          </a:xfrm>
+          <a:prstGeom prst="rect">
+            <a:avLst/>
+          </a:prstGeom>
+          <a:noFill/>
+        </p:spPr>
+        <p:txBody>
+          <a:bodyPr wrap="square">
+            <a:spAutoFit/>
+          </a:bodyPr>
+          <a:lstStyle/>
+          <a:p>
+            <a:r>
+              <a:rPr lang="en-US" dirty="0"/>
+              <a:t>Internally DI sees:</a:t>
+            </a:r>
+          </a:p>
+        </p:txBody>
+      </p:sp>
+      <p:sp>
+        <p:nvSpPr>
+          <p:cNvPr id="10" name="TextBox 9">
+            <a:extLst>
+              <a:ext uri="{FF2B5EF4-FFF2-40B4-BE49-F238E27FC236}">
+                <a16:creationId xmlns:a16="http://schemas.microsoft.com/office/drawing/2014/main" id="{7CFBC856-8771-02F6-3D50-EB02FF30FF67}"/>
+              </a:ext>
+            </a:extLst>
+          </p:cNvPr>
+          <p:cNvSpPr txBox="1"/>
+          <p:nvPr/>
+        </p:nvSpPr>
+        <p:spPr>
+          <a:xfrm>
+            <a:off x="2133598" y="1913237"/>
+            <a:ext cx="6810702" cy="369332"/>
+          </a:xfrm>
+          <a:prstGeom prst="rect">
+            <a:avLst/>
+          </a:prstGeom>
+          <a:noFill/>
+        </p:spPr>
+        <p:txBody>
+          <a:bodyPr wrap="square">
+            <a:spAutoFit/>
+          </a:bodyPr>
+          <a:lstStyle/>
+          <a:p>
+            <a:r>
+              <a:rPr lang="en-AU" dirty="0"/>
+              <a:t>Multiple registrations for the </a:t>
+            </a:r>
+            <a:r>
+              <a:rPr lang="en-AU" b="1" dirty="0"/>
+              <a:t>same interface</a:t>
+            </a:r>
+            <a:r>
+              <a:rPr lang="en-AU" dirty="0"/>
+              <a:t>.</a:t>
+            </a:r>
+            <a:endParaRPr lang="en-US" dirty="0"/>
+          </a:p>
+        </p:txBody>
+      </p:sp>
+      <p:sp>
+        <p:nvSpPr>
+          <p:cNvPr id="12" name="TextBox 11">
+            <a:extLst>
+              <a:ext uri="{FF2B5EF4-FFF2-40B4-BE49-F238E27FC236}">
+                <a16:creationId xmlns:a16="http://schemas.microsoft.com/office/drawing/2014/main" id="{176B0064-7DBC-4391-D2E3-9F134727EC74}"/>
+              </a:ext>
+            </a:extLst>
+          </p:cNvPr>
+          <p:cNvSpPr txBox="1"/>
+          <p:nvPr/>
+        </p:nvSpPr>
+        <p:spPr>
+          <a:xfrm>
+            <a:off x="115613" y="3237582"/>
+            <a:ext cx="11414235" cy="1815882"/>
+          </a:xfrm>
+          <a:prstGeom prst="rect">
+            <a:avLst/>
+          </a:prstGeom>
+          <a:noFill/>
+        </p:spPr>
+        <p:txBody>
+          <a:bodyPr wrap="square">
+            <a:spAutoFit/>
+          </a:bodyPr>
+          <a:lstStyle/>
+          <a:p>
+            <a:r>
+              <a:rPr lang="en-US" sz="1600" b="1" dirty="0"/>
+              <a:t>// ❌ Returns only the LAST registered — </a:t>
+            </a:r>
+            <a:r>
+              <a:rPr lang="en-US" sz="1600" b="1" dirty="0" err="1"/>
+              <a:t>EmailQueueService</a:t>
+            </a:r>
+            <a:r>
+              <a:rPr lang="en-US" sz="1600" b="1" dirty="0"/>
+              <a:t> is unreachable</a:t>
+            </a:r>
+          </a:p>
+          <a:p>
+            <a:r>
+              <a:rPr lang="en-US" sz="1600" b="1" dirty="0"/>
+              <a:t>var svc = </a:t>
+            </a:r>
+            <a:r>
+              <a:rPr lang="en-US" sz="1600" b="1" dirty="0" err="1"/>
+              <a:t>app.Services.GetRequiredService</a:t>
+            </a:r>
+            <a:r>
+              <a:rPr lang="en-US" sz="1600" b="1" dirty="0"/>
+              <a:t>&lt;</a:t>
+            </a:r>
+            <a:r>
+              <a:rPr lang="en-US" sz="1600" b="1" dirty="0" err="1"/>
+              <a:t>IHostedService</a:t>
+            </a:r>
+            <a:r>
+              <a:rPr lang="en-US" sz="1600" b="1" dirty="0"/>
+              <a:t>&gt;();</a:t>
+            </a:r>
+          </a:p>
+          <a:p>
+            <a:endParaRPr lang="en-US" sz="1600" b="1" dirty="0"/>
+          </a:p>
+          <a:p>
+            <a:endParaRPr lang="en-US" sz="1600" b="1" dirty="0"/>
+          </a:p>
+          <a:p>
+            <a:r>
+              <a:rPr lang="en-US" sz="1600" b="1" dirty="0"/>
+              <a:t>// ✅ Returns ALL of them</a:t>
+            </a:r>
+          </a:p>
+          <a:p>
+            <a:r>
+              <a:rPr lang="en-US" sz="1600" b="1" dirty="0"/>
+              <a:t>var </a:t>
+            </a:r>
+            <a:r>
+              <a:rPr lang="en-US" sz="1600" b="1" dirty="0" err="1"/>
+              <a:t>allServices</a:t>
+            </a:r>
+            <a:r>
+              <a:rPr lang="en-US" sz="1600" b="1" dirty="0"/>
+              <a:t> = </a:t>
+            </a:r>
+            <a:r>
+              <a:rPr lang="en-US" sz="1600" b="1" dirty="0" err="1"/>
+              <a:t>app.Services.GetServices</a:t>
+            </a:r>
+            <a:r>
+              <a:rPr lang="en-US" sz="1600" b="1" dirty="0"/>
+              <a:t>&lt;</a:t>
+            </a:r>
+            <a:r>
+              <a:rPr lang="en-US" sz="1600" b="1" dirty="0" err="1"/>
+              <a:t>IHostedService</a:t>
+            </a:r>
+            <a:r>
+              <a:rPr lang="en-US" sz="1600" b="1" dirty="0"/>
+              <a:t>&gt;();</a:t>
+            </a:r>
+          </a:p>
+          <a:p>
+            <a:r>
+              <a:rPr lang="en-US" sz="1600" b="1" dirty="0"/>
+              <a:t>// → [</a:t>
+            </a:r>
+            <a:r>
+              <a:rPr lang="en-US" sz="1600" b="1" dirty="0" err="1"/>
+              <a:t>CacheWarmingService</a:t>
+            </a:r>
+            <a:r>
+              <a:rPr lang="en-US" sz="1600" b="1" dirty="0"/>
+              <a:t>, </a:t>
+            </a:r>
+            <a:r>
+              <a:rPr lang="en-US" sz="1600" b="1" dirty="0" err="1"/>
+              <a:t>EmailQueueService</a:t>
+            </a:r>
+            <a:r>
+              <a:rPr lang="en-US" sz="1600" b="1" dirty="0"/>
+              <a:t>, </a:t>
+            </a:r>
+            <a:r>
+              <a:rPr lang="en-US" sz="1600" b="1" dirty="0" err="1"/>
+              <a:t>ReportGeneratorService</a:t>
+            </a:r>
+            <a:r>
+              <a:rPr lang="en-US" sz="1600" b="1" dirty="0"/>
+              <a:t>]</a:t>
+            </a:r>
+          </a:p>
+        </p:txBody>
+      </p:sp>
+      <p:sp>
+        <p:nvSpPr>
+          <p:cNvPr id="14" name="TextBox 13">
+            <a:extLst>
+              <a:ext uri="{FF2B5EF4-FFF2-40B4-BE49-F238E27FC236}">
+                <a16:creationId xmlns:a16="http://schemas.microsoft.com/office/drawing/2014/main" id="{504BC72C-3AE4-D075-FE72-241C0E3981C3}"/>
+              </a:ext>
+            </a:extLst>
+          </p:cNvPr>
+          <p:cNvSpPr txBox="1"/>
+          <p:nvPr/>
+        </p:nvSpPr>
+        <p:spPr>
+          <a:xfrm>
+            <a:off x="262758" y="5145229"/>
+            <a:ext cx="9703953" cy="276999"/>
+          </a:xfrm>
+          <a:prstGeom prst="rect">
+            <a:avLst/>
+          </a:prstGeom>
+          <a:noFill/>
+        </p:spPr>
+        <p:txBody>
+          <a:bodyPr wrap="square">
+            <a:spAutoFit/>
+          </a:bodyPr>
+          <a:lstStyle/>
+          <a:p>
+            <a:r>
+              <a:rPr lang="en-AU" sz="1200" dirty="0"/>
+              <a:t>The .NET Host itself uses </a:t>
+            </a:r>
+            <a:r>
+              <a:rPr lang="en-AU" sz="1200" dirty="0" err="1">
+                <a:latin typeface="Courier New" panose="02070309020205020404" pitchFamily="49" charset="0"/>
+              </a:rPr>
+              <a:t>GetServices</a:t>
+            </a:r>
+            <a:r>
+              <a:rPr lang="en-AU" sz="1200" dirty="0">
+                <a:latin typeface="Courier New" panose="02070309020205020404" pitchFamily="49" charset="0"/>
+              </a:rPr>
+              <a:t>&lt;</a:t>
+            </a:r>
+            <a:r>
+              <a:rPr lang="en-AU" sz="1200" dirty="0" err="1">
+                <a:latin typeface="Courier New" panose="02070309020205020404" pitchFamily="49" charset="0"/>
+              </a:rPr>
+              <a:t>IHostedService</a:t>
+            </a:r>
+            <a:r>
+              <a:rPr lang="en-AU" sz="1200" dirty="0">
+                <a:latin typeface="Courier New" panose="02070309020205020404" pitchFamily="49" charset="0"/>
+              </a:rPr>
+              <a:t>&gt;()</a:t>
+            </a:r>
+            <a:r>
+              <a:rPr lang="en-AU" sz="1200" dirty="0"/>
+              <a:t> internally — that's how it starts </a:t>
+            </a:r>
+            <a:r>
+              <a:rPr lang="en-AU" sz="1200" b="1" dirty="0"/>
+              <a:t>all</a:t>
+            </a:r>
+            <a:r>
+              <a:rPr lang="en-AU" sz="1200" dirty="0"/>
+              <a:t> of them:</a:t>
+            </a:r>
+            <a:endParaRPr lang="en-US" sz="1200" dirty="0"/>
+          </a:p>
+        </p:txBody>
+      </p:sp>
+      <p:sp>
+        <p:nvSpPr>
+          <p:cNvPr id="16" name="TextBox 15">
+            <a:extLst>
+              <a:ext uri="{FF2B5EF4-FFF2-40B4-BE49-F238E27FC236}">
+                <a16:creationId xmlns:a16="http://schemas.microsoft.com/office/drawing/2014/main" id="{0C3C4D43-3EA7-2B68-894D-85EC91D4A642}"/>
+              </a:ext>
+            </a:extLst>
+          </p:cNvPr>
+          <p:cNvSpPr txBox="1"/>
+          <p:nvPr/>
+        </p:nvSpPr>
+        <p:spPr>
+          <a:xfrm>
+            <a:off x="220717" y="5598568"/>
+            <a:ext cx="6810702" cy="1384995"/>
+          </a:xfrm>
+          <a:prstGeom prst="rect">
+            <a:avLst/>
+          </a:prstGeom>
+          <a:noFill/>
+        </p:spPr>
+        <p:txBody>
+          <a:bodyPr wrap="square">
+            <a:spAutoFit/>
+          </a:bodyPr>
+          <a:lstStyle/>
+          <a:p>
+            <a:r>
+              <a:rPr lang="en-US" sz="1200" dirty="0"/>
+              <a:t>// Simplified — what the .NET Host does internally</a:t>
+            </a:r>
+          </a:p>
+          <a:p>
+            <a:r>
+              <a:rPr lang="en-US" sz="1200" dirty="0"/>
+              <a:t>var </a:t>
+            </a:r>
+            <a:r>
+              <a:rPr lang="en-US" sz="1200" dirty="0" err="1"/>
+              <a:t>hostedServices</a:t>
+            </a:r>
+            <a:r>
+              <a:rPr lang="en-US" sz="1200" dirty="0"/>
+              <a:t> = </a:t>
+            </a:r>
+            <a:r>
+              <a:rPr lang="en-US" sz="1200" dirty="0" err="1"/>
+              <a:t>serviceProvider.GetServices</a:t>
+            </a:r>
+            <a:r>
+              <a:rPr lang="en-US" sz="1200" dirty="0"/>
+              <a:t>&lt;</a:t>
+            </a:r>
+            <a:r>
+              <a:rPr lang="en-US" sz="1200" dirty="0" err="1"/>
+              <a:t>IHostedService</a:t>
+            </a:r>
+            <a:r>
+              <a:rPr lang="en-US" sz="1200" dirty="0"/>
+              <a:t>&gt;();</a:t>
+            </a:r>
+          </a:p>
+          <a:p>
+            <a:endParaRPr lang="en-US" sz="1200" dirty="0"/>
+          </a:p>
+          <a:p>
+            <a:r>
+              <a:rPr lang="en-US" sz="1200" dirty="0"/>
+              <a:t>foreach (var service in </a:t>
+            </a:r>
+            <a:r>
+              <a:rPr lang="en-US" sz="1200" dirty="0" err="1"/>
+              <a:t>hostedServices</a:t>
+            </a:r>
+            <a:r>
+              <a:rPr lang="en-US" sz="1200" dirty="0"/>
+              <a:t>)</a:t>
+            </a:r>
+          </a:p>
+          <a:p>
+            <a:r>
+              <a:rPr lang="en-US" sz="1200" dirty="0"/>
+              <a:t>{</a:t>
+            </a:r>
+          </a:p>
+          <a:p>
+            <a:r>
+              <a:rPr lang="en-US" sz="1200" dirty="0"/>
+              <a:t>    await </a:t>
+            </a:r>
+            <a:r>
+              <a:rPr lang="en-US" sz="1200" dirty="0" err="1"/>
+              <a:t>service.StartAsync</a:t>
+            </a:r>
+            <a:r>
+              <a:rPr lang="en-US" sz="1200" dirty="0"/>
+              <a:t>(</a:t>
+            </a:r>
+            <a:r>
+              <a:rPr lang="en-US" sz="1200" dirty="0" err="1"/>
+              <a:t>cancellationToken</a:t>
+            </a:r>
+            <a:r>
+              <a:rPr lang="en-US" sz="1200" dirty="0"/>
+              <a:t>); // starts ALL of them</a:t>
+            </a:r>
+          </a:p>
+          <a:p>
+            <a:r>
+              <a:rPr lang="en-US" sz="1200" dirty="0"/>
+              <a:t>}</a:t>
+            </a:r>
+          </a:p>
+        </p:txBody>
+      </p:sp>
+    </p:spTree>
+    <p:extLst>
+      <p:ext uri="{BB962C8B-B14F-4D97-AF65-F5344CB8AC3E}">
+        <p14:creationId xmlns:p14="http://schemas.microsoft.com/office/powerpoint/2010/main" val="3579555800"/>
+      </p:ext>
+    </p:extLst>
+  </p:cSld>
+  <p:clrMapOvr>
+    <a:masterClrMapping/>
+  </p:clrMapOvr>
+</p:sld>
+</file>
+
+<file path=ppt/slides/slide33.xml><?xml version="1.0" encoding="utf-8"?>
+<p:sld xmlns:a="http://schemas.openxmlformats.org/drawingml/2006/main" xmlns:r="http://schemas.openxmlformats.org/officeDocument/2006/relationships" xmlns:p="http://schemas.openxmlformats.org/presentationml/2006/main">
+  <p:cSld>
+    <p:spTree>
+      <p:nvGrpSpPr>
+        <p:cNvPr id="1" name=""/>
+        <p:cNvGrpSpPr/>
+        <p:nvPr/>
+      </p:nvGrpSpPr>
+      <p:grpSpPr>
+        <a:xfrm>
+          <a:off x="0" y="0"/>
+          <a:ext cx="0" cy="0"/>
+          <a:chOff x="0" y="0"/>
+          <a:chExt cx="0" cy="0"/>
+        </a:xfrm>
+      </p:grpSpPr>
+      <p:sp>
+        <p:nvSpPr>
+          <p:cNvPr id="3" name="TextBox 2">
+            <a:extLst>
+              <a:ext uri="{FF2B5EF4-FFF2-40B4-BE49-F238E27FC236}">
+                <a16:creationId xmlns:a16="http://schemas.microsoft.com/office/drawing/2014/main" id="{1DE9B0EA-7665-CB13-3FA3-5E04D2965710}"/>
+              </a:ext>
+            </a:extLst>
+          </p:cNvPr>
+          <p:cNvSpPr txBox="1"/>
+          <p:nvPr/>
+        </p:nvSpPr>
+        <p:spPr>
+          <a:xfrm>
+            <a:off x="136634" y="1065469"/>
+            <a:ext cx="11477296" cy="3539430"/>
+          </a:xfrm>
+          <a:prstGeom prst="rect">
+            <a:avLst/>
+          </a:prstGeom>
+          <a:noFill/>
+        </p:spPr>
+        <p:txBody>
+          <a:bodyPr wrap="square">
+            <a:spAutoFit/>
+          </a:bodyPr>
+          <a:lstStyle/>
+          <a:p>
+            <a:r>
+              <a:rPr lang="en-US" sz="1600" dirty="0"/>
+              <a:t>// Register each as Singleton AND as </a:t>
+            </a:r>
+            <a:r>
+              <a:rPr lang="en-US" sz="1600" dirty="0" err="1"/>
+              <a:t>IHostedService</a:t>
+            </a:r>
+            <a:endParaRPr lang="en-US" sz="1600" dirty="0"/>
+          </a:p>
+          <a:p>
+            <a:r>
+              <a:rPr lang="en-US" sz="1600" dirty="0" err="1"/>
+              <a:t>builder.Services.AddSingleton</a:t>
+            </a:r>
+            <a:r>
+              <a:rPr lang="en-US" sz="1600" dirty="0"/>
+              <a:t>&lt;</a:t>
+            </a:r>
+            <a:r>
+              <a:rPr lang="en-US" sz="1600" dirty="0" err="1"/>
+              <a:t>CacheWarmingService</a:t>
+            </a:r>
+            <a:r>
+              <a:rPr lang="en-US" sz="1600" dirty="0"/>
+              <a:t>&gt;();</a:t>
+            </a:r>
+          </a:p>
+          <a:p>
+            <a:r>
+              <a:rPr lang="en-US" sz="1600" dirty="0" err="1"/>
+              <a:t>builder.Services.AddSingleton</a:t>
+            </a:r>
+            <a:r>
+              <a:rPr lang="en-US" sz="1600" dirty="0"/>
+              <a:t>&lt;</a:t>
+            </a:r>
+            <a:r>
+              <a:rPr lang="en-US" sz="1600" dirty="0" err="1"/>
+              <a:t>EmailQueueService</a:t>
+            </a:r>
+            <a:r>
+              <a:rPr lang="en-US" sz="1600" dirty="0"/>
+              <a:t>&gt;();</a:t>
+            </a:r>
+          </a:p>
+          <a:p>
+            <a:endParaRPr lang="en-US" sz="1600" dirty="0"/>
+          </a:p>
+          <a:p>
+            <a:r>
+              <a:rPr lang="en-US" sz="1600" dirty="0" err="1"/>
+              <a:t>builder.Services.AddHostedService</a:t>
+            </a:r>
+            <a:r>
+              <a:rPr lang="en-US" sz="1600" dirty="0"/>
+              <a:t>(</a:t>
+            </a:r>
+            <a:r>
+              <a:rPr lang="en-US" sz="1600" dirty="0" err="1"/>
+              <a:t>sp</a:t>
+            </a:r>
+            <a:r>
+              <a:rPr lang="en-US" sz="1600" dirty="0"/>
+              <a:t> =&gt; </a:t>
+            </a:r>
+            <a:r>
+              <a:rPr lang="en-US" sz="1600" dirty="0" err="1"/>
+              <a:t>sp.GetRequiredService</a:t>
+            </a:r>
+            <a:r>
+              <a:rPr lang="en-US" sz="1600" dirty="0"/>
+              <a:t>&lt;</a:t>
+            </a:r>
+            <a:r>
+              <a:rPr lang="en-US" sz="1600" dirty="0" err="1"/>
+              <a:t>CacheWarmingService</a:t>
+            </a:r>
+            <a:r>
+              <a:rPr lang="en-US" sz="1600" dirty="0"/>
+              <a:t>&gt;());</a:t>
+            </a:r>
+          </a:p>
+          <a:p>
+            <a:r>
+              <a:rPr lang="en-US" sz="1600" dirty="0" err="1"/>
+              <a:t>builder.Services.AddHostedService</a:t>
+            </a:r>
+            <a:r>
+              <a:rPr lang="en-US" sz="1600" dirty="0"/>
+              <a:t>(</a:t>
+            </a:r>
+            <a:r>
+              <a:rPr lang="en-US" sz="1600" dirty="0" err="1"/>
+              <a:t>sp</a:t>
+            </a:r>
+            <a:r>
+              <a:rPr lang="en-US" sz="1600" dirty="0"/>
+              <a:t> =&gt; </a:t>
+            </a:r>
+            <a:r>
+              <a:rPr lang="en-US" sz="1600" dirty="0" err="1"/>
+              <a:t>sp.GetRequiredService</a:t>
+            </a:r>
+            <a:r>
+              <a:rPr lang="en-US" sz="1600" dirty="0"/>
+              <a:t>&lt;</a:t>
+            </a:r>
+            <a:r>
+              <a:rPr lang="en-US" sz="1600" dirty="0" err="1"/>
+              <a:t>EmailQueueService</a:t>
+            </a:r>
+            <a:r>
+              <a:rPr lang="en-US" sz="1600" dirty="0"/>
+              <a:t>&gt;());</a:t>
+            </a:r>
+          </a:p>
+          <a:p>
+            <a:endParaRPr lang="en-US" sz="1600" dirty="0"/>
+          </a:p>
+          <a:p>
+            <a:endParaRPr lang="en-US" sz="1600" dirty="0"/>
+          </a:p>
+          <a:p>
+            <a:r>
+              <a:rPr lang="en-US" sz="1600" dirty="0"/>
+              <a:t>// Now you can resolve each specifically by its own type</a:t>
+            </a:r>
+          </a:p>
+          <a:p>
+            <a:r>
+              <a:rPr lang="en-US" sz="1600" dirty="0"/>
+              <a:t>var </a:t>
+            </a:r>
+            <a:r>
+              <a:rPr lang="en-US" sz="1600" dirty="0" err="1"/>
+              <a:t>cacheSvc</a:t>
+            </a:r>
+            <a:r>
+              <a:rPr lang="en-US" sz="1600" dirty="0"/>
+              <a:t> = </a:t>
+            </a:r>
+            <a:r>
+              <a:rPr lang="en-US" sz="1600" dirty="0" err="1"/>
+              <a:t>app.Services.GetRequiredService</a:t>
+            </a:r>
+            <a:r>
+              <a:rPr lang="en-US" sz="1600" dirty="0"/>
+              <a:t>&lt;</a:t>
+            </a:r>
+            <a:r>
+              <a:rPr lang="en-US" sz="1600" dirty="0" err="1"/>
+              <a:t>CacheWarmingService</a:t>
+            </a:r>
+            <a:r>
+              <a:rPr lang="en-US" sz="1600" dirty="0"/>
+              <a:t>&gt;();  // ✅</a:t>
+            </a:r>
+          </a:p>
+          <a:p>
+            <a:r>
+              <a:rPr lang="en-US" sz="1600" dirty="0"/>
+              <a:t>var </a:t>
+            </a:r>
+            <a:r>
+              <a:rPr lang="en-US" sz="1600" dirty="0" err="1"/>
+              <a:t>emailSvc</a:t>
+            </a:r>
+            <a:r>
+              <a:rPr lang="en-US" sz="1600" dirty="0"/>
+              <a:t> = </a:t>
+            </a:r>
+            <a:r>
+              <a:rPr lang="en-US" sz="1600" dirty="0" err="1"/>
+              <a:t>app.Services.GetRequiredService</a:t>
+            </a:r>
+            <a:r>
+              <a:rPr lang="en-US" sz="1600" dirty="0"/>
+              <a:t>&lt;</a:t>
+            </a:r>
+            <a:r>
+              <a:rPr lang="en-US" sz="1600" dirty="0" err="1"/>
+              <a:t>EmailQueueService</a:t>
+            </a:r>
+            <a:r>
+              <a:rPr lang="en-US" sz="1600" dirty="0"/>
+              <a:t>&gt;();    // ✅</a:t>
+            </a:r>
+          </a:p>
+          <a:p>
+            <a:endParaRPr lang="en-US" sz="1600" dirty="0"/>
+          </a:p>
+          <a:p>
+            <a:r>
+              <a:rPr lang="en-US" sz="1600" dirty="0"/>
+              <a:t>// Or get all hosted services</a:t>
+            </a:r>
+          </a:p>
+          <a:p>
+            <a:r>
+              <a:rPr lang="en-US" sz="1600" dirty="0"/>
+              <a:t>var all = </a:t>
+            </a:r>
+            <a:r>
+              <a:rPr lang="en-US" sz="1600" dirty="0" err="1"/>
+              <a:t>app.Services.GetServices</a:t>
+            </a:r>
+            <a:r>
+              <a:rPr lang="en-US" sz="1600" dirty="0"/>
+              <a:t>&lt;</a:t>
+            </a:r>
+            <a:r>
+              <a:rPr lang="en-US" sz="1600" dirty="0" err="1"/>
+              <a:t>IHostedService</a:t>
+            </a:r>
+            <a:r>
+              <a:rPr lang="en-US" sz="1600" dirty="0"/>
+              <a:t>&gt;();                   // ✅ all 2</a:t>
+            </a:r>
+          </a:p>
+        </p:txBody>
+      </p:sp>
+      <p:sp>
+        <p:nvSpPr>
+          <p:cNvPr id="5" name="TextBox 4">
+            <a:extLst>
+              <a:ext uri="{FF2B5EF4-FFF2-40B4-BE49-F238E27FC236}">
+                <a16:creationId xmlns:a16="http://schemas.microsoft.com/office/drawing/2014/main" id="{68ED7BA2-A3BD-A624-B9E0-CA72EEA7E828}"/>
+              </a:ext>
+            </a:extLst>
+          </p:cNvPr>
+          <p:cNvSpPr txBox="1"/>
+          <p:nvPr/>
+        </p:nvSpPr>
+        <p:spPr>
+          <a:xfrm>
+            <a:off x="136634" y="247783"/>
+            <a:ext cx="12055365" cy="646331"/>
+          </a:xfrm>
+          <a:prstGeom prst="rect">
+            <a:avLst/>
+          </a:prstGeom>
+          <a:noFill/>
+        </p:spPr>
+        <p:txBody>
+          <a:bodyPr wrap="square">
+            <a:spAutoFit/>
+          </a:bodyPr>
+          <a:lstStyle/>
+          <a:p>
+            <a:pPr>
+              <a:buNone/>
+            </a:pPr>
+            <a:r>
+              <a:rPr lang="en-AU" b="1" dirty="0"/>
+              <a:t>Resolving a Specific Service by Type</a:t>
+            </a:r>
+          </a:p>
+          <a:p>
+            <a:pPr>
+              <a:buNone/>
+            </a:pPr>
+            <a:r>
+              <a:rPr lang="en-AU" dirty="0"/>
+              <a:t>If you need one specific service directly, use the pattern from before — register as Singleton first:</a:t>
+            </a:r>
+          </a:p>
+        </p:txBody>
+      </p:sp>
+    </p:spTree>
+    <p:extLst>
+      <p:ext uri="{BB962C8B-B14F-4D97-AF65-F5344CB8AC3E}">
+        <p14:creationId xmlns:p14="http://schemas.microsoft.com/office/powerpoint/2010/main" val="1398897719"/>
+      </p:ext>
+    </p:extLst>
+  </p:cSld>
+  <p:clrMapOvr>
+    <a:masterClrMapping/>
+  </p:clrMapOvr>
+</p:sld>
+</file>
+
+<file path=ppt/slides/slide34.xml><?xml version="1.0" encoding="utf-8"?>
+<p:sld xmlns:a="http://schemas.openxmlformats.org/drawingml/2006/main" xmlns:r="http://schemas.openxmlformats.org/officeDocument/2006/relationships" xmlns:p="http://schemas.openxmlformats.org/presentationml/2006/main">
+  <p:cSld>
+    <p:spTree>
+      <p:nvGrpSpPr>
+        <p:cNvPr id="1" name=""/>
+        <p:cNvGrpSpPr/>
+        <p:nvPr/>
+      </p:nvGrpSpPr>
+      <p:grpSpPr>
+        <a:xfrm>
+          <a:off x="0" y="0"/>
+          <a:ext cx="0" cy="0"/>
+          <a:chOff x="0" y="0"/>
+          <a:chExt cx="0" cy="0"/>
+        </a:xfrm>
+      </p:grpSpPr>
+      <p:pic>
+        <p:nvPicPr>
+          <p:cNvPr id="3" name="Picture 2">
+            <a:extLst>
+              <a:ext uri="{FF2B5EF4-FFF2-40B4-BE49-F238E27FC236}">
+                <a16:creationId xmlns:a16="http://schemas.microsoft.com/office/drawing/2014/main" id="{4DCD5A66-11F8-6DE5-299D-C9089DC2801B}"/>
+              </a:ext>
+            </a:extLst>
+          </p:cNvPr>
+          <p:cNvPicPr>
+            <a:picLocks noChangeAspect="1"/>
+          </p:cNvPicPr>
+          <p:nvPr/>
+        </p:nvPicPr>
+        <p:blipFill>
+          <a:blip r:embed="rId2"/>
+          <a:stretch>
+            <a:fillRect/>
+          </a:stretch>
+        </p:blipFill>
+        <p:spPr>
+          <a:xfrm>
+            <a:off x="21025" y="10509"/>
+            <a:ext cx="12192000" cy="6858000"/>
+          </a:xfrm>
+          <a:prstGeom prst="rect">
+            <a:avLst/>
+          </a:prstGeom>
+        </p:spPr>
+      </p:pic>
+      <p:sp>
+        <p:nvSpPr>
+          <p:cNvPr id="4" name="Oval 3">
+            <a:extLst>
+              <a:ext uri="{FF2B5EF4-FFF2-40B4-BE49-F238E27FC236}">
+                <a16:creationId xmlns:a16="http://schemas.microsoft.com/office/drawing/2014/main" id="{BCC70A8C-75DF-F0A6-02C6-6F44DBF8D8D9}"/>
+              </a:ext>
+            </a:extLst>
+          </p:cNvPr>
+          <p:cNvSpPr/>
+          <p:nvPr/>
+        </p:nvSpPr>
+        <p:spPr>
+          <a:xfrm>
+            <a:off x="4016829" y="3842657"/>
+            <a:ext cx="1415142" cy="424543"/>
+          </a:xfrm>
+          <a:prstGeom prst="ellipse">
+            <a:avLst/>
+          </a:prstGeom>
+          <a:noFill/>
+          <a:ln>
+            <a:solidFill>
+              <a:srgbClr val="FF0000"/>
+            </a:solidFill>
+          </a:ln>
+        </p:spPr>
+        <p:style>
+          <a:lnRef idx="2">
+            <a:schemeClr val="accent1">
+              <a:shade val="15000"/>
+            </a:schemeClr>
+          </a:lnRef>
+          <a:fillRef idx="1">
+            <a:schemeClr val="accent1"/>
+          </a:fillRef>
+          <a:effectRef idx="0">
+            <a:schemeClr val="accent1"/>
+          </a:effectRef>
+          <a:fontRef idx="minor">
+            <a:schemeClr val="lt1"/>
+          </a:fontRef>
+        </p:style>
+        <p:txBody>
+          <a:bodyPr rtlCol="0" anchor="ctr"/>
+          <a:lstStyle/>
+          <a:p>
+            <a:pPr algn="ctr"/>
+            <a:endParaRPr lang="en-US"/>
+          </a:p>
+        </p:txBody>
+      </p:sp>
+      <p:sp>
+        <p:nvSpPr>
+          <p:cNvPr id="5" name="Oval 4">
+            <a:extLst>
+              <a:ext uri="{FF2B5EF4-FFF2-40B4-BE49-F238E27FC236}">
+                <a16:creationId xmlns:a16="http://schemas.microsoft.com/office/drawing/2014/main" id="{A186A3FE-F229-39A1-E355-13C2BEBD5DDE}"/>
+              </a:ext>
+            </a:extLst>
+          </p:cNvPr>
+          <p:cNvSpPr/>
+          <p:nvPr/>
+        </p:nvSpPr>
+        <p:spPr>
+          <a:xfrm>
+            <a:off x="4810358" y="221848"/>
+            <a:ext cx="1415142" cy="424543"/>
+          </a:xfrm>
+          <a:prstGeom prst="ellipse">
+            <a:avLst/>
+          </a:prstGeom>
+          <a:noFill/>
+          <a:ln>
+            <a:solidFill>
+              <a:srgbClr val="FF0000"/>
+            </a:solidFill>
+          </a:ln>
+        </p:spPr>
+        <p:style>
+          <a:lnRef idx="2">
+            <a:schemeClr val="accent1">
+              <a:shade val="15000"/>
+            </a:schemeClr>
+          </a:lnRef>
+          <a:fillRef idx="1">
+            <a:schemeClr val="accent1"/>
+          </a:fillRef>
+          <a:effectRef idx="0">
+            <a:schemeClr val="accent1"/>
+          </a:effectRef>
+          <a:fontRef idx="minor">
+            <a:schemeClr val="lt1"/>
+          </a:fontRef>
+        </p:style>
+        <p:txBody>
+          <a:bodyPr rtlCol="0" anchor="ctr"/>
+          <a:lstStyle/>
+          <a:p>
+            <a:pPr algn="ctr"/>
+            <a:endParaRPr lang="en-US"/>
+          </a:p>
+        </p:txBody>
+      </p:sp>
+      <p:sp>
+        <p:nvSpPr>
+          <p:cNvPr id="6" name="Oval 5">
+            <a:extLst>
+              <a:ext uri="{FF2B5EF4-FFF2-40B4-BE49-F238E27FC236}">
+                <a16:creationId xmlns:a16="http://schemas.microsoft.com/office/drawing/2014/main" id="{5CD3FB1F-72C1-94A4-A6AB-5C0C548B6738}"/>
+              </a:ext>
+            </a:extLst>
+          </p:cNvPr>
+          <p:cNvSpPr/>
+          <p:nvPr/>
+        </p:nvSpPr>
+        <p:spPr>
+          <a:xfrm>
+            <a:off x="1460938" y="1262375"/>
+            <a:ext cx="2315657" cy="608466"/>
+          </a:xfrm>
+          <a:prstGeom prst="ellipse">
+            <a:avLst/>
+          </a:prstGeom>
+          <a:noFill/>
+          <a:ln>
+            <a:solidFill>
+              <a:srgbClr val="FF0000"/>
+            </a:solidFill>
+          </a:ln>
+        </p:spPr>
+        <p:style>
+          <a:lnRef idx="2">
+            <a:schemeClr val="accent1">
+              <a:shade val="15000"/>
+            </a:schemeClr>
+          </a:lnRef>
+          <a:fillRef idx="1">
+            <a:schemeClr val="accent1"/>
+          </a:fillRef>
+          <a:effectRef idx="0">
+            <a:schemeClr val="accent1"/>
+          </a:effectRef>
+          <a:fontRef idx="minor">
+            <a:schemeClr val="lt1"/>
+          </a:fontRef>
+        </p:style>
+        <p:txBody>
+          <a:bodyPr rtlCol="0" anchor="ctr"/>
+          <a:lstStyle/>
+          <a:p>
+            <a:pPr algn="ctr"/>
+            <a:endParaRPr lang="en-US"/>
+          </a:p>
+        </p:txBody>
+      </p:sp>
+      <p:sp>
+        <p:nvSpPr>
+          <p:cNvPr id="7" name="Oval 6">
+            <a:extLst>
+              <a:ext uri="{FF2B5EF4-FFF2-40B4-BE49-F238E27FC236}">
+                <a16:creationId xmlns:a16="http://schemas.microsoft.com/office/drawing/2014/main" id="{F5418774-9AB3-2D54-F40C-082054CC2D92}"/>
+              </a:ext>
+            </a:extLst>
+          </p:cNvPr>
+          <p:cNvSpPr/>
+          <p:nvPr/>
+        </p:nvSpPr>
+        <p:spPr>
+          <a:xfrm>
+            <a:off x="210207" y="3429000"/>
+            <a:ext cx="2554014" cy="1279633"/>
+          </a:xfrm>
+          <a:prstGeom prst="ellipse">
+            <a:avLst/>
+          </a:prstGeom>
+          <a:noFill/>
+          <a:ln>
+            <a:solidFill>
+              <a:srgbClr val="FF0000"/>
+            </a:solidFill>
+          </a:ln>
+        </p:spPr>
+        <p:style>
+          <a:lnRef idx="2">
+            <a:schemeClr val="accent1">
+              <a:shade val="15000"/>
+            </a:schemeClr>
+          </a:lnRef>
+          <a:fillRef idx="1">
+            <a:schemeClr val="accent1"/>
+          </a:fillRef>
+          <a:effectRef idx="0">
+            <a:schemeClr val="accent1"/>
+          </a:effectRef>
+          <a:fontRef idx="minor">
+            <a:schemeClr val="lt1"/>
+          </a:fontRef>
+        </p:style>
+        <p:txBody>
+          <a:bodyPr rtlCol="0" anchor="ctr"/>
+          <a:lstStyle/>
+          <a:p>
+            <a:pPr algn="ctr"/>
+            <a:endParaRPr lang="en-US"/>
+          </a:p>
+        </p:txBody>
+      </p:sp>
+    </p:spTree>
+    <p:extLst>
+      <p:ext uri="{BB962C8B-B14F-4D97-AF65-F5344CB8AC3E}">
+        <p14:creationId xmlns:p14="http://schemas.microsoft.com/office/powerpoint/2010/main" val="99336365"/>
       </p:ext>
     </p:extLst>
   </p:cSld>
